--- a/docs/新システム移行説明会_rev3.pptx
+++ b/docs/新システム移行説明会_rev3.pptx
@@ -27,9 +27,13 @@
     <p:sldId id="275" r:id="rId21"/>
     <p:sldId id="276" r:id="rId22"/>
     <p:sldId id="277" r:id="rId23"/>
+    <p:sldId id="278" r:id="rId24"/>
+    <p:sldId id="279" r:id="rId25"/>
+    <p:sldId id="280" r:id="rId26"/>
+    <p:sldId id="281" r:id="rId27"/>
   </p:sldIdLst>
   <p:notesMasterIdLst>
-    <p:notesMasterId r:id="rId24"/>
+    <p:notesMasterId r:id="rId28"/>
   </p:notesMasterIdLst>
   <p:sldSz cx="12192000" cy="6858000"/>
   <p:notesSz cx="6858000" cy="12192000"/>
@@ -1797,6 +1801,358 @@
 </p:notes>
 </file>
 
+<file path=ppt/notesSlides/notesSlide23.xml><?xml version="1.0" encoding="utf-8"?>
+<p:notes xmlns:a="http://schemas.openxmlformats.org/drawingml/2006/main" xmlns:r="http://schemas.openxmlformats.org/officeDocument/2006/relationships" xmlns:p="http://schemas.openxmlformats.org/presentationml/2006/main">
+  <p:cSld>
+    <p:spTree>
+      <p:nvGrpSpPr>
+        <p:cNvPr id="1" name=""/>
+        <p:cNvGrpSpPr/>
+        <p:nvPr/>
+      </p:nvGrpSpPr>
+      <p:grpSpPr>
+        <a:xfrm>
+          <a:off x="0" y="0"/>
+          <a:ext cx="0" cy="0"/>
+          <a:chOff x="0" y="0"/>
+          <a:chExt cx="0" cy="0"/>
+        </a:xfrm>
+      </p:grpSpPr>
+      <p:sp>
+        <p:nvSpPr>
+          <p:cNvPr id="2" name="Slide Image Placeholder 1"/>
+          <p:cNvSpPr>
+            <a:spLocks noGrp="1" noRot="1" noChangeAspect="1"/>
+          </p:cNvSpPr>
+          <p:nvPr>
+            <p:ph type="sldImg"/>
+          </p:nvPr>
+        </p:nvSpPr>
+        <p:spPr/>
+      </p:sp>
+      <p:sp>
+        <p:nvSpPr>
+          <p:cNvPr id="3" name="Notes Placeholder 2"/>
+          <p:cNvSpPr>
+            <a:spLocks noGrp="1"/>
+          </p:cNvSpPr>
+          <p:nvPr>
+            <p:ph type="body" idx="1"/>
+          </p:nvPr>
+        </p:nvSpPr>
+        <p:spPr/>
+        <p:txBody>
+          <a:bodyPr/>
+          <a:lstStyle/>
+          <a:p>
+            <a:r>
+              <a:rPr lang="en-US" dirty="0"/>
+              <a:t/>
+            </a:r>
+            <a:endParaRPr lang="en-US" dirty="0"/>
+          </a:p>
+        </p:txBody>
+      </p:sp>
+      <p:sp>
+        <p:nvSpPr>
+          <p:cNvPr id="4" name="Slide Number Placeholder 3"/>
+          <p:cNvSpPr>
+            <a:spLocks noGrp="1"/>
+          </p:cNvSpPr>
+          <p:nvPr>
+            <p:ph type="sldNum" sz="quarter" idx="10"/>
+          </p:nvPr>
+        </p:nvSpPr>
+        <p:spPr/>
+        <p:txBody>
+          <a:bodyPr/>
+          <a:lstStyle/>
+          <a:p>
+            <a:fld id="{F7021451-1387-4CA6-816F-3879F97B5CBC}" type="slidenum">
+              <a:rPr lang="en-US"/>
+              <a:t>23</a:t>
+            </a:fld>
+            <a:endParaRPr lang="en-US"/>
+          </a:p>
+        </p:txBody>
+      </p:sp>
+    </p:spTree>
+    <p:extLst>
+      <p:ext uri="{BB962C8B-B14F-4D97-AF65-F5344CB8AC3E}">
+        <p14:creationId xmlns:p14="http://schemas.microsoft.com/office/powerpoint/2010/main" val="1024086991"/>
+      </p:ext>
+    </p:extLst>
+  </p:cSld>
+  <p:clrMapOvr>
+    <a:masterClrMapping/>
+  </p:clrMapOvr>
+</p:notes>
+</file>
+
+<file path=ppt/notesSlides/notesSlide24.xml><?xml version="1.0" encoding="utf-8"?>
+<p:notes xmlns:a="http://schemas.openxmlformats.org/drawingml/2006/main" xmlns:r="http://schemas.openxmlformats.org/officeDocument/2006/relationships" xmlns:p="http://schemas.openxmlformats.org/presentationml/2006/main">
+  <p:cSld>
+    <p:spTree>
+      <p:nvGrpSpPr>
+        <p:cNvPr id="1" name=""/>
+        <p:cNvGrpSpPr/>
+        <p:nvPr/>
+      </p:nvGrpSpPr>
+      <p:grpSpPr>
+        <a:xfrm>
+          <a:off x="0" y="0"/>
+          <a:ext cx="0" cy="0"/>
+          <a:chOff x="0" y="0"/>
+          <a:chExt cx="0" cy="0"/>
+        </a:xfrm>
+      </p:grpSpPr>
+      <p:sp>
+        <p:nvSpPr>
+          <p:cNvPr id="2" name="Slide Image Placeholder 1"/>
+          <p:cNvSpPr>
+            <a:spLocks noGrp="1" noRot="1" noChangeAspect="1"/>
+          </p:cNvSpPr>
+          <p:nvPr>
+            <p:ph type="sldImg"/>
+          </p:nvPr>
+        </p:nvSpPr>
+        <p:spPr/>
+      </p:sp>
+      <p:sp>
+        <p:nvSpPr>
+          <p:cNvPr id="3" name="Notes Placeholder 2"/>
+          <p:cNvSpPr>
+            <a:spLocks noGrp="1"/>
+          </p:cNvSpPr>
+          <p:nvPr>
+            <p:ph type="body" idx="1"/>
+          </p:nvPr>
+        </p:nvSpPr>
+        <p:spPr/>
+        <p:txBody>
+          <a:bodyPr/>
+          <a:lstStyle/>
+          <a:p>
+            <a:r>
+              <a:rPr lang="en-US" dirty="0"/>
+              <a:t/>
+            </a:r>
+            <a:endParaRPr lang="en-US" dirty="0"/>
+          </a:p>
+        </p:txBody>
+      </p:sp>
+      <p:sp>
+        <p:nvSpPr>
+          <p:cNvPr id="4" name="Slide Number Placeholder 3"/>
+          <p:cNvSpPr>
+            <a:spLocks noGrp="1"/>
+          </p:cNvSpPr>
+          <p:nvPr>
+            <p:ph type="sldNum" sz="quarter" idx="10"/>
+          </p:nvPr>
+        </p:nvSpPr>
+        <p:spPr/>
+        <p:txBody>
+          <a:bodyPr/>
+          <a:lstStyle/>
+          <a:p>
+            <a:fld id="{F7021451-1387-4CA6-816F-3879F97B5CBC}" type="slidenum">
+              <a:rPr lang="en-US"/>
+              <a:t>24</a:t>
+            </a:fld>
+            <a:endParaRPr lang="en-US"/>
+          </a:p>
+        </p:txBody>
+      </p:sp>
+    </p:spTree>
+    <p:extLst>
+      <p:ext uri="{BB962C8B-B14F-4D97-AF65-F5344CB8AC3E}">
+        <p14:creationId xmlns:p14="http://schemas.microsoft.com/office/powerpoint/2010/main" val="1024086991"/>
+      </p:ext>
+    </p:extLst>
+  </p:cSld>
+  <p:clrMapOvr>
+    <a:masterClrMapping/>
+  </p:clrMapOvr>
+</p:notes>
+</file>
+
+<file path=ppt/notesSlides/notesSlide25.xml><?xml version="1.0" encoding="utf-8"?>
+<p:notes xmlns:a="http://schemas.openxmlformats.org/drawingml/2006/main" xmlns:r="http://schemas.openxmlformats.org/officeDocument/2006/relationships" xmlns:p="http://schemas.openxmlformats.org/presentationml/2006/main">
+  <p:cSld>
+    <p:spTree>
+      <p:nvGrpSpPr>
+        <p:cNvPr id="1" name=""/>
+        <p:cNvGrpSpPr/>
+        <p:nvPr/>
+      </p:nvGrpSpPr>
+      <p:grpSpPr>
+        <a:xfrm>
+          <a:off x="0" y="0"/>
+          <a:ext cx="0" cy="0"/>
+          <a:chOff x="0" y="0"/>
+          <a:chExt cx="0" cy="0"/>
+        </a:xfrm>
+      </p:grpSpPr>
+      <p:sp>
+        <p:nvSpPr>
+          <p:cNvPr id="2" name="Slide Image Placeholder 1"/>
+          <p:cNvSpPr>
+            <a:spLocks noGrp="1" noRot="1" noChangeAspect="1"/>
+          </p:cNvSpPr>
+          <p:nvPr>
+            <p:ph type="sldImg"/>
+          </p:nvPr>
+        </p:nvSpPr>
+        <p:spPr/>
+      </p:sp>
+      <p:sp>
+        <p:nvSpPr>
+          <p:cNvPr id="3" name="Notes Placeholder 2"/>
+          <p:cNvSpPr>
+            <a:spLocks noGrp="1"/>
+          </p:cNvSpPr>
+          <p:nvPr>
+            <p:ph type="body" idx="1"/>
+          </p:nvPr>
+        </p:nvSpPr>
+        <p:spPr/>
+        <p:txBody>
+          <a:bodyPr/>
+          <a:lstStyle/>
+          <a:p>
+            <a:r>
+              <a:rPr lang="en-US" dirty="0"/>
+              <a:t/>
+            </a:r>
+            <a:endParaRPr lang="en-US" dirty="0"/>
+          </a:p>
+        </p:txBody>
+      </p:sp>
+      <p:sp>
+        <p:nvSpPr>
+          <p:cNvPr id="4" name="Slide Number Placeholder 3"/>
+          <p:cNvSpPr>
+            <a:spLocks noGrp="1"/>
+          </p:cNvSpPr>
+          <p:nvPr>
+            <p:ph type="sldNum" sz="quarter" idx="10"/>
+          </p:nvPr>
+        </p:nvSpPr>
+        <p:spPr/>
+        <p:txBody>
+          <a:bodyPr/>
+          <a:lstStyle/>
+          <a:p>
+            <a:fld id="{F7021451-1387-4CA6-816F-3879F97B5CBC}" type="slidenum">
+              <a:rPr lang="en-US"/>
+              <a:t>25</a:t>
+            </a:fld>
+            <a:endParaRPr lang="en-US"/>
+          </a:p>
+        </p:txBody>
+      </p:sp>
+    </p:spTree>
+    <p:extLst>
+      <p:ext uri="{BB962C8B-B14F-4D97-AF65-F5344CB8AC3E}">
+        <p14:creationId xmlns:p14="http://schemas.microsoft.com/office/powerpoint/2010/main" val="1024086991"/>
+      </p:ext>
+    </p:extLst>
+  </p:cSld>
+  <p:clrMapOvr>
+    <a:masterClrMapping/>
+  </p:clrMapOvr>
+</p:notes>
+</file>
+
+<file path=ppt/notesSlides/notesSlide26.xml><?xml version="1.0" encoding="utf-8"?>
+<p:notes xmlns:a="http://schemas.openxmlformats.org/drawingml/2006/main" xmlns:r="http://schemas.openxmlformats.org/officeDocument/2006/relationships" xmlns:p="http://schemas.openxmlformats.org/presentationml/2006/main">
+  <p:cSld>
+    <p:spTree>
+      <p:nvGrpSpPr>
+        <p:cNvPr id="1" name=""/>
+        <p:cNvGrpSpPr/>
+        <p:nvPr/>
+      </p:nvGrpSpPr>
+      <p:grpSpPr>
+        <a:xfrm>
+          <a:off x="0" y="0"/>
+          <a:ext cx="0" cy="0"/>
+          <a:chOff x="0" y="0"/>
+          <a:chExt cx="0" cy="0"/>
+        </a:xfrm>
+      </p:grpSpPr>
+      <p:sp>
+        <p:nvSpPr>
+          <p:cNvPr id="2" name="Slide Image Placeholder 1"/>
+          <p:cNvSpPr>
+            <a:spLocks noGrp="1" noRot="1" noChangeAspect="1"/>
+          </p:cNvSpPr>
+          <p:nvPr>
+            <p:ph type="sldImg"/>
+          </p:nvPr>
+        </p:nvSpPr>
+        <p:spPr/>
+      </p:sp>
+      <p:sp>
+        <p:nvSpPr>
+          <p:cNvPr id="3" name="Notes Placeholder 2"/>
+          <p:cNvSpPr>
+            <a:spLocks noGrp="1"/>
+          </p:cNvSpPr>
+          <p:nvPr>
+            <p:ph type="body" idx="1"/>
+          </p:nvPr>
+        </p:nvSpPr>
+        <p:spPr/>
+        <p:txBody>
+          <a:bodyPr/>
+          <a:lstStyle/>
+          <a:p>
+            <a:r>
+              <a:rPr lang="en-US" dirty="0"/>
+              <a:t/>
+            </a:r>
+            <a:endParaRPr lang="en-US" dirty="0"/>
+          </a:p>
+        </p:txBody>
+      </p:sp>
+      <p:sp>
+        <p:nvSpPr>
+          <p:cNvPr id="4" name="Slide Number Placeholder 3"/>
+          <p:cNvSpPr>
+            <a:spLocks noGrp="1"/>
+          </p:cNvSpPr>
+          <p:nvPr>
+            <p:ph type="sldNum" sz="quarter" idx="10"/>
+          </p:nvPr>
+        </p:nvSpPr>
+        <p:spPr/>
+        <p:txBody>
+          <a:bodyPr/>
+          <a:lstStyle/>
+          <a:p>
+            <a:fld id="{F7021451-1387-4CA6-816F-3879F97B5CBC}" type="slidenum">
+              <a:rPr lang="en-US"/>
+              <a:t>26</a:t>
+            </a:fld>
+            <a:endParaRPr lang="en-US"/>
+          </a:p>
+        </p:txBody>
+      </p:sp>
+    </p:spTree>
+    <p:extLst>
+      <p:ext uri="{BB962C8B-B14F-4D97-AF65-F5344CB8AC3E}">
+        <p14:creationId xmlns:p14="http://schemas.microsoft.com/office/powerpoint/2010/main" val="1024086991"/>
+      </p:ext>
+    </p:extLst>
+  </p:cSld>
+  <p:clrMapOvr>
+    <a:masterClrMapping/>
+  </p:clrMapOvr>
+</p:notes>
+</file>
+
 <file path=ppt/notesSlides/notesSlide3.xml><?xml version="1.0" encoding="utf-8"?>
 <p:notes xmlns:a="http://schemas.openxmlformats.org/drawingml/2006/main" xmlns:r="http://schemas.openxmlformats.org/officeDocument/2006/relationships" xmlns:p="http://schemas.openxmlformats.org/presentationml/2006/main">
   <p:cSld>
@@ -9107,7 +9463,7 @@
     <p:bg>
       <p:bgPr>
         <a:solidFill>
-          <a:srgbClr val="11173A"/>
+          <a:srgbClr val="FFFFFF"/>
         </a:solidFill>
       </p:bgPr>
     </p:bg>
@@ -9133,28 +9489,979 @@
         </p:nvSpPr>
         <p:spPr>
           <a:xfrm>
-            <a:off x="8961120" y="3291840"/>
-            <a:ext cx="5029200" cy="5029200"/>
-          </a:xfrm>
-          <a:prstGeom prst="ellipse">
-            <a:avLst/>
+            <a:off x="640080" y="502920"/>
+            <a:ext cx="201168" cy="201168"/>
+          </a:xfrm>
+          <a:prstGeom prst="roundRect">
+            <a:avLst>
+              <a:gd name="adj" fmla="val 22727"/>
+            </a:avLst>
+          </a:prstGeom>
+          <a:solidFill>
+            <a:srgbClr val="E0A64B"/>
+          </a:solidFill>
+          <a:ln/>
+        </p:spPr>
+      </p:sp>
+      <p:sp>
+        <p:nvSpPr>
+          <p:cNvPr id="3" name="Text 1"/>
+          <p:cNvSpPr/>
+          <p:nvPr/>
+        </p:nvSpPr>
+        <p:spPr>
+          <a:xfrm>
+            <a:off x="978408" y="411480"/>
+            <a:ext cx="10058400" cy="329184"/>
+          </a:xfrm>
+          <a:prstGeom prst="rect">
+            <a:avLst/>
+          </a:prstGeom>
+          <a:noFill/>
+          <a:ln/>
+        </p:spPr>
+        <p:txBody>
+          <a:bodyPr wrap="square" lIns="0" tIns="0" rIns="0" bIns="0" rtlCol="0" anchor="ctr"/>
+          <a:lstStyle/>
+          <a:p>
+            <a:pPr indent="0" marL="0">
+              <a:buNone/>
+            </a:pPr>
+            <a:r>
+              <a:rPr lang="en-US" sz="1200" b="1" spc="250" kern="0" dirty="0">
+                <a:solidFill>
+                  <a:srgbClr val="4F46E5"/>
+                </a:solidFill>
+                <a:latin typeface="Meiryo" pitchFamily="34" charset="0"/>
+                <a:ea typeface="Meiryo" pitchFamily="34" charset="-122"/>
+                <a:cs typeface="Meiryo" pitchFamily="34" charset="-120"/>
+              </a:rPr>
+              <a:t>NOTIFICATION</a:t>
+            </a:r>
+            <a:endParaRPr lang="en-US" sz="1200" dirty="0"/>
+          </a:p>
+        </p:txBody>
+      </p:sp>
+      <p:sp>
+        <p:nvSpPr>
+          <p:cNvPr id="4" name="Text 2"/>
+          <p:cNvSpPr/>
+          <p:nvPr/>
+        </p:nvSpPr>
+        <p:spPr>
+          <a:xfrm>
+            <a:off x="640080" y="795528"/>
+            <a:ext cx="11247120" cy="713232"/>
+          </a:xfrm>
+          <a:prstGeom prst="rect">
+            <a:avLst/>
+          </a:prstGeom>
+          <a:noFill/>
+          <a:ln/>
+        </p:spPr>
+        <p:txBody>
+          <a:bodyPr wrap="square" lIns="0" tIns="0" rIns="0" bIns="0" rtlCol="0" anchor="ctr"/>
+          <a:lstStyle/>
+          <a:p>
+            <a:pPr indent="0" marL="0">
+              <a:buNone/>
+            </a:pPr>
+            <a:r>
+              <a:rPr lang="en-US" sz="3000" b="1" dirty="0">
+                <a:solidFill>
+                  <a:srgbClr val="141A33"/>
+                </a:solidFill>
+                <a:latin typeface="Meiryo" pitchFamily="34" charset="0"/>
+                <a:ea typeface="Meiryo" pitchFamily="34" charset="-122"/>
+                <a:cs typeface="Meiryo" pitchFamily="34" charset="-120"/>
+              </a:rPr>
+              <a:t>通知の動き — 口頭で終わらせず、必要な人へ届く</a:t>
+            </a:r>
+            <a:endParaRPr lang="en-US" sz="3000" dirty="0"/>
+          </a:p>
+        </p:txBody>
+      </p:sp>
+      <p:sp>
+        <p:nvSpPr>
+          <p:cNvPr id="5" name="Text 3"/>
+          <p:cNvSpPr/>
+          <p:nvPr/>
+        </p:nvSpPr>
+        <p:spPr>
+          <a:xfrm>
+            <a:off x="640080" y="1426464"/>
+            <a:ext cx="11155680" cy="365760"/>
+          </a:xfrm>
+          <a:prstGeom prst="rect">
+            <a:avLst/>
+          </a:prstGeom>
+          <a:noFill/>
+          <a:ln/>
+        </p:spPr>
+        <p:txBody>
+          <a:bodyPr wrap="square" lIns="0" tIns="0" rIns="0" bIns="0" rtlCol="0" anchor="ctr"/>
+          <a:lstStyle/>
+          <a:p>
+            <a:pPr indent="0" marL="0">
+              <a:buNone/>
+            </a:pPr>
+            <a:r>
+              <a:rPr lang="en-US" sz="1300" dirty="0">
+                <a:solidFill>
+                  <a:srgbClr val="6B7280"/>
+                </a:solidFill>
+                <a:latin typeface="Meiryo" pitchFamily="34" charset="0"/>
+                <a:ea typeface="Meiryo" pitchFamily="34" charset="-122"/>
+                <a:cs typeface="Meiryo" pitchFamily="34" charset="-120"/>
+              </a:rPr>
+              <a:t>誰かのアクションが案件に記録され、必要な人へ通知が飛ぶ。だからボールが落ちない。</a:t>
+            </a:r>
+            <a:endParaRPr lang="en-US" sz="1300" dirty="0"/>
+          </a:p>
+        </p:txBody>
+      </p:sp>
+      <p:sp>
+        <p:nvSpPr>
+          <p:cNvPr id="6" name="Shape 4"/>
+          <p:cNvSpPr/>
+          <p:nvPr/>
+        </p:nvSpPr>
+        <p:spPr>
+          <a:xfrm>
+            <a:off x="691744" y="2606040"/>
+            <a:ext cx="2468880" cy="2286000"/>
+          </a:xfrm>
+          <a:prstGeom prst="roundRect">
+            <a:avLst>
+              <a:gd name="adj" fmla="val 4000"/>
+            </a:avLst>
+          </a:prstGeom>
+          <a:solidFill>
+            <a:srgbClr val="FFFFFF"/>
+          </a:solidFill>
+          <a:ln w="12700">
+            <a:solidFill>
+              <a:srgbClr val="E4E9F2"/>
+            </a:solidFill>
+            <a:prstDash val="solid"/>
+          </a:ln>
+          <a:effectLst>
+            <a:outerShdw sx="100000" sy="100000" kx="0" ky="0" algn="bl" rotWithShape="0" blurRad="114300" dist="38100" dir="5400000">
+              <a:srgbClr val="8FA0C4">
+                <a:alpha val="30000"/>
+              </a:srgbClr>
+            </a:outerShdw>
+          </a:effectLst>
+        </p:spPr>
+      </p:sp>
+      <p:sp>
+        <p:nvSpPr>
+          <p:cNvPr id="7" name="Text 5"/>
+          <p:cNvSpPr/>
+          <p:nvPr/>
+        </p:nvSpPr>
+        <p:spPr>
+          <a:xfrm>
+            <a:off x="1679296" y="2825496"/>
+            <a:ext cx="493776" cy="493776"/>
+          </a:xfrm>
+          <a:prstGeom prst="roundRect">
+            <a:avLst>
+              <a:gd name="adj" fmla="val 16667"/>
+            </a:avLst>
+          </a:prstGeom>
+          <a:solidFill>
+            <a:srgbClr val="2C6E8F"/>
+          </a:solidFill>
+          <a:ln/>
+          <a:effectLst>
+            <a:outerShdw sx="100000" sy="100000" kx="0" ky="0" algn="bl" rotWithShape="0" blurRad="88900" dist="25400" dir="5400000">
+              <a:srgbClr val="8FA0C4">
+                <a:alpha val="30000"/>
+              </a:srgbClr>
+            </a:outerShdw>
+          </a:effectLst>
+        </p:spPr>
+        <p:txBody>
+          <a:bodyPr wrap="square" lIns="0" tIns="0" rIns="0" bIns="0" rtlCol="0" anchor="ctr"/>
+          <a:lstStyle/>
+          <a:p>
+            <a:pPr algn="ctr" indent="0" marL="0">
+              <a:buNone/>
+            </a:pPr>
+            <a:r>
+              <a:rPr lang="en-US" sz="1200" b="1" dirty="0">
+                <a:solidFill>
+                  <a:srgbClr val="FFFFFF"/>
+                </a:solidFill>
+                <a:latin typeface="Meiryo" pitchFamily="34" charset="0"/>
+                <a:ea typeface="Meiryo" pitchFamily="34" charset="-122"/>
+                <a:cs typeface="Meiryo" pitchFamily="34" charset="-120"/>
+              </a:rPr>
+              <a:t>1</a:t>
+            </a:r>
+            <a:endParaRPr lang="en-US" sz="1200" dirty="0"/>
+          </a:p>
+        </p:txBody>
+      </p:sp>
+      <p:sp>
+        <p:nvSpPr>
+          <p:cNvPr id="8" name="Text 6"/>
+          <p:cNvSpPr/>
+          <p:nvPr/>
+        </p:nvSpPr>
+        <p:spPr>
+          <a:xfrm>
+            <a:off x="764896" y="3447288"/>
+            <a:ext cx="2322576" cy="457200"/>
+          </a:xfrm>
+          <a:prstGeom prst="rect">
+            <a:avLst/>
+          </a:prstGeom>
+          <a:noFill/>
+          <a:ln/>
+        </p:spPr>
+        <p:txBody>
+          <a:bodyPr wrap="square" lIns="0" tIns="0" rIns="0" bIns="0" rtlCol="0" anchor="ctr"/>
+          <a:lstStyle/>
+          <a:p>
+            <a:pPr algn="ctr" indent="0" marL="0">
+              <a:lnSpc>
+                <a:spcPct val="105000"/>
+              </a:lnSpc>
+              <a:buNone/>
+            </a:pPr>
+            <a:r>
+              <a:rPr lang="en-US" sz="1250" b="1" dirty="0">
+                <a:solidFill>
+                  <a:srgbClr val="141A33"/>
+                </a:solidFill>
+                <a:latin typeface="Meiryo" pitchFamily="34" charset="0"/>
+                <a:ea typeface="Meiryo" pitchFamily="34" charset="-122"/>
+                <a:cs typeface="Meiryo" pitchFamily="34" charset="-120"/>
+              </a:rPr>
+              <a:t>管理担当が報告</a:t>
+            </a:r>
+            <a:endParaRPr lang="en-US" sz="1250" dirty="0"/>
+          </a:p>
+        </p:txBody>
+      </p:sp>
+      <p:sp>
+        <p:nvSpPr>
+          <p:cNvPr id="9" name="Text 7"/>
+          <p:cNvSpPr/>
+          <p:nvPr/>
+        </p:nvSpPr>
+        <p:spPr>
+          <a:xfrm>
+            <a:off x="783184" y="3904488"/>
+            <a:ext cx="2286000" cy="777240"/>
+          </a:xfrm>
+          <a:prstGeom prst="rect">
+            <a:avLst/>
+          </a:prstGeom>
+          <a:noFill/>
+          <a:ln/>
+        </p:spPr>
+        <p:txBody>
+          <a:bodyPr wrap="square" lIns="0" tIns="0" rIns="0" bIns="0" rtlCol="0" anchor="t"/>
+          <a:lstStyle/>
+          <a:p>
+            <a:pPr algn="ctr" indent="0" marL="0">
+              <a:lnSpc>
+                <a:spcPct val="108000"/>
+              </a:lnSpc>
+              <a:buNone/>
+            </a:pPr>
+            <a:r>
+              <a:rPr lang="en-US" sz="1050" dirty="0">
+                <a:solidFill>
+                  <a:srgbClr val="6B7280"/>
+                </a:solidFill>
+                <a:latin typeface="Meiryo" pitchFamily="34" charset="0"/>
+                <a:ea typeface="Meiryo" pitchFamily="34" charset="-122"/>
+                <a:cs typeface="Meiryo" pitchFamily="34" charset="-120"/>
+              </a:rPr>
+              <a:t>案件報告「至急！！」等</a:t>
+            </a:r>
+            <a:endParaRPr lang="en-US" sz="1050" dirty="0"/>
+          </a:p>
+        </p:txBody>
+      </p:sp>
+      <p:sp>
+        <p:nvSpPr>
+          <p:cNvPr id="10" name="Text 8"/>
+          <p:cNvSpPr/>
+          <p:nvPr/>
+        </p:nvSpPr>
+        <p:spPr>
+          <a:xfrm>
+            <a:off x="3142336" y="2880360"/>
+            <a:ext cx="347472" cy="457200"/>
+          </a:xfrm>
+          <a:prstGeom prst="rect">
+            <a:avLst/>
+          </a:prstGeom>
+          <a:noFill/>
+          <a:ln/>
+        </p:spPr>
+        <p:txBody>
+          <a:bodyPr wrap="square" lIns="0" tIns="0" rIns="0" bIns="0" rtlCol="0" anchor="ctr"/>
+          <a:lstStyle/>
+          <a:p>
+            <a:pPr algn="ctr" indent="0" marL="0">
+              <a:buNone/>
+            </a:pPr>
+            <a:r>
+              <a:rPr lang="en-US" sz="1500" dirty="0">
+                <a:solidFill>
+                  <a:srgbClr val="B9C4DB"/>
+                </a:solidFill>
+                <a:latin typeface="Meiryo" pitchFamily="34" charset="0"/>
+                <a:ea typeface="Meiryo" pitchFamily="34" charset="-122"/>
+                <a:cs typeface="Meiryo" pitchFamily="34" charset="-120"/>
+              </a:rPr>
+              <a:t>▶</a:t>
+            </a:r>
+            <a:endParaRPr lang="en-US" sz="1500" dirty="0"/>
+          </a:p>
+        </p:txBody>
+      </p:sp>
+      <p:sp>
+        <p:nvSpPr>
+          <p:cNvPr id="11" name="Shape 9"/>
+          <p:cNvSpPr/>
+          <p:nvPr/>
+        </p:nvSpPr>
+        <p:spPr>
+          <a:xfrm>
+            <a:off x="3471520" y="2606040"/>
+            <a:ext cx="2468880" cy="2286000"/>
+          </a:xfrm>
+          <a:prstGeom prst="roundRect">
+            <a:avLst>
+              <a:gd name="adj" fmla="val 4000"/>
+            </a:avLst>
+          </a:prstGeom>
+          <a:solidFill>
+            <a:srgbClr val="FFFFFF"/>
+          </a:solidFill>
+          <a:ln w="12700">
+            <a:solidFill>
+              <a:srgbClr val="E4E9F2"/>
+            </a:solidFill>
+            <a:prstDash val="solid"/>
+          </a:ln>
+          <a:effectLst>
+            <a:outerShdw sx="100000" sy="100000" kx="0" ky="0" algn="bl" rotWithShape="0" blurRad="114300" dist="38100" dir="5400000">
+              <a:srgbClr val="8FA0C4">
+                <a:alpha val="30000"/>
+              </a:srgbClr>
+            </a:outerShdw>
+          </a:effectLst>
+        </p:spPr>
+      </p:sp>
+      <p:sp>
+        <p:nvSpPr>
+          <p:cNvPr id="12" name="Text 10"/>
+          <p:cNvSpPr/>
+          <p:nvPr/>
+        </p:nvSpPr>
+        <p:spPr>
+          <a:xfrm>
+            <a:off x="4459072" y="2825496"/>
+            <a:ext cx="493776" cy="493776"/>
+          </a:xfrm>
+          <a:prstGeom prst="roundRect">
+            <a:avLst>
+              <a:gd name="adj" fmla="val 16667"/>
+            </a:avLst>
           </a:prstGeom>
           <a:solidFill>
             <a:srgbClr val="1E2761"/>
           </a:solidFill>
           <a:ln/>
-        </p:spPr>
-      </p:sp>
-      <p:sp>
-        <p:nvSpPr>
-          <p:cNvPr id="3" name="Text 1"/>
-          <p:cNvSpPr/>
-          <p:nvPr/>
-        </p:nvSpPr>
-        <p:spPr>
-          <a:xfrm>
-            <a:off x="640080" y="1371600"/>
-            <a:ext cx="7315200" cy="365760"/>
+          <a:effectLst>
+            <a:outerShdw sx="100000" sy="100000" kx="0" ky="0" algn="bl" rotWithShape="0" blurRad="88900" dist="25400" dir="5400000">
+              <a:srgbClr val="8FA0C4">
+                <a:alpha val="30000"/>
+              </a:srgbClr>
+            </a:outerShdw>
+          </a:effectLst>
+        </p:spPr>
+        <p:txBody>
+          <a:bodyPr wrap="square" lIns="0" tIns="0" rIns="0" bIns="0" rtlCol="0" anchor="ctr"/>
+          <a:lstStyle/>
+          <a:p>
+            <a:pPr algn="ctr" indent="0" marL="0">
+              <a:buNone/>
+            </a:pPr>
+            <a:r>
+              <a:rPr lang="en-US" sz="1200" b="1" dirty="0">
+                <a:solidFill>
+                  <a:srgbClr val="FFFFFF"/>
+                </a:solidFill>
+                <a:latin typeface="Meiryo" pitchFamily="34" charset="0"/>
+                <a:ea typeface="Meiryo" pitchFamily="34" charset="-122"/>
+                <a:cs typeface="Meiryo" pitchFamily="34" charset="-120"/>
+              </a:rPr>
+              <a:t>2</a:t>
+            </a:r>
+            <a:endParaRPr lang="en-US" sz="1200" dirty="0"/>
+          </a:p>
+        </p:txBody>
+      </p:sp>
+      <p:sp>
+        <p:nvSpPr>
+          <p:cNvPr id="13" name="Text 11"/>
+          <p:cNvSpPr/>
+          <p:nvPr/>
+        </p:nvSpPr>
+        <p:spPr>
+          <a:xfrm>
+            <a:off x="3544672" y="3447288"/>
+            <a:ext cx="2322576" cy="457200"/>
+          </a:xfrm>
+          <a:prstGeom prst="rect">
+            <a:avLst/>
+          </a:prstGeom>
+          <a:noFill/>
+          <a:ln/>
+        </p:spPr>
+        <p:txBody>
+          <a:bodyPr wrap="square" lIns="0" tIns="0" rIns="0" bIns="0" rtlCol="0" anchor="ctr"/>
+          <a:lstStyle/>
+          <a:p>
+            <a:pPr algn="ctr" indent="0" marL="0">
+              <a:lnSpc>
+                <a:spcPct val="105000"/>
+              </a:lnSpc>
+              <a:buNone/>
+            </a:pPr>
+            <a:r>
+              <a:rPr lang="en-US" sz="1250" b="1" dirty="0">
+                <a:solidFill>
+                  <a:srgbClr val="141A33"/>
+                </a:solidFill>
+                <a:latin typeface="Meiryo" pitchFamily="34" charset="0"/>
+                <a:ea typeface="Meiryo" pitchFamily="34" charset="-122"/>
+                <a:cs typeface="Meiryo" pitchFamily="34" charset="-120"/>
+              </a:rPr>
+              <a:t>案件に記録</a:t>
+            </a:r>
+            <a:endParaRPr lang="en-US" sz="1250" dirty="0"/>
+          </a:p>
+        </p:txBody>
+      </p:sp>
+      <p:sp>
+        <p:nvSpPr>
+          <p:cNvPr id="14" name="Text 12"/>
+          <p:cNvSpPr/>
+          <p:nvPr/>
+        </p:nvSpPr>
+        <p:spPr>
+          <a:xfrm>
+            <a:off x="3562960" y="3904488"/>
+            <a:ext cx="2286000" cy="777240"/>
+          </a:xfrm>
+          <a:prstGeom prst="rect">
+            <a:avLst/>
+          </a:prstGeom>
+          <a:noFill/>
+          <a:ln/>
+        </p:spPr>
+        <p:txBody>
+          <a:bodyPr wrap="square" lIns="0" tIns="0" rIns="0" bIns="0" rtlCol="0" anchor="t"/>
+          <a:lstStyle/>
+          <a:p>
+            <a:pPr algn="ctr" indent="0" marL="0">
+              <a:lnSpc>
+                <a:spcPct val="108000"/>
+              </a:lnSpc>
+              <a:buNone/>
+            </a:pPr>
+            <a:r>
+              <a:rPr lang="en-US" sz="1050" dirty="0">
+                <a:solidFill>
+                  <a:srgbClr val="6B7280"/>
+                </a:solidFill>
+                <a:latin typeface="Meiryo" pitchFamily="34" charset="0"/>
+                <a:ea typeface="Meiryo" pitchFamily="34" charset="-122"/>
+                <a:cs typeface="Meiryo" pitchFamily="34" charset="-120"/>
+              </a:rPr>
+              <a:t>履歴として残る</a:t>
+            </a:r>
+            <a:endParaRPr lang="en-US" sz="1050" dirty="0"/>
+          </a:p>
+        </p:txBody>
+      </p:sp>
+      <p:sp>
+        <p:nvSpPr>
+          <p:cNvPr id="15" name="Text 13"/>
+          <p:cNvSpPr/>
+          <p:nvPr/>
+        </p:nvSpPr>
+        <p:spPr>
+          <a:xfrm>
+            <a:off x="5922112" y="2880360"/>
+            <a:ext cx="347472" cy="457200"/>
+          </a:xfrm>
+          <a:prstGeom prst="rect">
+            <a:avLst/>
+          </a:prstGeom>
+          <a:noFill/>
+          <a:ln/>
+        </p:spPr>
+        <p:txBody>
+          <a:bodyPr wrap="square" lIns="0" tIns="0" rIns="0" bIns="0" rtlCol="0" anchor="ctr"/>
+          <a:lstStyle/>
+          <a:p>
+            <a:pPr algn="ctr" indent="0" marL="0">
+              <a:buNone/>
+            </a:pPr>
+            <a:r>
+              <a:rPr lang="en-US" sz="1500" dirty="0">
+                <a:solidFill>
+                  <a:srgbClr val="B9C4DB"/>
+                </a:solidFill>
+                <a:latin typeface="Meiryo" pitchFamily="34" charset="0"/>
+                <a:ea typeface="Meiryo" pitchFamily="34" charset="-122"/>
+                <a:cs typeface="Meiryo" pitchFamily="34" charset="-120"/>
+              </a:rPr>
+              <a:t>▶</a:t>
+            </a:r>
+            <a:endParaRPr lang="en-US" sz="1500" dirty="0"/>
+          </a:p>
+        </p:txBody>
+      </p:sp>
+      <p:sp>
+        <p:nvSpPr>
+          <p:cNvPr id="16" name="Shape 14"/>
+          <p:cNvSpPr/>
+          <p:nvPr/>
+        </p:nvSpPr>
+        <p:spPr>
+          <a:xfrm>
+            <a:off x="6251296" y="2606040"/>
+            <a:ext cx="2468880" cy="2286000"/>
+          </a:xfrm>
+          <a:prstGeom prst="roundRect">
+            <a:avLst>
+              <a:gd name="adj" fmla="val 4000"/>
+            </a:avLst>
+          </a:prstGeom>
+          <a:solidFill>
+            <a:srgbClr val="FFFFFF"/>
+          </a:solidFill>
+          <a:ln w="12700">
+            <a:solidFill>
+              <a:srgbClr val="E4E9F2"/>
+            </a:solidFill>
+            <a:prstDash val="solid"/>
+          </a:ln>
+          <a:effectLst>
+            <a:outerShdw sx="100000" sy="100000" kx="0" ky="0" algn="bl" rotWithShape="0" blurRad="114300" dist="38100" dir="5400000">
+              <a:srgbClr val="8FA0C4">
+                <a:alpha val="30000"/>
+              </a:srgbClr>
+            </a:outerShdw>
+          </a:effectLst>
+        </p:spPr>
+      </p:sp>
+      <p:sp>
+        <p:nvSpPr>
+          <p:cNvPr id="17" name="Text 15"/>
+          <p:cNvSpPr/>
+          <p:nvPr/>
+        </p:nvSpPr>
+        <p:spPr>
+          <a:xfrm>
+            <a:off x="7238848" y="2825496"/>
+            <a:ext cx="493776" cy="493776"/>
+          </a:xfrm>
+          <a:prstGeom prst="roundRect">
+            <a:avLst>
+              <a:gd name="adj" fmla="val 16667"/>
+            </a:avLst>
+          </a:prstGeom>
+          <a:solidFill>
+            <a:srgbClr val="4F46E5"/>
+          </a:solidFill>
+          <a:ln/>
+          <a:effectLst>
+            <a:outerShdw sx="100000" sy="100000" kx="0" ky="0" algn="bl" rotWithShape="0" blurRad="88900" dist="25400" dir="5400000">
+              <a:srgbClr val="8FA0C4">
+                <a:alpha val="30000"/>
+              </a:srgbClr>
+            </a:outerShdw>
+          </a:effectLst>
+        </p:spPr>
+        <p:txBody>
+          <a:bodyPr wrap="square" lIns="0" tIns="0" rIns="0" bIns="0" rtlCol="0" anchor="ctr"/>
+          <a:lstStyle/>
+          <a:p>
+            <a:pPr algn="ctr" indent="0" marL="0">
+              <a:buNone/>
+            </a:pPr>
+            <a:r>
+              <a:rPr lang="en-US" sz="1200" b="1" dirty="0">
+                <a:solidFill>
+                  <a:srgbClr val="FFFFFF"/>
+                </a:solidFill>
+                <a:latin typeface="Meiryo" pitchFamily="34" charset="0"/>
+                <a:ea typeface="Meiryo" pitchFamily="34" charset="-122"/>
+                <a:cs typeface="Meiryo" pitchFamily="34" charset="-120"/>
+              </a:rPr>
+              <a:t>3</a:t>
+            </a:r>
+            <a:endParaRPr lang="en-US" sz="1200" dirty="0"/>
+          </a:p>
+        </p:txBody>
+      </p:sp>
+      <p:sp>
+        <p:nvSpPr>
+          <p:cNvPr id="18" name="Text 16"/>
+          <p:cNvSpPr/>
+          <p:nvPr/>
+        </p:nvSpPr>
+        <p:spPr>
+          <a:xfrm>
+            <a:off x="6324448" y="3447288"/>
+            <a:ext cx="2322576" cy="457200"/>
+          </a:xfrm>
+          <a:prstGeom prst="rect">
+            <a:avLst/>
+          </a:prstGeom>
+          <a:noFill/>
+          <a:ln/>
+        </p:spPr>
+        <p:txBody>
+          <a:bodyPr wrap="square" lIns="0" tIns="0" rIns="0" bIns="0" rtlCol="0" anchor="ctr"/>
+          <a:lstStyle/>
+          <a:p>
+            <a:pPr algn="ctr" indent="0" marL="0">
+              <a:lnSpc>
+                <a:spcPct val="105000"/>
+              </a:lnSpc>
+              <a:buNone/>
+            </a:pPr>
+            <a:r>
+              <a:rPr lang="en-US" sz="1250" b="1" dirty="0">
+                <a:solidFill>
+                  <a:srgbClr val="141A33"/>
+                </a:solidFill>
+                <a:latin typeface="Meiryo" pitchFamily="34" charset="0"/>
+                <a:ea typeface="Meiryo" pitchFamily="34" charset="-122"/>
+                <a:cs typeface="Meiryo" pitchFamily="34" charset="-120"/>
+              </a:rPr>
+              <a:t>必要な人へ通知</a:t>
+            </a:r>
+            <a:endParaRPr lang="en-US" sz="1250" dirty="0"/>
+          </a:p>
+        </p:txBody>
+      </p:sp>
+      <p:sp>
+        <p:nvSpPr>
+          <p:cNvPr id="19" name="Text 17"/>
+          <p:cNvSpPr/>
+          <p:nvPr/>
+        </p:nvSpPr>
+        <p:spPr>
+          <a:xfrm>
+            <a:off x="6342736" y="3904488"/>
+            <a:ext cx="2286000" cy="777240"/>
+          </a:xfrm>
+          <a:prstGeom prst="rect">
+            <a:avLst/>
+          </a:prstGeom>
+          <a:noFill/>
+          <a:ln/>
+        </p:spPr>
+        <p:txBody>
+          <a:bodyPr wrap="square" lIns="0" tIns="0" rIns="0" bIns="0" rtlCol="0" anchor="t"/>
+          <a:lstStyle/>
+          <a:p>
+            <a:pPr algn="ctr" indent="0" marL="0">
+              <a:lnSpc>
+                <a:spcPct val="108000"/>
+              </a:lnSpc>
+              <a:buNone/>
+            </a:pPr>
+            <a:r>
+              <a:rPr lang="en-US" sz="1050" dirty="0">
+                <a:solidFill>
+                  <a:srgbClr val="6B7280"/>
+                </a:solidFill>
+                <a:latin typeface="Meiryo" pitchFamily="34" charset="0"/>
+                <a:ea typeface="Meiryo" pitchFamily="34" charset="-122"/>
+                <a:cs typeface="Meiryo" pitchFamily="34" charset="-120"/>
+              </a:rPr>
+              <a:t>受注担当のマイページ</a:t>
+            </a:r>
+            <a:endParaRPr lang="en-US" sz="1050" dirty="0"/>
+          </a:p>
+        </p:txBody>
+      </p:sp>
+      <p:sp>
+        <p:nvSpPr>
+          <p:cNvPr id="20" name="Text 18"/>
+          <p:cNvSpPr/>
+          <p:nvPr/>
+        </p:nvSpPr>
+        <p:spPr>
+          <a:xfrm>
+            <a:off x="6662776" y="4727448"/>
+            <a:ext cx="1645920" cy="310896"/>
+          </a:xfrm>
+          <a:prstGeom prst="roundRect">
+            <a:avLst>
+              <a:gd name="adj" fmla="val 14706"/>
+            </a:avLst>
+          </a:prstGeom>
+          <a:solidFill>
+            <a:srgbClr val="D64545"/>
+          </a:solidFill>
+          <a:ln/>
+        </p:spPr>
+        <p:txBody>
+          <a:bodyPr wrap="square" lIns="0" tIns="0" rIns="0" bIns="0" rtlCol="0" anchor="ctr"/>
+          <a:lstStyle/>
+          <a:p>
+            <a:pPr algn="ctr" indent="0" marL="0">
+              <a:buNone/>
+            </a:pPr>
+            <a:r>
+              <a:rPr lang="en-US" sz="900" b="1" dirty="0">
+                <a:solidFill>
+                  <a:srgbClr val="FFFFFF"/>
+                </a:solidFill>
+                <a:latin typeface="Meiryo" pitchFamily="34" charset="0"/>
+                <a:ea typeface="Meiryo" pitchFamily="34" charset="-122"/>
+                <a:cs typeface="Meiryo" pitchFamily="34" charset="-120"/>
+              </a:rPr>
+              <a:t>要注意バナー（赤）</a:t>
+            </a:r>
+            <a:endParaRPr lang="en-US" sz="900" dirty="0"/>
+          </a:p>
+        </p:txBody>
+      </p:sp>
+      <p:sp>
+        <p:nvSpPr>
+          <p:cNvPr id="21" name="Text 19"/>
+          <p:cNvSpPr/>
+          <p:nvPr/>
+        </p:nvSpPr>
+        <p:spPr>
+          <a:xfrm>
+            <a:off x="8701888" y="2880360"/>
+            <a:ext cx="347472" cy="457200"/>
+          </a:xfrm>
+          <a:prstGeom prst="rect">
+            <a:avLst/>
+          </a:prstGeom>
+          <a:noFill/>
+          <a:ln/>
+        </p:spPr>
+        <p:txBody>
+          <a:bodyPr wrap="square" lIns="0" tIns="0" rIns="0" bIns="0" rtlCol="0" anchor="ctr"/>
+          <a:lstStyle/>
+          <a:p>
+            <a:pPr algn="ctr" indent="0" marL="0">
+              <a:buNone/>
+            </a:pPr>
+            <a:r>
+              <a:rPr lang="en-US" sz="1500" dirty="0">
+                <a:solidFill>
+                  <a:srgbClr val="B9C4DB"/>
+                </a:solidFill>
+                <a:latin typeface="Meiryo" pitchFamily="34" charset="0"/>
+                <a:ea typeface="Meiryo" pitchFamily="34" charset="-122"/>
+                <a:cs typeface="Meiryo" pitchFamily="34" charset="-120"/>
+              </a:rPr>
+              <a:t>▶</a:t>
+            </a:r>
+            <a:endParaRPr lang="en-US" sz="1500" dirty="0"/>
+          </a:p>
+        </p:txBody>
+      </p:sp>
+      <p:sp>
+        <p:nvSpPr>
+          <p:cNvPr id="22" name="Shape 20"/>
+          <p:cNvSpPr/>
+          <p:nvPr/>
+        </p:nvSpPr>
+        <p:spPr>
+          <a:xfrm>
+            <a:off x="9031072" y="2606040"/>
+            <a:ext cx="2468880" cy="2286000"/>
+          </a:xfrm>
+          <a:prstGeom prst="roundRect">
+            <a:avLst>
+              <a:gd name="adj" fmla="val 4000"/>
+            </a:avLst>
+          </a:prstGeom>
+          <a:solidFill>
+            <a:srgbClr val="FFFFFF"/>
+          </a:solidFill>
+          <a:ln w="12700">
+            <a:solidFill>
+              <a:srgbClr val="E4E9F2"/>
+            </a:solidFill>
+            <a:prstDash val="solid"/>
+          </a:ln>
+          <a:effectLst>
+            <a:outerShdw sx="100000" sy="100000" kx="0" ky="0" algn="bl" rotWithShape="0" blurRad="114300" dist="38100" dir="5400000">
+              <a:srgbClr val="8FA0C4">
+                <a:alpha val="30000"/>
+              </a:srgbClr>
+            </a:outerShdw>
+          </a:effectLst>
+        </p:spPr>
+      </p:sp>
+      <p:sp>
+        <p:nvSpPr>
+          <p:cNvPr id="23" name="Text 21"/>
+          <p:cNvSpPr/>
+          <p:nvPr/>
+        </p:nvSpPr>
+        <p:spPr>
+          <a:xfrm>
+            <a:off x="10018624" y="2825496"/>
+            <a:ext cx="493776" cy="493776"/>
+          </a:xfrm>
+          <a:prstGeom prst="roundRect">
+            <a:avLst>
+              <a:gd name="adj" fmla="val 16667"/>
+            </a:avLst>
+          </a:prstGeom>
+          <a:solidFill>
+            <a:srgbClr val="2E8B6F"/>
+          </a:solidFill>
+          <a:ln/>
+          <a:effectLst>
+            <a:outerShdw sx="100000" sy="100000" kx="0" ky="0" algn="bl" rotWithShape="0" blurRad="88900" dist="25400" dir="5400000">
+              <a:srgbClr val="8FA0C4">
+                <a:alpha val="30000"/>
+              </a:srgbClr>
+            </a:outerShdw>
+          </a:effectLst>
+        </p:spPr>
+        <p:txBody>
+          <a:bodyPr wrap="square" lIns="0" tIns="0" rIns="0" bIns="0" rtlCol="0" anchor="ctr"/>
+          <a:lstStyle/>
+          <a:p>
+            <a:pPr algn="ctr" indent="0" marL="0">
+              <a:buNone/>
+            </a:pPr>
+            <a:r>
+              <a:rPr lang="en-US" sz="1200" b="1" dirty="0">
+                <a:solidFill>
+                  <a:srgbClr val="FFFFFF"/>
+                </a:solidFill>
+                <a:latin typeface="Meiryo" pitchFamily="34" charset="0"/>
+                <a:ea typeface="Meiryo" pitchFamily="34" charset="-122"/>
+                <a:cs typeface="Meiryo" pitchFamily="34" charset="-120"/>
+              </a:rPr>
+              <a:t>4</a:t>
+            </a:r>
+            <a:endParaRPr lang="en-US" sz="1200" dirty="0"/>
+          </a:p>
+        </p:txBody>
+      </p:sp>
+      <p:sp>
+        <p:nvSpPr>
+          <p:cNvPr id="24" name="Text 22"/>
+          <p:cNvSpPr/>
+          <p:nvPr/>
+        </p:nvSpPr>
+        <p:spPr>
+          <a:xfrm>
+            <a:off x="9104224" y="3447288"/>
+            <a:ext cx="2322576" cy="457200"/>
+          </a:xfrm>
+          <a:prstGeom prst="rect">
+            <a:avLst/>
+          </a:prstGeom>
+          <a:noFill/>
+          <a:ln/>
+        </p:spPr>
+        <p:txBody>
+          <a:bodyPr wrap="square" lIns="0" tIns="0" rIns="0" bIns="0" rtlCol="0" anchor="ctr"/>
+          <a:lstStyle/>
+          <a:p>
+            <a:pPr algn="ctr" indent="0" marL="0">
+              <a:lnSpc>
+                <a:spcPct val="105000"/>
+              </a:lnSpc>
+              <a:buNone/>
+            </a:pPr>
+            <a:r>
+              <a:rPr lang="en-US" sz="1250" b="1" dirty="0">
+                <a:solidFill>
+                  <a:srgbClr val="141A33"/>
+                </a:solidFill>
+                <a:latin typeface="Meiryo" pitchFamily="34" charset="0"/>
+                <a:ea typeface="Meiryo" pitchFamily="34" charset="-122"/>
+                <a:cs typeface="Meiryo" pitchFamily="34" charset="-120"/>
+              </a:rPr>
+              <a:t>気づいて対応</a:t>
+            </a:r>
+            <a:endParaRPr lang="en-US" sz="1250" dirty="0"/>
+          </a:p>
+        </p:txBody>
+      </p:sp>
+      <p:sp>
+        <p:nvSpPr>
+          <p:cNvPr id="25" name="Text 23"/>
+          <p:cNvSpPr/>
+          <p:nvPr/>
+        </p:nvSpPr>
+        <p:spPr>
+          <a:xfrm>
+            <a:off x="9122512" y="3904488"/>
+            <a:ext cx="2286000" cy="777240"/>
+          </a:xfrm>
+          <a:prstGeom prst="rect">
+            <a:avLst/>
+          </a:prstGeom>
+          <a:noFill/>
+          <a:ln/>
+        </p:spPr>
+        <p:txBody>
+          <a:bodyPr wrap="square" lIns="0" tIns="0" rIns="0" bIns="0" rtlCol="0" anchor="t"/>
+          <a:lstStyle/>
+          <a:p>
+            <a:pPr algn="ctr" indent="0" marL="0">
+              <a:lnSpc>
+                <a:spcPct val="108000"/>
+              </a:lnSpc>
+              <a:buNone/>
+            </a:pPr>
+            <a:r>
+              <a:rPr lang="en-US" sz="1050" dirty="0">
+                <a:solidFill>
+                  <a:srgbClr val="6B7280"/>
+                </a:solidFill>
+                <a:latin typeface="Meiryo" pitchFamily="34" charset="0"/>
+                <a:ea typeface="Meiryo" pitchFamily="34" charset="-122"/>
+                <a:cs typeface="Meiryo" pitchFamily="34" charset="-120"/>
+              </a:rPr>
+              <a:t>クリックで案件へ／確認</a:t>
+            </a:r>
+            <a:endParaRPr lang="en-US" sz="1050" dirty="0"/>
+          </a:p>
+        </p:txBody>
+      </p:sp>
+      <p:sp>
+        <p:nvSpPr>
+          <p:cNvPr id="26" name="Text 24"/>
+          <p:cNvSpPr/>
+          <p:nvPr/>
+        </p:nvSpPr>
+        <p:spPr>
+          <a:xfrm>
+            <a:off x="640080" y="5897880"/>
+            <a:ext cx="11155680" cy="365760"/>
           </a:xfrm>
           <a:prstGeom prst="rect">
             <a:avLst/>
@@ -9170,295 +10477,17 @@
               <a:buNone/>
             </a:pPr>
             <a:r>
-              <a:rPr lang="en-US" sz="1400" b="1" spc="200" kern="0" dirty="0">
-                <a:solidFill>
-                  <a:srgbClr val="E1A33A"/>
-                </a:solidFill>
-                <a:latin typeface="Meiryo" pitchFamily="34" charset="0"/>
-                <a:ea typeface="Meiryo" pitchFamily="34" charset="-122"/>
-                <a:cs typeface="Meiryo" pitchFamily="34" charset="-120"/>
-              </a:rPr>
-              <a:t>LIVE DEMO</a:t>
-            </a:r>
-            <a:endParaRPr lang="en-US" sz="1400" dirty="0"/>
-          </a:p>
-        </p:txBody>
-      </p:sp>
-      <p:sp>
-        <p:nvSpPr>
-          <p:cNvPr id="4" name="Text 2"/>
-          <p:cNvSpPr/>
-          <p:nvPr/>
-        </p:nvSpPr>
-        <p:spPr>
-          <a:xfrm>
-            <a:off x="640080" y="1737360"/>
-            <a:ext cx="10058400" cy="914400"/>
-          </a:xfrm>
-          <a:prstGeom prst="rect">
-            <a:avLst/>
-          </a:prstGeom>
-          <a:noFill/>
-          <a:ln/>
-        </p:spPr>
-        <p:txBody>
-          <a:bodyPr wrap="square" lIns="0" tIns="0" rIns="0" bIns="0" rtlCol="0" anchor="ctr"/>
-          <a:lstStyle/>
-          <a:p>
-            <a:pPr indent="0" marL="0">
-              <a:buNone/>
-            </a:pPr>
-            <a:r>
-              <a:rPr lang="en-US" sz="3200" b="1" dirty="0">
-                <a:solidFill>
-                  <a:srgbClr val="FFFFFF"/>
-                </a:solidFill>
-                <a:latin typeface="Meiryo" pitchFamily="34" charset="0"/>
-                <a:ea typeface="Meiryo" pitchFamily="34" charset="-122"/>
-                <a:cs typeface="Meiryo" pitchFamily="34" charset="-120"/>
-              </a:rPr>
-              <a:t>1件を、面談から納品まで通します</a:t>
-            </a:r>
-            <a:endParaRPr lang="en-US" sz="3200" dirty="0"/>
-          </a:p>
-        </p:txBody>
-      </p:sp>
-      <p:sp>
-        <p:nvSpPr>
-          <p:cNvPr id="5" name="Text 3"/>
-          <p:cNvSpPr/>
-          <p:nvPr/>
-        </p:nvSpPr>
-        <p:spPr>
-          <a:xfrm>
-            <a:off x="640080" y="2743200"/>
-            <a:ext cx="10058400" cy="457200"/>
-          </a:xfrm>
-          <a:prstGeom prst="rect">
-            <a:avLst/>
-          </a:prstGeom>
-          <a:noFill/>
-          <a:ln/>
-        </p:spPr>
-        <p:txBody>
-          <a:bodyPr wrap="square" lIns="0" tIns="0" rIns="0" bIns="0" rtlCol="0" anchor="ctr"/>
-          <a:lstStyle/>
-          <a:p>
-            <a:pPr indent="0" marL="0">
-              <a:buNone/>
-            </a:pPr>
-            <a:r>
-              <a:rPr lang="en-US" sz="1500" dirty="0">
-                <a:solidFill>
-                  <a:srgbClr val="CADCFC"/>
-                </a:solidFill>
-                <a:latin typeface="Meiryo" pitchFamily="34" charset="0"/>
-                <a:ea typeface="Meiryo" pitchFamily="34" charset="-122"/>
-                <a:cs typeface="Meiryo" pitchFamily="34" charset="-120"/>
-              </a:rPr>
-              <a:t>サンプル：田中家 相続手続き（横浜市の不動産・みずほ銀行）</a:t>
-            </a:r>
-            <a:endParaRPr lang="en-US" sz="1500" dirty="0"/>
-          </a:p>
-        </p:txBody>
-      </p:sp>
-      <p:sp>
-        <p:nvSpPr>
-          <p:cNvPr id="6" name="Text 4"/>
-          <p:cNvSpPr/>
-          <p:nvPr/>
-        </p:nvSpPr>
-        <p:spPr>
-          <a:xfrm>
-            <a:off x="640080" y="3657600"/>
-            <a:ext cx="3383280" cy="640080"/>
-          </a:xfrm>
-          <a:prstGeom prst="rect">
-            <a:avLst/>
-          </a:prstGeom>
-          <a:noFill/>
-          <a:ln/>
-        </p:spPr>
-        <p:txBody>
-          <a:bodyPr wrap="square" lIns="0" tIns="0" rIns="0" bIns="0" rtlCol="0" anchor="ctr"/>
-          <a:lstStyle/>
-          <a:p>
-            <a:pPr marL="342900" indent="-342900">
-              <a:buSzPct val="100000"/>
-              <a:buChar char="•"/>
-            </a:pPr>
-            <a:r>
-              <a:rPr lang="en-US" sz="1350" dirty="0">
-                <a:solidFill>
-                  <a:srgbClr val="FFFFFF"/>
-                </a:solidFill>
-                <a:latin typeface="Meiryo" pitchFamily="34" charset="0"/>
-                <a:ea typeface="Meiryo" pitchFamily="34" charset="-122"/>
-                <a:cs typeface="Meiryo" pitchFamily="34" charset="-120"/>
-              </a:rPr>
-              <a:t>面談登録 → オーダーシート</a:t>
-            </a:r>
-            <a:endParaRPr lang="en-US" sz="1350" dirty="0"/>
-          </a:p>
-        </p:txBody>
-      </p:sp>
-      <p:sp>
-        <p:nvSpPr>
-          <p:cNvPr id="7" name="Text 5"/>
-          <p:cNvSpPr/>
-          <p:nvPr/>
-        </p:nvSpPr>
-        <p:spPr>
-          <a:xfrm>
-            <a:off x="4206240" y="3657600"/>
-            <a:ext cx="3383280" cy="640080"/>
-          </a:xfrm>
-          <a:prstGeom prst="rect">
-            <a:avLst/>
-          </a:prstGeom>
-          <a:noFill/>
-          <a:ln/>
-        </p:spPr>
-        <p:txBody>
-          <a:bodyPr wrap="square" lIns="0" tIns="0" rIns="0" bIns="0" rtlCol="0" anchor="ctr"/>
-          <a:lstStyle/>
-          <a:p>
-            <a:pPr marL="342900" indent="-342900">
-              <a:buSzPct val="100000"/>
-              <a:buChar char="•"/>
-            </a:pPr>
-            <a:r>
-              <a:rPr lang="en-US" sz="1350" dirty="0">
-                <a:solidFill>
-                  <a:srgbClr val="FFFFFF"/>
-                </a:solidFill>
-                <a:latin typeface="Meiryo" pitchFamily="34" charset="0"/>
-                <a:ea typeface="Meiryo" pitchFamily="34" charset="-122"/>
-                <a:cs typeface="Meiryo" pitchFamily="34" charset="-120"/>
-              </a:rPr>
-              <a:t>タスク自動生成／受信簿</a:t>
-            </a:r>
-            <a:endParaRPr lang="en-US" sz="1350" dirty="0"/>
-          </a:p>
-        </p:txBody>
-      </p:sp>
-      <p:sp>
-        <p:nvSpPr>
-          <p:cNvPr id="8" name="Text 6"/>
-          <p:cNvSpPr/>
-          <p:nvPr/>
-        </p:nvSpPr>
-        <p:spPr>
-          <a:xfrm>
-            <a:off x="7772400" y="3657600"/>
-            <a:ext cx="3383280" cy="640080"/>
-          </a:xfrm>
-          <a:prstGeom prst="rect">
-            <a:avLst/>
-          </a:prstGeom>
-          <a:noFill/>
-          <a:ln/>
-        </p:spPr>
-        <p:txBody>
-          <a:bodyPr wrap="square" lIns="0" tIns="0" rIns="0" bIns="0" rtlCol="0" anchor="ctr"/>
-          <a:lstStyle/>
-          <a:p>
-            <a:pPr marL="342900" indent="-342900">
-              <a:buSzPct val="100000"/>
-              <a:buChar char="•"/>
-            </a:pPr>
-            <a:r>
-              <a:rPr lang="en-US" sz="1350" dirty="0">
-                <a:solidFill>
-                  <a:srgbClr val="FFFFFF"/>
-                </a:solidFill>
-                <a:latin typeface="Meiryo" pitchFamily="34" charset="0"/>
-                <a:ea typeface="Meiryo" pitchFamily="34" charset="-122"/>
-                <a:cs typeface="Meiryo" pitchFamily="34" charset="-120"/>
-              </a:rPr>
-              <a:t>受注 → 割り振り → 着手準備</a:t>
-            </a:r>
-            <a:endParaRPr lang="en-US" sz="1350" dirty="0"/>
-          </a:p>
-        </p:txBody>
-      </p:sp>
-      <p:sp>
-        <p:nvSpPr>
-          <p:cNvPr id="9" name="Text 7"/>
-          <p:cNvSpPr/>
-          <p:nvPr/>
-        </p:nvSpPr>
-        <p:spPr>
-          <a:xfrm>
-            <a:off x="640080" y="4526280"/>
-            <a:ext cx="3383280" cy="640080"/>
-          </a:xfrm>
-          <a:prstGeom prst="rect">
-            <a:avLst/>
-          </a:prstGeom>
-          <a:noFill/>
-          <a:ln/>
-        </p:spPr>
-        <p:txBody>
-          <a:bodyPr wrap="square" lIns="0" tIns="0" rIns="0" bIns="0" rtlCol="0" anchor="ctr"/>
-          <a:lstStyle/>
-          <a:p>
-            <a:pPr marL="342900" indent="-342900">
-              <a:buSzPct val="100000"/>
-              <a:buChar char="•"/>
-            </a:pPr>
-            <a:r>
-              <a:rPr lang="en-US" sz="1350" dirty="0">
-                <a:solidFill>
-                  <a:srgbClr val="FFFFFF"/>
-                </a:solidFill>
-                <a:latin typeface="Meiryo" pitchFamily="34" charset="0"/>
-                <a:ea typeface="Meiryo" pitchFamily="34" charset="-122"/>
-                <a:cs typeface="Meiryo" pitchFamily="34" charset="-120"/>
-              </a:rPr>
-              <a:t>ファイル化 → 作業進行中</a:t>
-            </a:r>
-            <a:endParaRPr lang="en-US" sz="1350" dirty="0"/>
-          </a:p>
-        </p:txBody>
-      </p:sp>
-      <p:sp>
-        <p:nvSpPr>
-          <p:cNvPr id="10" name="Text 8"/>
-          <p:cNvSpPr/>
-          <p:nvPr/>
-        </p:nvSpPr>
-        <p:spPr>
-          <a:xfrm>
-            <a:off x="4206240" y="4526280"/>
-            <a:ext cx="3383280" cy="640080"/>
-          </a:xfrm>
-          <a:prstGeom prst="rect">
-            <a:avLst/>
-          </a:prstGeom>
-          <a:noFill/>
-          <a:ln/>
-        </p:spPr>
-        <p:txBody>
-          <a:bodyPr wrap="square" lIns="0" tIns="0" rIns="0" bIns="0" rtlCol="0" anchor="ctr"/>
-          <a:lstStyle/>
-          <a:p>
-            <a:pPr marL="342900" indent="-342900">
-              <a:buSzPct val="100000"/>
-              <a:buChar char="•"/>
-            </a:pPr>
-            <a:r>
-              <a:rPr lang="en-US" sz="1350" dirty="0">
-                <a:solidFill>
-                  <a:srgbClr val="FFFFFF"/>
-                </a:solidFill>
-                <a:latin typeface="Meiryo" pitchFamily="34" charset="0"/>
-                <a:ea typeface="Meiryo" pitchFamily="34" charset="-122"/>
-                <a:cs typeface="Meiryo" pitchFamily="34" charset="-120"/>
-              </a:rPr>
-              <a:t>業務完了 → 納品</a:t>
-            </a:r>
-            <a:endParaRPr lang="en-US" sz="1350" dirty="0"/>
+              <a:rPr lang="en-US" sz="1200" i="1" dirty="0">
+                <a:solidFill>
+                  <a:srgbClr val="6B7280"/>
+                </a:solidFill>
+                <a:latin typeface="Meiryo" pitchFamily="34" charset="0"/>
+                <a:ea typeface="Meiryo" pitchFamily="34" charset="-122"/>
+                <a:cs typeface="Meiryo" pitchFamily="34" charset="-120"/>
+              </a:rPr>
+              <a:t>※ 至急は要注意バナー（赤）に直結。放置が続けば 黄→赤 へ自動昇格。</a:t>
+            </a:r>
+            <a:endParaRPr lang="en-US" sz="1200" dirty="0"/>
           </a:p>
         </p:txBody>
       </p:sp>
@@ -9549,7 +10578,7 @@
                 <a:ea typeface="Meiryo" pitchFamily="34" charset="-122"/>
                 <a:cs typeface="Meiryo" pitchFamily="34" charset="-120"/>
               </a:rPr>
-              <a:t>MIGRATION</a:t>
+              <a:t>DOCUMENTS</a:t>
             </a:r>
             <a:endParaRPr lang="en-US" sz="1200" dirty="0"/>
           </a:p>
@@ -9588,7 +10617,7 @@
                 <a:ea typeface="Meiryo" pitchFamily="34" charset="-122"/>
                 <a:cs typeface="Meiryo" pitchFamily="34" charset="-120"/>
               </a:rPr>
-              <a:t>移行方針：まず少数から、一緒に育てる</a:t>
+              <a:t>到着受信簿の動き — 紙をやめ、候補から選ぶだけ</a:t>
             </a:r>
             <a:endParaRPr lang="en-US" sz="3000" dirty="0"/>
           </a:p>
@@ -9596,22 +10625,61 @@
       </p:sp>
       <p:sp>
         <p:nvSpPr>
-          <p:cNvPr id="5" name="Shape 3"/>
-          <p:cNvSpPr/>
-          <p:nvPr/>
-        </p:nvSpPr>
-        <p:spPr>
-          <a:xfrm>
-            <a:off x="640080" y="1783080"/>
-            <a:ext cx="3429000" cy="3566160"/>
+          <p:cNvPr id="5" name="Text 3"/>
+          <p:cNvSpPr/>
+          <p:nvPr/>
+        </p:nvSpPr>
+        <p:spPr>
+          <a:xfrm>
+            <a:off x="640080" y="1426464"/>
+            <a:ext cx="11155680" cy="365760"/>
+          </a:xfrm>
+          <a:prstGeom prst="rect">
+            <a:avLst/>
+          </a:prstGeom>
+          <a:noFill/>
+          <a:ln/>
+        </p:spPr>
+        <p:txBody>
+          <a:bodyPr wrap="square" lIns="0" tIns="0" rIns="0" bIns="0" rtlCol="0" anchor="ctr"/>
+          <a:lstStyle/>
+          <a:p>
+            <a:pPr indent="0" marL="0">
+              <a:buNone/>
+            </a:pPr>
+            <a:r>
+              <a:rPr lang="en-US" sz="1300" dirty="0">
+                <a:solidFill>
+                  <a:srgbClr val="6B7280"/>
+                </a:solidFill>
+                <a:latin typeface="Meiryo" pitchFamily="34" charset="0"/>
+                <a:ea typeface="Meiryo" pitchFamily="34" charset="-122"/>
+                <a:cs typeface="Meiryo" pitchFamily="34" charset="-120"/>
+              </a:rPr>
+              <a:t>受領する書類は事前設定。到着したら候補から選んで処理 → タスクに紐づく。</a:t>
+            </a:r>
+            <a:endParaRPr lang="en-US" sz="1300" dirty="0"/>
+          </a:p>
+        </p:txBody>
+      </p:sp>
+      <p:sp>
+        <p:nvSpPr>
+          <p:cNvPr id="6" name="Shape 4"/>
+          <p:cNvSpPr/>
+          <p:nvPr/>
+        </p:nvSpPr>
+        <p:spPr>
+          <a:xfrm>
+            <a:off x="559156" y="2651760"/>
+            <a:ext cx="1965960" cy="2286000"/>
           </a:xfrm>
           <a:prstGeom prst="roundRect">
             <a:avLst>
-              <a:gd name="adj" fmla="val 2667"/>
+              <a:gd name="adj" fmla="val 4651"/>
             </a:avLst>
           </a:prstGeom>
           <a:solidFill>
-            <a:srgbClr val="F7F9FD"/>
+            <a:srgbClr val="FFFFFF"/>
           </a:solidFill>
           <a:ln w="12700">
             <a:solidFill>
@@ -9630,24 +10698,31 @@
       </p:sp>
       <p:sp>
         <p:nvSpPr>
-          <p:cNvPr id="6" name="Text 4"/>
-          <p:cNvSpPr/>
-          <p:nvPr/>
-        </p:nvSpPr>
-        <p:spPr>
-          <a:xfrm>
-            <a:off x="914400" y="2011680"/>
-            <a:ext cx="2011680" cy="502920"/>
+          <p:cNvPr id="7" name="Text 5"/>
+          <p:cNvSpPr/>
+          <p:nvPr/>
+        </p:nvSpPr>
+        <p:spPr>
+          <a:xfrm>
+            <a:off x="1295248" y="2871216"/>
+            <a:ext cx="493776" cy="493776"/>
           </a:xfrm>
           <a:prstGeom prst="roundRect">
             <a:avLst>
-              <a:gd name="adj" fmla="val 90909"/>
+              <a:gd name="adj" fmla="val 16667"/>
             </a:avLst>
           </a:prstGeom>
           <a:solidFill>
             <a:srgbClr val="1E2761"/>
           </a:solidFill>
           <a:ln/>
+          <a:effectLst>
+            <a:outerShdw sx="100000" sy="100000" kx="0" ky="0" algn="bl" rotWithShape="0" blurRad="88900" dist="25400" dir="5400000">
+              <a:srgbClr val="8FA0C4">
+                <a:alpha val="30000"/>
+              </a:srgbClr>
+            </a:outerShdw>
+          </a:effectLst>
         </p:spPr>
         <p:txBody>
           <a:bodyPr wrap="square" lIns="0" tIns="0" rIns="0" bIns="0" rtlCol="0" anchor="ctr"/>
@@ -9657,7 +10732,7 @@
               <a:buNone/>
             </a:pPr>
             <a:r>
-              <a:rPr lang="en-US" sz="1300" b="1" dirty="0">
+              <a:rPr lang="en-US" sz="1200" b="1" dirty="0">
                 <a:solidFill>
                   <a:srgbClr val="FFFFFF"/>
                 </a:solidFill>
@@ -9665,38 +10740,83 @@
                 <a:ea typeface="Meiryo" pitchFamily="34" charset="-122"/>
                 <a:cs typeface="Meiryo" pitchFamily="34" charset="-120"/>
               </a:rPr>
-              <a:t>STEP 1</a:t>
-            </a:r>
-            <a:endParaRPr lang="en-US" sz="1300" dirty="0"/>
-          </a:p>
-        </p:txBody>
-      </p:sp>
-      <p:sp>
-        <p:nvSpPr>
-          <p:cNvPr id="7" name="Text 5"/>
-          <p:cNvSpPr/>
-          <p:nvPr/>
-        </p:nvSpPr>
-        <p:spPr>
-          <a:xfrm>
-            <a:off x="914400" y="2697480"/>
-            <a:ext cx="2880360" cy="365760"/>
-          </a:xfrm>
-          <a:prstGeom prst="rect">
-            <a:avLst/>
-          </a:prstGeom>
-          <a:noFill/>
-          <a:ln/>
-        </p:spPr>
-        <p:txBody>
-          <a:bodyPr wrap="square" lIns="0" tIns="0" rIns="0" bIns="0" rtlCol="0" anchor="ctr"/>
-          <a:lstStyle/>
-          <a:p>
-            <a:pPr indent="0" marL="0">
-              <a:buNone/>
-            </a:pPr>
-            <a:r>
-              <a:rPr lang="en-US" sz="1300" b="1" dirty="0">
+              <a:t>1</a:t>
+            </a:r>
+            <a:endParaRPr lang="en-US" sz="1200" dirty="0"/>
+          </a:p>
+        </p:txBody>
+      </p:sp>
+      <p:sp>
+        <p:nvSpPr>
+          <p:cNvPr id="8" name="Text 6"/>
+          <p:cNvSpPr/>
+          <p:nvPr/>
+        </p:nvSpPr>
+        <p:spPr>
+          <a:xfrm>
+            <a:off x="632308" y="3493008"/>
+            <a:ext cx="1819656" cy="457200"/>
+          </a:xfrm>
+          <a:prstGeom prst="rect">
+            <a:avLst/>
+          </a:prstGeom>
+          <a:noFill/>
+          <a:ln/>
+        </p:spPr>
+        <p:txBody>
+          <a:bodyPr wrap="square" lIns="0" tIns="0" rIns="0" bIns="0" rtlCol="0" anchor="ctr"/>
+          <a:lstStyle/>
+          <a:p>
+            <a:pPr algn="ctr" indent="0" marL="0">
+              <a:lnSpc>
+                <a:spcPct val="105000"/>
+              </a:lnSpc>
+              <a:buNone/>
+            </a:pPr>
+            <a:r>
+              <a:rPr lang="en-US" sz="1250" b="1" dirty="0">
+                <a:solidFill>
+                  <a:srgbClr val="141A33"/>
+                </a:solidFill>
+                <a:latin typeface="Meiryo" pitchFamily="34" charset="0"/>
+                <a:ea typeface="Meiryo" pitchFamily="34" charset="-122"/>
+                <a:cs typeface="Meiryo" pitchFamily="34" charset="-120"/>
+              </a:rPr>
+              <a:t>受領予定を事前設定</a:t>
+            </a:r>
+            <a:endParaRPr lang="en-US" sz="1250" dirty="0"/>
+          </a:p>
+        </p:txBody>
+      </p:sp>
+      <p:sp>
+        <p:nvSpPr>
+          <p:cNvPr id="9" name="Text 7"/>
+          <p:cNvSpPr/>
+          <p:nvPr/>
+        </p:nvSpPr>
+        <p:spPr>
+          <a:xfrm>
+            <a:off x="650596" y="3950208"/>
+            <a:ext cx="1783080" cy="777240"/>
+          </a:xfrm>
+          <a:prstGeom prst="rect">
+            <a:avLst/>
+          </a:prstGeom>
+          <a:noFill/>
+          <a:ln/>
+        </p:spPr>
+        <p:txBody>
+          <a:bodyPr wrap="square" lIns="0" tIns="0" rIns="0" bIns="0" rtlCol="0" anchor="t"/>
+          <a:lstStyle/>
+          <a:p>
+            <a:pPr algn="ctr" indent="0" marL="0">
+              <a:lnSpc>
+                <a:spcPct val="108000"/>
+              </a:lnSpc>
+              <a:buNone/>
+            </a:pPr>
+            <a:r>
+              <a:rPr lang="en-US" sz="1050" dirty="0">
                 <a:solidFill>
                   <a:srgbClr val="6B7280"/>
                 </a:solidFill>
@@ -9704,90 +10824,9 @@
                 <a:ea typeface="Meiryo" pitchFamily="34" charset="-122"/>
                 <a:cs typeface="Meiryo" pitchFamily="34" charset="-120"/>
               </a:rPr>
-              <a:t>〜1ヶ月</a:t>
-            </a:r>
-            <a:endParaRPr lang="en-US" sz="1300" dirty="0"/>
-          </a:p>
-        </p:txBody>
-      </p:sp>
-      <p:sp>
-        <p:nvSpPr>
-          <p:cNvPr id="8" name="Text 6"/>
-          <p:cNvSpPr/>
-          <p:nvPr/>
-        </p:nvSpPr>
-        <p:spPr>
-          <a:xfrm>
-            <a:off x="914400" y="3108960"/>
-            <a:ext cx="2880360" cy="640080"/>
-          </a:xfrm>
-          <a:prstGeom prst="rect">
-            <a:avLst/>
-          </a:prstGeom>
-          <a:noFill/>
-          <a:ln/>
-        </p:spPr>
-        <p:txBody>
-          <a:bodyPr wrap="square" lIns="0" tIns="0" rIns="0" bIns="0" rtlCol="0" anchor="t"/>
-          <a:lstStyle/>
-          <a:p>
-            <a:pPr indent="0" marL="0">
-              <a:buNone/>
-            </a:pPr>
-            <a:r>
-              <a:rPr lang="en-US" sz="1600" b="1" dirty="0">
-                <a:solidFill>
-                  <a:srgbClr val="141A33"/>
-                </a:solidFill>
-                <a:latin typeface="Meiryo" pitchFamily="34" charset="0"/>
-                <a:ea typeface="Meiryo" pitchFamily="34" charset="-122"/>
-                <a:cs typeface="Meiryo" pitchFamily="34" charset="-120"/>
-              </a:rPr>
-              <a:t>各チーム 1〜2件だけ</a:t>
-            </a:r>
-            <a:endParaRPr lang="en-US" sz="1600" dirty="0"/>
-          </a:p>
-        </p:txBody>
-      </p:sp>
-      <p:sp>
-        <p:nvSpPr>
-          <p:cNvPr id="9" name="Text 7"/>
-          <p:cNvSpPr/>
-          <p:nvPr/>
-        </p:nvSpPr>
-        <p:spPr>
-          <a:xfrm>
-            <a:off x="914400" y="3886200"/>
-            <a:ext cx="2880360" cy="1280160"/>
-          </a:xfrm>
-          <a:prstGeom prst="rect">
-            <a:avLst/>
-          </a:prstGeom>
-          <a:noFill/>
-          <a:ln/>
-        </p:spPr>
-        <p:txBody>
-          <a:bodyPr wrap="square" lIns="0" tIns="0" rIns="0" bIns="0" rtlCol="0" anchor="t"/>
-          <a:lstStyle/>
-          <a:p>
-            <a:pPr indent="0" marL="0">
-              <a:lnSpc>
-                <a:spcPct val="115000"/>
-              </a:lnSpc>
-              <a:buNone/>
-            </a:pPr>
-            <a:r>
-              <a:rPr lang="en-US" sz="1250" dirty="0">
-                <a:solidFill>
-                  <a:srgbClr val="6B7280"/>
-                </a:solidFill>
-                <a:latin typeface="Meiryo" pitchFamily="34" charset="0"/>
-                <a:ea typeface="Meiryo" pitchFamily="34" charset="-122"/>
-                <a:cs typeface="Meiryo" pitchFamily="34" charset="-120"/>
-              </a:rPr>
-              <a:t>新規案件のうち"事故が少なそうなもの"で慣れる</a:t>
-            </a:r>
-            <a:endParaRPr lang="en-US" sz="1250" dirty="0"/>
+              <a:t>オーダーシートから自動</a:t>
+            </a:r>
+            <a:endParaRPr lang="en-US" sz="1050" dirty="0"/>
           </a:p>
         </p:txBody>
       </p:sp>
@@ -9799,8 +10838,8 @@
         </p:nvSpPr>
         <p:spPr>
           <a:xfrm>
-            <a:off x="4069080" y="3291840"/>
-            <a:ext cx="274320" cy="457200"/>
+            <a:off x="2506828" y="2926080"/>
+            <a:ext cx="347472" cy="457200"/>
           </a:xfrm>
           <a:prstGeom prst="rect">
             <a:avLst/>
@@ -9816,9 +10855,9 @@
               <a:buNone/>
             </a:pPr>
             <a:r>
-              <a:rPr lang="en-US" sz="1600" dirty="0">
-                <a:solidFill>
-                  <a:srgbClr val="CADCFC"/>
+              <a:rPr lang="en-US" sz="1500" dirty="0">
+                <a:solidFill>
+                  <a:srgbClr val="B9C4DB"/>
                 </a:solidFill>
                 <a:latin typeface="Meiryo" pitchFamily="34" charset="0"/>
                 <a:ea typeface="Meiryo" pitchFamily="34" charset="-122"/>
@@ -9826,7 +10865,7 @@
               </a:rPr>
               <a:t>▶</a:t>
             </a:r>
-            <a:endParaRPr lang="en-US" sz="1600" dirty="0"/>
+            <a:endParaRPr lang="en-US" sz="1500" dirty="0"/>
           </a:p>
         </p:txBody>
       </p:sp>
@@ -9838,16 +10877,16 @@
         </p:nvSpPr>
         <p:spPr>
           <a:xfrm>
-            <a:off x="4343400" y="1783080"/>
-            <a:ext cx="3429000" cy="3566160"/>
+            <a:off x="2836012" y="2651760"/>
+            <a:ext cx="1965960" cy="2286000"/>
           </a:xfrm>
           <a:prstGeom prst="roundRect">
             <a:avLst>
-              <a:gd name="adj" fmla="val 2667"/>
+              <a:gd name="adj" fmla="val 4651"/>
             </a:avLst>
           </a:prstGeom>
           <a:solidFill>
-            <a:srgbClr val="F7F9FD"/>
+            <a:srgbClr val="FFFFFF"/>
           </a:solidFill>
           <a:ln w="12700">
             <a:solidFill>
@@ -9872,18 +10911,25 @@
         </p:nvSpPr>
         <p:spPr>
           <a:xfrm>
-            <a:off x="4617720" y="2011680"/>
-            <a:ext cx="2011680" cy="502920"/>
+            <a:off x="3572104" y="2871216"/>
+            <a:ext cx="493776" cy="493776"/>
           </a:xfrm>
           <a:prstGeom prst="roundRect">
             <a:avLst>
-              <a:gd name="adj" fmla="val 90909"/>
+              <a:gd name="adj" fmla="val 16667"/>
             </a:avLst>
           </a:prstGeom>
           <a:solidFill>
-            <a:srgbClr val="E1A33A"/>
-          </a:solidFill>
-          <a:ln/>
+            <a:srgbClr val="2C6E8F"/>
+          </a:solidFill>
+          <a:ln/>
+          <a:effectLst>
+            <a:outerShdw sx="100000" sy="100000" kx="0" ky="0" algn="bl" rotWithShape="0" blurRad="88900" dist="25400" dir="5400000">
+              <a:srgbClr val="8FA0C4">
+                <a:alpha val="30000"/>
+              </a:srgbClr>
+            </a:outerShdw>
+          </a:effectLst>
         </p:spPr>
         <p:txBody>
           <a:bodyPr wrap="square" lIns="0" tIns="0" rIns="0" bIns="0" rtlCol="0" anchor="ctr"/>
@@ -9893,7 +10939,7 @@
               <a:buNone/>
             </a:pPr>
             <a:r>
-              <a:rPr lang="en-US" sz="1300" b="1" dirty="0">
+              <a:rPr lang="en-US" sz="1200" b="1" dirty="0">
                 <a:solidFill>
                   <a:srgbClr val="FFFFFF"/>
                 </a:solidFill>
@@ -9901,9 +10947,9 @@
                 <a:ea typeface="Meiryo" pitchFamily="34" charset="-122"/>
                 <a:cs typeface="Meiryo" pitchFamily="34" charset="-120"/>
               </a:rPr>
-              <a:t>アンケート</a:t>
-            </a:r>
-            <a:endParaRPr lang="en-US" sz="1300" dirty="0"/>
+              <a:t>2</a:t>
+            </a:r>
+            <a:endParaRPr lang="en-US" sz="1200" dirty="0"/>
           </a:p>
         </p:txBody>
       </p:sp>
@@ -9915,24 +10961,69 @@
         </p:nvSpPr>
         <p:spPr>
           <a:xfrm>
-            <a:off x="4617720" y="2697480"/>
-            <a:ext cx="2880360" cy="365760"/>
-          </a:xfrm>
-          <a:prstGeom prst="rect">
-            <a:avLst/>
-          </a:prstGeom>
-          <a:noFill/>
-          <a:ln/>
-        </p:spPr>
-        <p:txBody>
-          <a:bodyPr wrap="square" lIns="0" tIns="0" rIns="0" bIns="0" rtlCol="0" anchor="ctr"/>
-          <a:lstStyle/>
-          <a:p>
-            <a:pPr indent="0" marL="0">
-              <a:buNone/>
-            </a:pPr>
-            <a:r>
-              <a:rPr lang="en-US" sz="1300" b="1" dirty="0">
+            <a:off x="2909164" y="3493008"/>
+            <a:ext cx="1819656" cy="457200"/>
+          </a:xfrm>
+          <a:prstGeom prst="rect">
+            <a:avLst/>
+          </a:prstGeom>
+          <a:noFill/>
+          <a:ln/>
+        </p:spPr>
+        <p:txBody>
+          <a:bodyPr wrap="square" lIns="0" tIns="0" rIns="0" bIns="0" rtlCol="0" anchor="ctr"/>
+          <a:lstStyle/>
+          <a:p>
+            <a:pPr algn="ctr" indent="0" marL="0">
+              <a:lnSpc>
+                <a:spcPct val="105000"/>
+              </a:lnSpc>
+              <a:buNone/>
+            </a:pPr>
+            <a:r>
+              <a:rPr lang="en-US" sz="1250" b="1" dirty="0">
+                <a:solidFill>
+                  <a:srgbClr val="141A33"/>
+                </a:solidFill>
+                <a:latin typeface="Meiryo" pitchFamily="34" charset="0"/>
+                <a:ea typeface="Meiryo" pitchFamily="34" charset="-122"/>
+                <a:cs typeface="Meiryo" pitchFamily="34" charset="-120"/>
+              </a:rPr>
+              <a:t>書類が到着</a:t>
+            </a:r>
+            <a:endParaRPr lang="en-US" sz="1250" dirty="0"/>
+          </a:p>
+        </p:txBody>
+      </p:sp>
+      <p:sp>
+        <p:nvSpPr>
+          <p:cNvPr id="14" name="Text 12"/>
+          <p:cNvSpPr/>
+          <p:nvPr/>
+        </p:nvSpPr>
+        <p:spPr>
+          <a:xfrm>
+            <a:off x="2927452" y="3950208"/>
+            <a:ext cx="1783080" cy="777240"/>
+          </a:xfrm>
+          <a:prstGeom prst="rect">
+            <a:avLst/>
+          </a:prstGeom>
+          <a:noFill/>
+          <a:ln/>
+        </p:spPr>
+        <p:txBody>
+          <a:bodyPr wrap="square" lIns="0" tIns="0" rIns="0" bIns="0" rtlCol="0" anchor="t"/>
+          <a:lstStyle/>
+          <a:p>
+            <a:pPr algn="ctr" indent="0" marL="0">
+              <a:lnSpc>
+                <a:spcPct val="108000"/>
+              </a:lnSpc>
+              <a:buNone/>
+            </a:pPr>
+            <a:r>
+              <a:rPr lang="en-US" sz="1050" dirty="0">
                 <a:solidFill>
                   <a:srgbClr val="6B7280"/>
                 </a:solidFill>
@@ -9940,48 +11031,9 @@
                 <a:ea typeface="Meiryo" pitchFamily="34" charset="-122"/>
                 <a:cs typeface="Meiryo" pitchFamily="34" charset="-120"/>
               </a:rPr>
-              <a:t>1ヶ月後</a:t>
-            </a:r>
-            <a:endParaRPr lang="en-US" sz="1300" dirty="0"/>
-          </a:p>
-        </p:txBody>
-      </p:sp>
-      <p:sp>
-        <p:nvSpPr>
-          <p:cNvPr id="14" name="Text 12"/>
-          <p:cNvSpPr/>
-          <p:nvPr/>
-        </p:nvSpPr>
-        <p:spPr>
-          <a:xfrm>
-            <a:off x="4617720" y="3108960"/>
-            <a:ext cx="2880360" cy="640080"/>
-          </a:xfrm>
-          <a:prstGeom prst="rect">
-            <a:avLst/>
-          </a:prstGeom>
-          <a:noFill/>
-          <a:ln/>
-        </p:spPr>
-        <p:txBody>
-          <a:bodyPr wrap="square" lIns="0" tIns="0" rIns="0" bIns="0" rtlCol="0" anchor="t"/>
-          <a:lstStyle/>
-          <a:p>
-            <a:pPr indent="0" marL="0">
-              <a:buNone/>
-            </a:pPr>
-            <a:r>
-              <a:rPr lang="en-US" sz="1600" b="1" dirty="0">
-                <a:solidFill>
-                  <a:srgbClr val="141A33"/>
-                </a:solidFill>
-                <a:latin typeface="Meiryo" pitchFamily="34" charset="0"/>
-                <a:ea typeface="Meiryo" pitchFamily="34" charset="-122"/>
-                <a:cs typeface="Meiryo" pitchFamily="34" charset="-120"/>
-              </a:rPr>
-              <a:t>要望を集めて改善</a:t>
-            </a:r>
-            <a:endParaRPr lang="en-US" sz="1600" dirty="0"/>
+              <a:t>戸籍・契約書類 等</a:t>
+            </a:r>
+            <a:endParaRPr lang="en-US" sz="1050" dirty="0"/>
           </a:p>
         </p:txBody>
       </p:sp>
@@ -9993,50 +11045,8 @@
         </p:nvSpPr>
         <p:spPr>
           <a:xfrm>
-            <a:off x="4617720" y="3886200"/>
-            <a:ext cx="2880360" cy="1280160"/>
-          </a:xfrm>
-          <a:prstGeom prst="rect">
-            <a:avLst/>
-          </a:prstGeom>
-          <a:noFill/>
-          <a:ln/>
-        </p:spPr>
-        <p:txBody>
-          <a:bodyPr wrap="square" lIns="0" tIns="0" rIns="0" bIns="0" rtlCol="0" anchor="t"/>
-          <a:lstStyle/>
-          <a:p>
-            <a:pPr indent="0" marL="0">
-              <a:lnSpc>
-                <a:spcPct val="115000"/>
-              </a:lnSpc>
-              <a:buNone/>
-            </a:pPr>
-            <a:r>
-              <a:rPr lang="en-US" sz="1250" dirty="0">
-                <a:solidFill>
-                  <a:srgbClr val="6B7280"/>
-                </a:solidFill>
-                <a:latin typeface="Meiryo" pitchFamily="34" charset="0"/>
-                <a:ea typeface="Meiryo" pitchFamily="34" charset="-122"/>
-                <a:cs typeface="Meiryo" pitchFamily="34" charset="-120"/>
-              </a:rPr>
-              <a:t>現場の声を元にアップデート</a:t>
-            </a:r>
-            <a:endParaRPr lang="en-US" sz="1250" dirty="0"/>
-          </a:p>
-        </p:txBody>
-      </p:sp>
-      <p:sp>
-        <p:nvSpPr>
-          <p:cNvPr id="16" name="Text 14"/>
-          <p:cNvSpPr/>
-          <p:nvPr/>
-        </p:nvSpPr>
-        <p:spPr>
-          <a:xfrm>
-            <a:off x="7772400" y="3291840"/>
-            <a:ext cx="274320" cy="457200"/>
+            <a:off x="4783684" y="2926080"/>
+            <a:ext cx="347472" cy="457200"/>
           </a:xfrm>
           <a:prstGeom prst="rect">
             <a:avLst/>
@@ -10052,9 +11062,9 @@
               <a:buNone/>
             </a:pPr>
             <a:r>
-              <a:rPr lang="en-US" sz="1600" dirty="0">
-                <a:solidFill>
-                  <a:srgbClr val="CADCFC"/>
+              <a:rPr lang="en-US" sz="1500" dirty="0">
+                <a:solidFill>
+                  <a:srgbClr val="B9C4DB"/>
                 </a:solidFill>
                 <a:latin typeface="Meiryo" pitchFamily="34" charset="0"/>
                 <a:ea typeface="Meiryo" pitchFamily="34" charset="-122"/>
@@ -10062,28 +11072,28 @@
               </a:rPr>
               <a:t>▶</a:t>
             </a:r>
-            <a:endParaRPr lang="en-US" sz="1600" dirty="0"/>
-          </a:p>
-        </p:txBody>
-      </p:sp>
-      <p:sp>
-        <p:nvSpPr>
-          <p:cNvPr id="17" name="Shape 15"/>
-          <p:cNvSpPr/>
-          <p:nvPr/>
-        </p:nvSpPr>
-        <p:spPr>
-          <a:xfrm>
-            <a:off x="8046720" y="1783080"/>
-            <a:ext cx="3429000" cy="3566160"/>
+            <a:endParaRPr lang="en-US" sz="1500" dirty="0"/>
+          </a:p>
+        </p:txBody>
+      </p:sp>
+      <p:sp>
+        <p:nvSpPr>
+          <p:cNvPr id="16" name="Shape 14"/>
+          <p:cNvSpPr/>
+          <p:nvPr/>
+        </p:nvSpPr>
+        <p:spPr>
+          <a:xfrm>
+            <a:off x="5112868" y="2651760"/>
+            <a:ext cx="1965960" cy="2286000"/>
           </a:xfrm>
           <a:prstGeom prst="roundRect">
             <a:avLst>
-              <a:gd name="adj" fmla="val 2667"/>
+              <a:gd name="adj" fmla="val 4651"/>
             </a:avLst>
           </a:prstGeom>
           <a:solidFill>
-            <a:srgbClr val="F7F9FD"/>
+            <a:srgbClr val="FFFFFF"/>
           </a:solidFill>
           <a:ln w="12700">
             <a:solidFill>
@@ -10102,24 +11112,445 @@
       </p:sp>
       <p:sp>
         <p:nvSpPr>
-          <p:cNvPr id="18" name="Text 16"/>
-          <p:cNvSpPr/>
-          <p:nvPr/>
-        </p:nvSpPr>
-        <p:spPr>
-          <a:xfrm>
-            <a:off x="8321040" y="2011680"/>
-            <a:ext cx="2011680" cy="502920"/>
+          <p:cNvPr id="17" name="Text 15"/>
+          <p:cNvSpPr/>
+          <p:nvPr/>
+        </p:nvSpPr>
+        <p:spPr>
+          <a:xfrm>
+            <a:off x="5848960" y="2871216"/>
+            <a:ext cx="493776" cy="493776"/>
           </a:xfrm>
           <a:prstGeom prst="roundRect">
             <a:avLst>
-              <a:gd name="adj" fmla="val 90909"/>
+              <a:gd name="adj" fmla="val 16667"/>
             </a:avLst>
           </a:prstGeom>
           <a:solidFill>
+            <a:srgbClr val="4F46E5"/>
+          </a:solidFill>
+          <a:ln/>
+          <a:effectLst>
+            <a:outerShdw sx="100000" sy="100000" kx="0" ky="0" algn="bl" rotWithShape="0" blurRad="88900" dist="25400" dir="5400000">
+              <a:srgbClr val="8FA0C4">
+                <a:alpha val="30000"/>
+              </a:srgbClr>
+            </a:outerShdw>
+          </a:effectLst>
+        </p:spPr>
+        <p:txBody>
+          <a:bodyPr wrap="square" lIns="0" tIns="0" rIns="0" bIns="0" rtlCol="0" anchor="ctr"/>
+          <a:lstStyle/>
+          <a:p>
+            <a:pPr algn="ctr" indent="0" marL="0">
+              <a:buNone/>
+            </a:pPr>
+            <a:r>
+              <a:rPr lang="en-US" sz="1200" b="1" dirty="0">
+                <a:solidFill>
+                  <a:srgbClr val="FFFFFF"/>
+                </a:solidFill>
+                <a:latin typeface="Meiryo" pitchFamily="34" charset="0"/>
+                <a:ea typeface="Meiryo" pitchFamily="34" charset="-122"/>
+                <a:cs typeface="Meiryo" pitchFamily="34" charset="-120"/>
+              </a:rPr>
+              <a:t>3</a:t>
+            </a:r>
+            <a:endParaRPr lang="en-US" sz="1200" dirty="0"/>
+          </a:p>
+        </p:txBody>
+      </p:sp>
+      <p:sp>
+        <p:nvSpPr>
+          <p:cNvPr id="18" name="Text 16"/>
+          <p:cNvSpPr/>
+          <p:nvPr/>
+        </p:nvSpPr>
+        <p:spPr>
+          <a:xfrm>
+            <a:off x="5186020" y="3493008"/>
+            <a:ext cx="1819656" cy="457200"/>
+          </a:xfrm>
+          <a:prstGeom prst="rect">
+            <a:avLst/>
+          </a:prstGeom>
+          <a:noFill/>
+          <a:ln/>
+        </p:spPr>
+        <p:txBody>
+          <a:bodyPr wrap="square" lIns="0" tIns="0" rIns="0" bIns="0" rtlCol="0" anchor="ctr"/>
+          <a:lstStyle/>
+          <a:p>
+            <a:pPr algn="ctr" indent="0" marL="0">
+              <a:lnSpc>
+                <a:spcPct val="105000"/>
+              </a:lnSpc>
+              <a:buNone/>
+            </a:pPr>
+            <a:r>
+              <a:rPr lang="en-US" sz="1250" b="1" dirty="0">
+                <a:solidFill>
+                  <a:srgbClr val="141A33"/>
+                </a:solidFill>
+                <a:latin typeface="Meiryo" pitchFamily="34" charset="0"/>
+                <a:ea typeface="Meiryo" pitchFamily="34" charset="-122"/>
+                <a:cs typeface="Meiryo" pitchFamily="34" charset="-120"/>
+              </a:rPr>
+              <a:t>受信簿で処理</a:t>
+            </a:r>
+            <a:endParaRPr lang="en-US" sz="1250" dirty="0"/>
+          </a:p>
+        </p:txBody>
+      </p:sp>
+      <p:sp>
+        <p:nvSpPr>
+          <p:cNvPr id="19" name="Text 17"/>
+          <p:cNvSpPr/>
+          <p:nvPr/>
+        </p:nvSpPr>
+        <p:spPr>
+          <a:xfrm>
+            <a:off x="5204308" y="3950208"/>
+            <a:ext cx="1783080" cy="777240"/>
+          </a:xfrm>
+          <a:prstGeom prst="rect">
+            <a:avLst/>
+          </a:prstGeom>
+          <a:noFill/>
+          <a:ln/>
+        </p:spPr>
+        <p:txBody>
+          <a:bodyPr wrap="square" lIns="0" tIns="0" rIns="0" bIns="0" rtlCol="0" anchor="t"/>
+          <a:lstStyle/>
+          <a:p>
+            <a:pPr algn="ctr" indent="0" marL="0">
+              <a:lnSpc>
+                <a:spcPct val="108000"/>
+              </a:lnSpc>
+              <a:buNone/>
+            </a:pPr>
+            <a:r>
+              <a:rPr lang="en-US" sz="1050" dirty="0">
+                <a:solidFill>
+                  <a:srgbClr val="6B7280"/>
+                </a:solidFill>
+                <a:latin typeface="Meiryo" pitchFamily="34" charset="0"/>
+                <a:ea typeface="Meiryo" pitchFamily="34" charset="-122"/>
+                <a:cs typeface="Meiryo" pitchFamily="34" charset="-120"/>
+              </a:rPr>
+              <a:t>候補から選ぶだけ</a:t>
+            </a:r>
+            <a:endParaRPr lang="en-US" sz="1050" dirty="0"/>
+          </a:p>
+        </p:txBody>
+      </p:sp>
+      <p:sp>
+        <p:nvSpPr>
+          <p:cNvPr id="20" name="Text 18"/>
+          <p:cNvSpPr/>
+          <p:nvPr/>
+        </p:nvSpPr>
+        <p:spPr>
+          <a:xfrm>
+            <a:off x="7060540" y="2926080"/>
+            <a:ext cx="347472" cy="457200"/>
+          </a:xfrm>
+          <a:prstGeom prst="rect">
+            <a:avLst/>
+          </a:prstGeom>
+          <a:noFill/>
+          <a:ln/>
+        </p:spPr>
+        <p:txBody>
+          <a:bodyPr wrap="square" lIns="0" tIns="0" rIns="0" bIns="0" rtlCol="0" anchor="ctr"/>
+          <a:lstStyle/>
+          <a:p>
+            <a:pPr algn="ctr" indent="0" marL="0">
+              <a:buNone/>
+            </a:pPr>
+            <a:r>
+              <a:rPr lang="en-US" sz="1500" dirty="0">
+                <a:solidFill>
+                  <a:srgbClr val="B9C4DB"/>
+                </a:solidFill>
+                <a:latin typeface="Meiryo" pitchFamily="34" charset="0"/>
+                <a:ea typeface="Meiryo" pitchFamily="34" charset="-122"/>
+                <a:cs typeface="Meiryo" pitchFamily="34" charset="-120"/>
+              </a:rPr>
+              <a:t>▶</a:t>
+            </a:r>
+            <a:endParaRPr lang="en-US" sz="1500" dirty="0"/>
+          </a:p>
+        </p:txBody>
+      </p:sp>
+      <p:sp>
+        <p:nvSpPr>
+          <p:cNvPr id="21" name="Shape 19"/>
+          <p:cNvSpPr/>
+          <p:nvPr/>
+        </p:nvSpPr>
+        <p:spPr>
+          <a:xfrm>
+            <a:off x="7389724" y="2651760"/>
+            <a:ext cx="1965960" cy="2286000"/>
+          </a:xfrm>
+          <a:prstGeom prst="roundRect">
+            <a:avLst>
+              <a:gd name="adj" fmla="val 4651"/>
+            </a:avLst>
+          </a:prstGeom>
+          <a:solidFill>
+            <a:srgbClr val="FFFFFF"/>
+          </a:solidFill>
+          <a:ln w="12700">
+            <a:solidFill>
+              <a:srgbClr val="E4E9F2"/>
+            </a:solidFill>
+            <a:prstDash val="solid"/>
+          </a:ln>
+          <a:effectLst>
+            <a:outerShdw sx="100000" sy="100000" kx="0" ky="0" algn="bl" rotWithShape="0" blurRad="114300" dist="38100" dir="5400000">
+              <a:srgbClr val="8FA0C4">
+                <a:alpha val="30000"/>
+              </a:srgbClr>
+            </a:outerShdw>
+          </a:effectLst>
+        </p:spPr>
+      </p:sp>
+      <p:sp>
+        <p:nvSpPr>
+          <p:cNvPr id="22" name="Text 20"/>
+          <p:cNvSpPr/>
+          <p:nvPr/>
+        </p:nvSpPr>
+        <p:spPr>
+          <a:xfrm>
+            <a:off x="8125816" y="2871216"/>
+            <a:ext cx="493776" cy="493776"/>
+          </a:xfrm>
+          <a:prstGeom prst="roundRect">
+            <a:avLst>
+              <a:gd name="adj" fmla="val 16667"/>
+            </a:avLst>
+          </a:prstGeom>
+          <a:solidFill>
+            <a:srgbClr val="E0A64B"/>
+          </a:solidFill>
+          <a:ln/>
+          <a:effectLst>
+            <a:outerShdw sx="100000" sy="100000" kx="0" ky="0" algn="bl" rotWithShape="0" blurRad="88900" dist="25400" dir="5400000">
+              <a:srgbClr val="8FA0C4">
+                <a:alpha val="30000"/>
+              </a:srgbClr>
+            </a:outerShdw>
+          </a:effectLst>
+        </p:spPr>
+        <p:txBody>
+          <a:bodyPr wrap="square" lIns="0" tIns="0" rIns="0" bIns="0" rtlCol="0" anchor="ctr"/>
+          <a:lstStyle/>
+          <a:p>
+            <a:pPr algn="ctr" indent="0" marL="0">
+              <a:buNone/>
+            </a:pPr>
+            <a:r>
+              <a:rPr lang="en-US" sz="1200" b="1" dirty="0">
+                <a:solidFill>
+                  <a:srgbClr val="FFFFFF"/>
+                </a:solidFill>
+                <a:latin typeface="Meiryo" pitchFamily="34" charset="0"/>
+                <a:ea typeface="Meiryo" pitchFamily="34" charset="-122"/>
+                <a:cs typeface="Meiryo" pitchFamily="34" charset="-120"/>
+              </a:rPr>
+              <a:t>4</a:t>
+            </a:r>
+            <a:endParaRPr lang="en-US" sz="1200" dirty="0"/>
+          </a:p>
+        </p:txBody>
+      </p:sp>
+      <p:sp>
+        <p:nvSpPr>
+          <p:cNvPr id="23" name="Text 21"/>
+          <p:cNvSpPr/>
+          <p:nvPr/>
+        </p:nvSpPr>
+        <p:spPr>
+          <a:xfrm>
+            <a:off x="7462876" y="3493008"/>
+            <a:ext cx="1819656" cy="457200"/>
+          </a:xfrm>
+          <a:prstGeom prst="rect">
+            <a:avLst/>
+          </a:prstGeom>
+          <a:noFill/>
+          <a:ln/>
+        </p:spPr>
+        <p:txBody>
+          <a:bodyPr wrap="square" lIns="0" tIns="0" rIns="0" bIns="0" rtlCol="0" anchor="ctr"/>
+          <a:lstStyle/>
+          <a:p>
+            <a:pPr algn="ctr" indent="0" marL="0">
+              <a:lnSpc>
+                <a:spcPct val="105000"/>
+              </a:lnSpc>
+              <a:buNone/>
+            </a:pPr>
+            <a:r>
+              <a:rPr lang="en-US" sz="1250" b="1" dirty="0">
+                <a:solidFill>
+                  <a:srgbClr val="141A33"/>
+                </a:solidFill>
+                <a:latin typeface="Meiryo" pitchFamily="34" charset="0"/>
+                <a:ea typeface="Meiryo" pitchFamily="34" charset="-122"/>
+                <a:cs typeface="Meiryo" pitchFamily="34" charset="-120"/>
+              </a:rPr>
+              <a:t>タスクに紐づけ</a:t>
+            </a:r>
+            <a:endParaRPr lang="en-US" sz="1250" dirty="0"/>
+          </a:p>
+        </p:txBody>
+      </p:sp>
+      <p:sp>
+        <p:nvSpPr>
+          <p:cNvPr id="24" name="Text 22"/>
+          <p:cNvSpPr/>
+          <p:nvPr/>
+        </p:nvSpPr>
+        <p:spPr>
+          <a:xfrm>
+            <a:off x="7481164" y="3950208"/>
+            <a:ext cx="1783080" cy="777240"/>
+          </a:xfrm>
+          <a:prstGeom prst="rect">
+            <a:avLst/>
+          </a:prstGeom>
+          <a:noFill/>
+          <a:ln/>
+        </p:spPr>
+        <p:txBody>
+          <a:bodyPr wrap="square" lIns="0" tIns="0" rIns="0" bIns="0" rtlCol="0" anchor="t"/>
+          <a:lstStyle/>
+          <a:p>
+            <a:pPr algn="ctr" indent="0" marL="0">
+              <a:lnSpc>
+                <a:spcPct val="108000"/>
+              </a:lnSpc>
+              <a:buNone/>
+            </a:pPr>
+            <a:r>
+              <a:rPr lang="en-US" sz="1050" dirty="0">
+                <a:solidFill>
+                  <a:srgbClr val="6B7280"/>
+                </a:solidFill>
+                <a:latin typeface="Meiryo" pitchFamily="34" charset="0"/>
+                <a:ea typeface="Meiryo" pitchFamily="34" charset="-122"/>
+                <a:cs typeface="Meiryo" pitchFamily="34" charset="-120"/>
+              </a:rPr>
+              <a:t>着手OKフラグ自動ON</a:t>
+            </a:r>
+            <a:endParaRPr lang="en-US" sz="1050" dirty="0"/>
+          </a:p>
+        </p:txBody>
+      </p:sp>
+      <p:sp>
+        <p:nvSpPr>
+          <p:cNvPr id="25" name="Text 23"/>
+          <p:cNvSpPr/>
+          <p:nvPr/>
+        </p:nvSpPr>
+        <p:spPr>
+          <a:xfrm>
+            <a:off x="9337396" y="2926080"/>
+            <a:ext cx="347472" cy="457200"/>
+          </a:xfrm>
+          <a:prstGeom prst="rect">
+            <a:avLst/>
+          </a:prstGeom>
+          <a:noFill/>
+          <a:ln/>
+        </p:spPr>
+        <p:txBody>
+          <a:bodyPr wrap="square" lIns="0" tIns="0" rIns="0" bIns="0" rtlCol="0" anchor="ctr"/>
+          <a:lstStyle/>
+          <a:p>
+            <a:pPr algn="ctr" indent="0" marL="0">
+              <a:buNone/>
+            </a:pPr>
+            <a:r>
+              <a:rPr lang="en-US" sz="1500" dirty="0">
+                <a:solidFill>
+                  <a:srgbClr val="B9C4DB"/>
+                </a:solidFill>
+                <a:latin typeface="Meiryo" pitchFamily="34" charset="0"/>
+                <a:ea typeface="Meiryo" pitchFamily="34" charset="-122"/>
+                <a:cs typeface="Meiryo" pitchFamily="34" charset="-120"/>
+              </a:rPr>
+              <a:t>▶</a:t>
+            </a:r>
+            <a:endParaRPr lang="en-US" sz="1500" dirty="0"/>
+          </a:p>
+        </p:txBody>
+      </p:sp>
+      <p:sp>
+        <p:nvSpPr>
+          <p:cNvPr id="26" name="Shape 24"/>
+          <p:cNvSpPr/>
+          <p:nvPr/>
+        </p:nvSpPr>
+        <p:spPr>
+          <a:xfrm>
+            <a:off x="9666580" y="2651760"/>
+            <a:ext cx="1965960" cy="2286000"/>
+          </a:xfrm>
+          <a:prstGeom prst="roundRect">
+            <a:avLst>
+              <a:gd name="adj" fmla="val 4651"/>
+            </a:avLst>
+          </a:prstGeom>
+          <a:solidFill>
+            <a:srgbClr val="FFFFFF"/>
+          </a:solidFill>
+          <a:ln w="12700">
+            <a:solidFill>
+              <a:srgbClr val="E4E9F2"/>
+            </a:solidFill>
+            <a:prstDash val="solid"/>
+          </a:ln>
+          <a:effectLst>
+            <a:outerShdw sx="100000" sy="100000" kx="0" ky="0" algn="bl" rotWithShape="0" blurRad="114300" dist="38100" dir="5400000">
+              <a:srgbClr val="8FA0C4">
+                <a:alpha val="30000"/>
+              </a:srgbClr>
+            </a:outerShdw>
+          </a:effectLst>
+        </p:spPr>
+      </p:sp>
+      <p:sp>
+        <p:nvSpPr>
+          <p:cNvPr id="27" name="Text 25"/>
+          <p:cNvSpPr/>
+          <p:nvPr/>
+        </p:nvSpPr>
+        <p:spPr>
+          <a:xfrm>
+            <a:off x="10402672" y="2871216"/>
+            <a:ext cx="493776" cy="493776"/>
+          </a:xfrm>
+          <a:prstGeom prst="roundRect">
+            <a:avLst>
+              <a:gd name="adj" fmla="val 16667"/>
+            </a:avLst>
+          </a:prstGeom>
+          <a:solidFill>
             <a:srgbClr val="2E8B6F"/>
           </a:solidFill>
           <a:ln/>
+          <a:effectLst>
+            <a:outerShdw sx="100000" sy="100000" kx="0" ky="0" algn="bl" rotWithShape="0" blurRad="88900" dist="25400" dir="5400000">
+              <a:srgbClr val="8FA0C4">
+                <a:alpha val="30000"/>
+              </a:srgbClr>
+            </a:outerShdw>
+          </a:effectLst>
         </p:spPr>
         <p:txBody>
           <a:bodyPr wrap="square" lIns="0" tIns="0" rIns="0" bIns="0" rtlCol="0" anchor="ctr"/>
@@ -10129,7 +11560,7 @@
               <a:buNone/>
             </a:pPr>
             <a:r>
-              <a:rPr lang="en-US" sz="1300" b="1" dirty="0">
+              <a:rPr lang="en-US" sz="1200" b="1" dirty="0">
                 <a:solidFill>
                   <a:srgbClr val="FFFFFF"/>
                 </a:solidFill>
@@ -10137,22 +11568,106 @@
                 <a:ea typeface="Meiryo" pitchFamily="34" charset="-122"/>
                 <a:cs typeface="Meiryo" pitchFamily="34" charset="-120"/>
               </a:rPr>
-              <a:t>STEP 2</a:t>
-            </a:r>
-            <a:endParaRPr lang="en-US" sz="1300" dirty="0"/>
-          </a:p>
-        </p:txBody>
-      </p:sp>
-      <p:sp>
-        <p:nvSpPr>
-          <p:cNvPr id="19" name="Text 17"/>
-          <p:cNvSpPr/>
-          <p:nvPr/>
-        </p:nvSpPr>
-        <p:spPr>
-          <a:xfrm>
-            <a:off x="8321040" y="2697480"/>
-            <a:ext cx="2880360" cy="365760"/>
+              <a:t>5</a:t>
+            </a:r>
+            <a:endParaRPr lang="en-US" sz="1200" dirty="0"/>
+          </a:p>
+        </p:txBody>
+      </p:sp>
+      <p:sp>
+        <p:nvSpPr>
+          <p:cNvPr id="28" name="Text 26"/>
+          <p:cNvSpPr/>
+          <p:nvPr/>
+        </p:nvSpPr>
+        <p:spPr>
+          <a:xfrm>
+            <a:off x="9739732" y="3493008"/>
+            <a:ext cx="1819656" cy="457200"/>
+          </a:xfrm>
+          <a:prstGeom prst="rect">
+            <a:avLst/>
+          </a:prstGeom>
+          <a:noFill/>
+          <a:ln/>
+        </p:spPr>
+        <p:txBody>
+          <a:bodyPr wrap="square" lIns="0" tIns="0" rIns="0" bIns="0" rtlCol="0" anchor="ctr"/>
+          <a:lstStyle/>
+          <a:p>
+            <a:pPr algn="ctr" indent="0" marL="0">
+              <a:lnSpc>
+                <a:spcPct val="105000"/>
+              </a:lnSpc>
+              <a:buNone/>
+            </a:pPr>
+            <a:r>
+              <a:rPr lang="en-US" sz="1250" b="1" dirty="0">
+                <a:solidFill>
+                  <a:srgbClr val="141A33"/>
+                </a:solidFill>
+                <a:latin typeface="Meiryo" pitchFamily="34" charset="0"/>
+                <a:ea typeface="Meiryo" pitchFamily="34" charset="-122"/>
+                <a:cs typeface="Meiryo" pitchFamily="34" charset="-120"/>
+              </a:rPr>
+              <a:t>納品対応へ</a:t>
+            </a:r>
+            <a:endParaRPr lang="en-US" sz="1250" dirty="0"/>
+          </a:p>
+        </p:txBody>
+      </p:sp>
+      <p:sp>
+        <p:nvSpPr>
+          <p:cNvPr id="29" name="Text 27"/>
+          <p:cNvSpPr/>
+          <p:nvPr/>
+        </p:nvSpPr>
+        <p:spPr>
+          <a:xfrm>
+            <a:off x="9758020" y="3950208"/>
+            <a:ext cx="1783080" cy="777240"/>
+          </a:xfrm>
+          <a:prstGeom prst="rect">
+            <a:avLst/>
+          </a:prstGeom>
+          <a:noFill/>
+          <a:ln/>
+        </p:spPr>
+        <p:txBody>
+          <a:bodyPr wrap="square" lIns="0" tIns="0" rIns="0" bIns="0" rtlCol="0" anchor="t"/>
+          <a:lstStyle/>
+          <a:p>
+            <a:pPr algn="ctr" indent="0" marL="0">
+              <a:lnSpc>
+                <a:spcPct val="108000"/>
+              </a:lnSpc>
+              <a:buNone/>
+            </a:pPr>
+            <a:r>
+              <a:rPr lang="en-US" sz="1050" dirty="0">
+                <a:solidFill>
+                  <a:srgbClr val="6B7280"/>
+                </a:solidFill>
+                <a:latin typeface="Meiryo" pitchFamily="34" charset="0"/>
+                <a:ea typeface="Meiryo" pitchFamily="34" charset="-122"/>
+                <a:cs typeface="Meiryo" pitchFamily="34" charset="-120"/>
+              </a:rPr>
+              <a:t>到着物ベースで完結</a:t>
+            </a:r>
+            <a:endParaRPr lang="en-US" sz="1050" dirty="0"/>
+          </a:p>
+        </p:txBody>
+      </p:sp>
+      <p:sp>
+        <p:nvSpPr>
+          <p:cNvPr id="30" name="Text 28"/>
+          <p:cNvSpPr/>
+          <p:nvPr/>
+        </p:nvSpPr>
+        <p:spPr>
+          <a:xfrm>
+            <a:off x="640080" y="5943600"/>
+            <a:ext cx="11155680" cy="365760"/>
           </a:xfrm>
           <a:prstGeom prst="rect">
             <a:avLst/>
@@ -10168,7 +11683,7 @@
               <a:buNone/>
             </a:pPr>
             <a:r>
-              <a:rPr lang="en-US" sz="1300" b="1" dirty="0">
+              <a:rPr lang="en-US" sz="1200" i="1" dirty="0">
                 <a:solidFill>
                   <a:srgbClr val="6B7280"/>
                 </a:solidFill>
@@ -10176,129 +11691,9 @@
                 <a:ea typeface="Meiryo" pitchFamily="34" charset="-122"/>
                 <a:cs typeface="Meiryo" pitchFamily="34" charset="-120"/>
               </a:rPr>
-              <a:t>〜3ヶ月</a:t>
-            </a:r>
-            <a:endParaRPr lang="en-US" sz="1300" dirty="0"/>
-          </a:p>
-        </p:txBody>
-      </p:sp>
-      <p:sp>
-        <p:nvSpPr>
-          <p:cNvPr id="20" name="Text 18"/>
-          <p:cNvSpPr/>
-          <p:nvPr/>
-        </p:nvSpPr>
-        <p:spPr>
-          <a:xfrm>
-            <a:off x="8321040" y="3108960"/>
-            <a:ext cx="2880360" cy="640080"/>
-          </a:xfrm>
-          <a:prstGeom prst="rect">
-            <a:avLst/>
-          </a:prstGeom>
-          <a:noFill/>
-          <a:ln/>
-        </p:spPr>
-        <p:txBody>
-          <a:bodyPr wrap="square" lIns="0" tIns="0" rIns="0" bIns="0" rtlCol="0" anchor="t"/>
-          <a:lstStyle/>
-          <a:p>
-            <a:pPr indent="0" marL="0">
-              <a:buNone/>
-            </a:pPr>
-            <a:r>
-              <a:rPr lang="en-US" sz="1600" b="1" dirty="0">
-                <a:solidFill>
-                  <a:srgbClr val="141A33"/>
-                </a:solidFill>
-                <a:latin typeface="Meiryo" pitchFamily="34" charset="0"/>
-                <a:ea typeface="Meiryo" pitchFamily="34" charset="-122"/>
-                <a:cs typeface="Meiryo" pitchFamily="34" charset="-120"/>
-              </a:rPr>
-              <a:t>件数を増やしながら</a:t>
-            </a:r>
-            <a:endParaRPr lang="en-US" sz="1600" dirty="0"/>
-          </a:p>
-        </p:txBody>
-      </p:sp>
-      <p:sp>
-        <p:nvSpPr>
-          <p:cNvPr id="21" name="Text 19"/>
-          <p:cNvSpPr/>
-          <p:nvPr/>
-        </p:nvSpPr>
-        <p:spPr>
-          <a:xfrm>
-            <a:off x="8321040" y="3886200"/>
-            <a:ext cx="2880360" cy="1280160"/>
-          </a:xfrm>
-          <a:prstGeom prst="rect">
-            <a:avLst/>
-          </a:prstGeom>
-          <a:noFill/>
-          <a:ln/>
-        </p:spPr>
-        <p:txBody>
-          <a:bodyPr wrap="square" lIns="0" tIns="0" rIns="0" bIns="0" rtlCol="0" anchor="t"/>
-          <a:lstStyle/>
-          <a:p>
-            <a:pPr indent="0" marL="0">
-              <a:lnSpc>
-                <a:spcPct val="115000"/>
-              </a:lnSpc>
-              <a:buNone/>
-            </a:pPr>
-            <a:r>
-              <a:rPr lang="en-US" sz="1250" dirty="0">
-                <a:solidFill>
-                  <a:srgbClr val="6B7280"/>
-                </a:solidFill>
-                <a:latin typeface="Meiryo" pitchFamily="34" charset="0"/>
-                <a:ea typeface="Meiryo" pitchFamily="34" charset="-122"/>
-                <a:cs typeface="Meiryo" pitchFamily="34" charset="-120"/>
-              </a:rPr>
-              <a:t>アップデートを回し続ける</a:t>
-            </a:r>
-            <a:endParaRPr lang="en-US" sz="1250" dirty="0"/>
-          </a:p>
-        </p:txBody>
-      </p:sp>
-      <p:sp>
-        <p:nvSpPr>
-          <p:cNvPr id="22" name="Text 20"/>
-          <p:cNvSpPr/>
-          <p:nvPr/>
-        </p:nvSpPr>
-        <p:spPr>
-          <a:xfrm>
-            <a:off x="640080" y="5897880"/>
-            <a:ext cx="10972800" cy="365760"/>
-          </a:xfrm>
-          <a:prstGeom prst="rect">
-            <a:avLst/>
-          </a:prstGeom>
-          <a:noFill/>
-          <a:ln/>
-        </p:spPr>
-        <p:txBody>
-          <a:bodyPr wrap="square" lIns="0" tIns="0" rIns="0" bIns="0" rtlCol="0" anchor="ctr"/>
-          <a:lstStyle/>
-          <a:p>
-            <a:pPr indent="0" marL="0">
-              <a:buNone/>
-            </a:pPr>
-            <a:r>
-              <a:rPr lang="en-US" sz="1400" b="1" dirty="0">
-                <a:solidFill>
-                  <a:srgbClr val="1E2761"/>
-                </a:solidFill>
-                <a:latin typeface="Meiryo" pitchFamily="34" charset="0"/>
-                <a:ea typeface="Meiryo" pitchFamily="34" charset="-122"/>
-                <a:cs typeface="Meiryo" pitchFamily="34" charset="-120"/>
-              </a:rPr>
-              <a:t>完璧じゃなくていい。まず少数で慣れて、すぐ直す。それを繰り返します。</a:t>
-            </a:r>
-            <a:endParaRPr lang="en-US" sz="1400" dirty="0"/>
+              <a:t>※ 毎回の新規作成が不要に。「受領待ち」を選ぶだけで受領状況を管理できる。</a:t>
+            </a:r>
+            <a:endParaRPr lang="en-US" sz="1200" dirty="0"/>
           </a:p>
         </p:txBody>
       </p:sp>
@@ -11371,7 +12766,7 @@
                 <a:ea typeface="Meiryo" pitchFamily="34" charset="-122"/>
                 <a:cs typeface="Meiryo" pitchFamily="34" charset="-120"/>
               </a:rPr>
-              <a:t>ROADMAP</a:t>
+              <a:t>MOBILE / TABLET</a:t>
             </a:r>
             <a:endParaRPr lang="en-US" sz="1200" dirty="0"/>
           </a:p>
@@ -11410,7 +12805,7 @@
                 <a:ea typeface="Meiryo" pitchFamily="34" charset="-122"/>
                 <a:cs typeface="Meiryo" pitchFamily="34" charset="-120"/>
               </a:rPr>
-              <a:t>今後のアップデート予定</a:t>
+              <a:t>面談シートのマルチデバイス化 — その場で入力、クラウドでつながる</a:t>
             </a:r>
             <a:endParaRPr lang="en-US" sz="3000" dirty="0"/>
           </a:p>
@@ -11418,18 +12813,372 @@
       </p:sp>
       <p:sp>
         <p:nvSpPr>
-          <p:cNvPr id="5" name="Shape 3"/>
-          <p:cNvSpPr/>
-          <p:nvPr/>
-        </p:nvSpPr>
-        <p:spPr>
-          <a:xfrm>
-            <a:off x="640080" y="1965960"/>
-            <a:ext cx="3429000" cy="3017520"/>
+          <p:cNvPr id="5" name="Text 3"/>
+          <p:cNvSpPr/>
+          <p:nvPr/>
+        </p:nvSpPr>
+        <p:spPr>
+          <a:xfrm>
+            <a:off x="640080" y="1426464"/>
+            <a:ext cx="11155680" cy="365760"/>
+          </a:xfrm>
+          <a:prstGeom prst="rect">
+            <a:avLst/>
+          </a:prstGeom>
+          <a:noFill/>
+          <a:ln/>
+        </p:spPr>
+        <p:txBody>
+          <a:bodyPr wrap="square" lIns="0" tIns="0" rIns="0" bIns="0" rtlCol="0" anchor="ctr"/>
+          <a:lstStyle/>
+          <a:p>
+            <a:pPr indent="0" marL="0">
+              <a:buNone/>
+            </a:pPr>
+            <a:r>
+              <a:rPr lang="en-US" sz="1250" dirty="0">
+                <a:solidFill>
+                  <a:srgbClr val="6B7280"/>
+                </a:solidFill>
+                <a:latin typeface="Meiryo" pitchFamily="34" charset="0"/>
+                <a:ea typeface="Meiryo" pitchFamily="34" charset="-122"/>
+                <a:cs typeface="Meiryo" pitchFamily="34" charset="-120"/>
+              </a:rPr>
+              <a:t>スマホ・タブレットの面談シートで入力（手書き・タイピング・AI画像認識）。クラウドで同期し、PCでオーダーシート化・タスク自動生成まで。</a:t>
+            </a:r>
+            <a:endParaRPr lang="en-US" sz="1250" dirty="0"/>
+          </a:p>
+        </p:txBody>
+      </p:sp>
+      <p:sp>
+        <p:nvSpPr>
+          <p:cNvPr id="6" name="Text 4"/>
+          <p:cNvSpPr/>
+          <p:nvPr/>
+        </p:nvSpPr>
+        <p:spPr>
+          <a:xfrm>
+            <a:off x="1828800" y="2697480"/>
+            <a:ext cx="1051560" cy="1874520"/>
           </a:xfrm>
           <a:prstGeom prst="roundRect">
             <a:avLst>
-              <a:gd name="adj" fmla="val 3030"/>
+              <a:gd name="adj" fmla="val 12174"/>
+            </a:avLst>
+          </a:prstGeom>
+          <a:solidFill>
+            <a:srgbClr val="1E2761"/>
+          </a:solidFill>
+          <a:ln w="25400">
+            <a:solidFill>
+              <a:srgbClr val="2A3570"/>
+            </a:solidFill>
+          </a:ln>
+          <a:effectLst>
+            <a:outerShdw sx="100000" sy="100000" kx="0" ky="0" algn="bl" rotWithShape="0" blurRad="101600" dist="38100" dir="5400000">
+              <a:srgbClr val="8FA0C4">
+                <a:alpha val="30000"/>
+              </a:srgbClr>
+            </a:outerShdw>
+          </a:effectLst>
+        </p:spPr>
+        <p:txBody>
+          <a:bodyPr wrap="square" lIns="0" tIns="0" rIns="0" bIns="0" rtlCol="0" anchor="ctr"/>
+          <a:lstStyle/>
+          <a:p>
+            <a:pPr algn="ctr" indent="0" marL="0">
+              <a:buNone/>
+            </a:pPr>
+            <a:r>
+              <a:rPr lang="en-US" sz="1200" b="1" dirty="0">
+                <a:solidFill>
+                  <a:srgbClr val="CADCFC"/>
+                </a:solidFill>
+                <a:latin typeface="Meiryo" pitchFamily="34" charset="0"/>
+                <a:ea typeface="Meiryo" pitchFamily="34" charset="-122"/>
+                <a:cs typeface="Meiryo" pitchFamily="34" charset="-120"/>
+              </a:rPr>
+              <a:t>スマホ</a:t>
+            </a:r>
+            <a:endParaRPr lang="en-US" sz="1200" dirty="0"/>
+          </a:p>
+        </p:txBody>
+      </p:sp>
+      <p:sp>
+        <p:nvSpPr>
+          <p:cNvPr id="7" name="Text 5"/>
+          <p:cNvSpPr/>
+          <p:nvPr/>
+        </p:nvSpPr>
+        <p:spPr>
+          <a:xfrm>
+            <a:off x="3063240" y="3200400"/>
+            <a:ext cx="1691640" cy="1371600"/>
+          </a:xfrm>
+          <a:prstGeom prst="roundRect">
+            <a:avLst>
+              <a:gd name="adj" fmla="val 6667"/>
+            </a:avLst>
+          </a:prstGeom>
+          <a:solidFill>
+            <a:srgbClr val="2C6E8F"/>
+          </a:solidFill>
+          <a:ln w="25400">
+            <a:solidFill>
+              <a:srgbClr val="245B76"/>
+            </a:solidFill>
+          </a:ln>
+          <a:effectLst>
+            <a:outerShdw sx="100000" sy="100000" kx="0" ky="0" algn="bl" rotWithShape="0" blurRad="101600" dist="38100" dir="5400000">
+              <a:srgbClr val="8FA0C4">
+                <a:alpha val="30000"/>
+              </a:srgbClr>
+            </a:outerShdw>
+          </a:effectLst>
+        </p:spPr>
+        <p:txBody>
+          <a:bodyPr wrap="square" lIns="0" tIns="0" rIns="0" bIns="0" rtlCol="0" anchor="ctr"/>
+          <a:lstStyle/>
+          <a:p>
+            <a:pPr algn="ctr" indent="0" marL="0">
+              <a:buNone/>
+            </a:pPr>
+            <a:r>
+              <a:rPr lang="en-US" sz="1200" b="1" dirty="0">
+                <a:solidFill>
+                  <a:srgbClr val="EAF5FB"/>
+                </a:solidFill>
+                <a:latin typeface="Meiryo" pitchFamily="34" charset="0"/>
+                <a:ea typeface="Meiryo" pitchFamily="34" charset="-122"/>
+                <a:cs typeface="Meiryo" pitchFamily="34" charset="-120"/>
+              </a:rPr>
+              <a:t>タブレット</a:t>
+            </a:r>
+            <a:endParaRPr lang="en-US" sz="1200" dirty="0"/>
+          </a:p>
+        </p:txBody>
+      </p:sp>
+      <p:sp>
+        <p:nvSpPr>
+          <p:cNvPr id="8" name="Text 6"/>
+          <p:cNvSpPr/>
+          <p:nvPr/>
+        </p:nvSpPr>
+        <p:spPr>
+          <a:xfrm>
+            <a:off x="1463040" y="4709160"/>
+            <a:ext cx="3657600" cy="457200"/>
+          </a:xfrm>
+          <a:prstGeom prst="rect">
+            <a:avLst/>
+          </a:prstGeom>
+          <a:noFill/>
+          <a:ln/>
+        </p:spPr>
+        <p:txBody>
+          <a:bodyPr wrap="square" lIns="0" tIns="0" rIns="0" bIns="0" rtlCol="0" anchor="ctr"/>
+          <a:lstStyle/>
+          <a:p>
+            <a:pPr algn="ctr" indent="0" marL="0">
+              <a:lnSpc>
+                <a:spcPct val="110000"/>
+              </a:lnSpc>
+              <a:buNone/>
+            </a:pPr>
+            <a:r>
+              <a:rPr lang="en-US" sz="1080" dirty="0">
+                <a:solidFill>
+                  <a:srgbClr val="6B7280"/>
+                </a:solidFill>
+                <a:latin typeface="Meiryo" pitchFamily="34" charset="0"/>
+                <a:ea typeface="Meiryo" pitchFamily="34" charset="-122"/>
+                <a:cs typeface="Meiryo" pitchFamily="34" charset="-120"/>
+              </a:rPr>
+              <a:t>面談シート（手書き・タイピング・AI画像認識）</a:t>
+            </a:r>
+            <a:endParaRPr lang="en-US" sz="1080" dirty="0"/>
+          </a:p>
+        </p:txBody>
+      </p:sp>
+      <p:sp>
+        <p:nvSpPr>
+          <p:cNvPr id="9" name="Text 7"/>
+          <p:cNvSpPr/>
+          <p:nvPr/>
+        </p:nvSpPr>
+        <p:spPr>
+          <a:xfrm>
+            <a:off x="5029200" y="3246120"/>
+            <a:ext cx="640080" cy="640080"/>
+          </a:xfrm>
+          <a:prstGeom prst="rect">
+            <a:avLst/>
+          </a:prstGeom>
+          <a:noFill/>
+          <a:ln/>
+        </p:spPr>
+        <p:txBody>
+          <a:bodyPr wrap="square" lIns="0" tIns="0" rIns="0" bIns="0" rtlCol="0" anchor="ctr"/>
+          <a:lstStyle/>
+          <a:p>
+            <a:pPr algn="ctr" indent="0" marL="0">
+              <a:buNone/>
+            </a:pPr>
+            <a:r>
+              <a:rPr lang="en-US" sz="2400" dirty="0">
+                <a:solidFill>
+                  <a:srgbClr val="B9C4DB"/>
+                </a:solidFill>
+                <a:latin typeface="Meiryo" pitchFamily="34" charset="0"/>
+                <a:ea typeface="Meiryo" pitchFamily="34" charset="-122"/>
+                <a:cs typeface="Meiryo" pitchFamily="34" charset="-120"/>
+              </a:rPr>
+              <a:t>▶</a:t>
+            </a:r>
+            <a:endParaRPr lang="en-US" sz="2400" dirty="0"/>
+          </a:p>
+        </p:txBody>
+      </p:sp>
+      <p:sp>
+        <p:nvSpPr>
+          <p:cNvPr id="10" name="Text 8"/>
+          <p:cNvSpPr/>
+          <p:nvPr/>
+        </p:nvSpPr>
+        <p:spPr>
+          <a:xfrm>
+            <a:off x="5760720" y="3154680"/>
+            <a:ext cx="2011680" cy="1234440"/>
+          </a:xfrm>
+          <a:prstGeom prst="roundRect">
+            <a:avLst>
+              <a:gd name="adj" fmla="val 40741"/>
+            </a:avLst>
+          </a:prstGeom>
+          <a:solidFill>
+            <a:srgbClr val="EEF2FC"/>
+          </a:solidFill>
+          <a:ln w="19050">
+            <a:solidFill>
+              <a:srgbClr val="CADCFC"/>
+            </a:solidFill>
+            <a:prstDash val="dash"/>
+          </a:ln>
+        </p:spPr>
+        <p:txBody>
+          <a:bodyPr wrap="square" lIns="0" tIns="0" rIns="0" bIns="0" rtlCol="0" anchor="ctr"/>
+          <a:lstStyle/>
+          <a:p>
+            <a:pPr algn="ctr" indent="0" marL="0">
+              <a:buNone/>
+            </a:pPr>
+            <a:r>
+              <a:rPr lang="en-US" sz="1250" b="1" dirty="0">
+                <a:solidFill>
+                  <a:srgbClr val="4338CA"/>
+                </a:solidFill>
+                <a:latin typeface="Meiryo" pitchFamily="34" charset="0"/>
+                <a:ea typeface="Meiryo" pitchFamily="34" charset="-122"/>
+                <a:cs typeface="Meiryo" pitchFamily="34" charset="-120"/>
+              </a:rPr>
+              <a:t>クラウド同期</a:t>
+            </a:r>
+            <a:endParaRPr lang="en-US" sz="1250" dirty="0"/>
+          </a:p>
+        </p:txBody>
+      </p:sp>
+      <p:sp>
+        <p:nvSpPr>
+          <p:cNvPr id="11" name="Text 9"/>
+          <p:cNvSpPr/>
+          <p:nvPr/>
+        </p:nvSpPr>
+        <p:spPr>
+          <a:xfrm>
+            <a:off x="5760720" y="4434840"/>
+            <a:ext cx="2011680" cy="320040"/>
+          </a:xfrm>
+          <a:prstGeom prst="rect">
+            <a:avLst/>
+          </a:prstGeom>
+          <a:noFill/>
+          <a:ln/>
+        </p:spPr>
+        <p:txBody>
+          <a:bodyPr wrap="square" lIns="0" tIns="0" rIns="0" bIns="0" rtlCol="0" anchor="ctr"/>
+          <a:lstStyle/>
+          <a:p>
+            <a:pPr algn="ctr" indent="0" marL="0">
+              <a:buNone/>
+            </a:pPr>
+            <a:r>
+              <a:rPr lang="en-US" sz="1050" dirty="0">
+                <a:solidFill>
+                  <a:srgbClr val="6B7280"/>
+                </a:solidFill>
+                <a:latin typeface="Meiryo" pitchFamily="34" charset="0"/>
+                <a:ea typeface="Meiryo" pitchFamily="34" charset="-122"/>
+                <a:cs typeface="Meiryo" pitchFamily="34" charset="-120"/>
+              </a:rPr>
+              <a:t>どこでも共有</a:t>
+            </a:r>
+            <a:endParaRPr lang="en-US" sz="1050" dirty="0"/>
+          </a:p>
+        </p:txBody>
+      </p:sp>
+      <p:sp>
+        <p:nvSpPr>
+          <p:cNvPr id="12" name="Text 10"/>
+          <p:cNvSpPr/>
+          <p:nvPr/>
+        </p:nvSpPr>
+        <p:spPr>
+          <a:xfrm>
+            <a:off x="7863840" y="3246120"/>
+            <a:ext cx="640080" cy="640080"/>
+          </a:xfrm>
+          <a:prstGeom prst="rect">
+            <a:avLst/>
+          </a:prstGeom>
+          <a:noFill/>
+          <a:ln/>
+        </p:spPr>
+        <p:txBody>
+          <a:bodyPr wrap="square" lIns="0" tIns="0" rIns="0" bIns="0" rtlCol="0" anchor="ctr"/>
+          <a:lstStyle/>
+          <a:p>
+            <a:pPr algn="ctr" indent="0" marL="0">
+              <a:buNone/>
+            </a:pPr>
+            <a:r>
+              <a:rPr lang="en-US" sz="2400" dirty="0">
+                <a:solidFill>
+                  <a:srgbClr val="B9C4DB"/>
+                </a:solidFill>
+                <a:latin typeface="Meiryo" pitchFamily="34" charset="0"/>
+                <a:ea typeface="Meiryo" pitchFamily="34" charset="-122"/>
+                <a:cs typeface="Meiryo" pitchFamily="34" charset="-120"/>
+              </a:rPr>
+              <a:t>▶</a:t>
+            </a:r>
+            <a:endParaRPr lang="en-US" sz="2400" dirty="0"/>
+          </a:p>
+        </p:txBody>
+      </p:sp>
+      <p:sp>
+        <p:nvSpPr>
+          <p:cNvPr id="13" name="Shape 11"/>
+          <p:cNvSpPr/>
+          <p:nvPr/>
+        </p:nvSpPr>
+        <p:spPr>
+          <a:xfrm>
+            <a:off x="8595360" y="2880360"/>
+            <a:ext cx="2651760" cy="1783080"/>
+          </a:xfrm>
+          <a:prstGeom prst="roundRect">
+            <a:avLst>
+              <a:gd name="adj" fmla="val 5128"/>
             </a:avLst>
           </a:prstGeom>
           <a:solidFill>
@@ -11452,29 +13201,20 @@
       </p:sp>
       <p:sp>
         <p:nvSpPr>
-          <p:cNvPr id="6" name="Text 4"/>
-          <p:cNvSpPr/>
-          <p:nvPr/>
-        </p:nvSpPr>
-        <p:spPr>
-          <a:xfrm>
-            <a:off x="2011680" y="2240280"/>
-            <a:ext cx="685800" cy="685800"/>
-          </a:xfrm>
-          <a:prstGeom prst="ellipse">
-            <a:avLst/>
-          </a:prstGeom>
-          <a:solidFill>
-            <a:srgbClr val="1E2761"/>
-          </a:solidFill>
-          <a:ln/>
-          <a:effectLst>
-            <a:outerShdw sx="100000" sy="100000" kx="0" ky="0" algn="bl" rotWithShape="0" blurRad="88900" dist="25400" dir="5400000">
-              <a:srgbClr val="8FA0C4">
-                <a:alpha val="28000"/>
-              </a:srgbClr>
-            </a:outerShdw>
-          </a:effectLst>
+          <p:cNvPr id="14" name="Text 12"/>
+          <p:cNvSpPr/>
+          <p:nvPr/>
+        </p:nvSpPr>
+        <p:spPr>
+          <a:xfrm>
+            <a:off x="8595360" y="3035808"/>
+            <a:ext cx="2651760" cy="365760"/>
+          </a:xfrm>
+          <a:prstGeom prst="rect">
+            <a:avLst/>
+          </a:prstGeom>
+          <a:noFill/>
+          <a:ln/>
         </p:spPr>
         <p:txBody>
           <a:bodyPr wrap="square" lIns="0" tIns="0" rIns="0" bIns="0" rtlCol="0" anchor="ctr"/>
@@ -11484,78 +13224,39 @@
               <a:buNone/>
             </a:pPr>
             <a:r>
-              <a:rPr lang="en-US" sz="1800" b="1" dirty="0">
-                <a:solidFill>
-                  <a:srgbClr val="FFFFFF"/>
-                </a:solidFill>
-                <a:latin typeface="Meiryo" pitchFamily="34" charset="0"/>
-                <a:ea typeface="Meiryo" pitchFamily="34" charset="-122"/>
-                <a:cs typeface="Meiryo" pitchFamily="34" charset="-120"/>
-              </a:rPr>
-              <a:t>1</a:t>
-            </a:r>
-            <a:endParaRPr lang="en-US" sz="1800" dirty="0"/>
-          </a:p>
-        </p:txBody>
-      </p:sp>
-      <p:sp>
-        <p:nvSpPr>
-          <p:cNvPr id="7" name="Text 5"/>
-          <p:cNvSpPr/>
-          <p:nvPr/>
-        </p:nvSpPr>
-        <p:spPr>
-          <a:xfrm>
-            <a:off x="822960" y="3108960"/>
-            <a:ext cx="3063240" cy="640080"/>
-          </a:xfrm>
-          <a:prstGeom prst="rect">
-            <a:avLst/>
-          </a:prstGeom>
-          <a:noFill/>
-          <a:ln/>
-        </p:spPr>
-        <p:txBody>
-          <a:bodyPr wrap="square" lIns="0" tIns="0" rIns="0" bIns="0" rtlCol="0" anchor="ctr"/>
-          <a:lstStyle/>
-          <a:p>
-            <a:pPr algn="ctr" indent="0" marL="0">
-              <a:buNone/>
-            </a:pPr>
-            <a:r>
-              <a:rPr lang="en-US" sz="1550" b="1" dirty="0">
-                <a:solidFill>
-                  <a:srgbClr val="141A33"/>
-                </a:solidFill>
-                <a:latin typeface="Meiryo" pitchFamily="34" charset="0"/>
-                <a:ea typeface="Meiryo" pitchFamily="34" charset="-122"/>
-                <a:cs typeface="Meiryo" pitchFamily="34" charset="-120"/>
-              </a:rPr>
-              <a:t>AI書類作成の拡大</a:t>
-            </a:r>
-            <a:endParaRPr lang="en-US" sz="1550" dirty="0"/>
-          </a:p>
-        </p:txBody>
-      </p:sp>
-      <p:sp>
-        <p:nvSpPr>
-          <p:cNvPr id="8" name="Text 6"/>
-          <p:cNvSpPr/>
-          <p:nvPr/>
-        </p:nvSpPr>
-        <p:spPr>
-          <a:xfrm>
-            <a:off x="914400" y="3794760"/>
-            <a:ext cx="2880360" cy="1005840"/>
-          </a:xfrm>
-          <a:prstGeom prst="rect">
-            <a:avLst/>
-          </a:prstGeom>
-          <a:noFill/>
-          <a:ln/>
-        </p:spPr>
-        <p:txBody>
-          <a:bodyPr wrap="square" lIns="0" tIns="0" rIns="0" bIns="0" rtlCol="0" anchor="t"/>
+              <a:rPr lang="en-US" sz="1300" b="1" dirty="0">
+                <a:solidFill>
+                  <a:srgbClr val="1E2761"/>
+                </a:solidFill>
+                <a:latin typeface="Meiryo" pitchFamily="34" charset="0"/>
+                <a:ea typeface="Meiryo" pitchFamily="34" charset="-122"/>
+                <a:cs typeface="Meiryo" pitchFamily="34" charset="-120"/>
+              </a:rPr>
+              <a:t>PC</a:t>
+            </a:r>
+            <a:endParaRPr lang="en-US" sz="1300" dirty="0"/>
+          </a:p>
+        </p:txBody>
+      </p:sp>
+      <p:sp>
+        <p:nvSpPr>
+          <p:cNvPr id="15" name="Text 13"/>
+          <p:cNvSpPr/>
+          <p:nvPr/>
+        </p:nvSpPr>
+        <p:spPr>
+          <a:xfrm>
+            <a:off x="8686800" y="3429000"/>
+            <a:ext cx="2468880" cy="822960"/>
+          </a:xfrm>
+          <a:prstGeom prst="rect">
+            <a:avLst/>
+          </a:prstGeom>
+          <a:noFill/>
+          <a:ln/>
+        </p:spPr>
+        <p:txBody>
+          <a:bodyPr wrap="square" lIns="0" tIns="0" rIns="0" bIns="0" rtlCol="0" anchor="ctr"/>
           <a:lstStyle/>
           <a:p>
             <a:pPr algn="ctr" indent="0" marL="0">
@@ -11565,161 +13266,18 @@
               <a:buNone/>
             </a:pPr>
             <a:r>
-              <a:rPr lang="en-US" sz="1250" dirty="0">
-                <a:solidFill>
-                  <a:srgbClr val="6B7280"/>
-                </a:solidFill>
-                <a:latin typeface="Meiryo" pitchFamily="34" charset="0"/>
-                <a:ea typeface="Meiryo" pitchFamily="34" charset="-122"/>
-                <a:cs typeface="Meiryo" pitchFamily="34" charset="-120"/>
-              </a:rPr>
-              <a:t>対応する書類を増やし、作成の手間をさらに削減</a:t>
+              <a:rPr lang="en-US" sz="1250" b="1" dirty="0">
+                <a:solidFill>
+                  <a:srgbClr val="4338CA"/>
+                </a:solidFill>
+                <a:latin typeface="Meiryo" pitchFamily="34" charset="0"/>
+                <a:ea typeface="Meiryo" pitchFamily="34" charset="-122"/>
+                <a:cs typeface="Meiryo" pitchFamily="34" charset="-120"/>
+              </a:rPr>
+              <a:t>オーダーシート化</a:t>
             </a:r>
             <a:endParaRPr lang="en-US" sz="1250" dirty="0"/>
           </a:p>
-        </p:txBody>
-      </p:sp>
-      <p:sp>
-        <p:nvSpPr>
-          <p:cNvPr id="9" name="Shape 7"/>
-          <p:cNvSpPr/>
-          <p:nvPr/>
-        </p:nvSpPr>
-        <p:spPr>
-          <a:xfrm>
-            <a:off x="4343400" y="1965960"/>
-            <a:ext cx="3429000" cy="3017520"/>
-          </a:xfrm>
-          <a:prstGeom prst="roundRect">
-            <a:avLst>
-              <a:gd name="adj" fmla="val 3030"/>
-            </a:avLst>
-          </a:prstGeom>
-          <a:solidFill>
-            <a:srgbClr val="F7F9FD"/>
-          </a:solidFill>
-          <a:ln w="12700">
-            <a:solidFill>
-              <a:srgbClr val="E4E9F2"/>
-            </a:solidFill>
-            <a:prstDash val="solid"/>
-          </a:ln>
-          <a:effectLst>
-            <a:outerShdw sx="100000" sy="100000" kx="0" ky="0" algn="bl" rotWithShape="0" blurRad="114300" dist="38100" dir="5400000">
-              <a:srgbClr val="8FA0C4">
-                <a:alpha val="30000"/>
-              </a:srgbClr>
-            </a:outerShdw>
-          </a:effectLst>
-        </p:spPr>
-      </p:sp>
-      <p:sp>
-        <p:nvSpPr>
-          <p:cNvPr id="10" name="Text 8"/>
-          <p:cNvSpPr/>
-          <p:nvPr/>
-        </p:nvSpPr>
-        <p:spPr>
-          <a:xfrm>
-            <a:off x="5715000" y="2240280"/>
-            <a:ext cx="685800" cy="685800"/>
-          </a:xfrm>
-          <a:prstGeom prst="ellipse">
-            <a:avLst/>
-          </a:prstGeom>
-          <a:solidFill>
-            <a:srgbClr val="1E2761"/>
-          </a:solidFill>
-          <a:ln/>
-          <a:effectLst>
-            <a:outerShdw sx="100000" sy="100000" kx="0" ky="0" algn="bl" rotWithShape="0" blurRad="88900" dist="25400" dir="5400000">
-              <a:srgbClr val="8FA0C4">
-                <a:alpha val="28000"/>
-              </a:srgbClr>
-            </a:outerShdw>
-          </a:effectLst>
-        </p:spPr>
-        <p:txBody>
-          <a:bodyPr wrap="square" lIns="0" tIns="0" rIns="0" bIns="0" rtlCol="0" anchor="ctr"/>
-          <a:lstStyle/>
-          <a:p>
-            <a:pPr algn="ctr" indent="0" marL="0">
-              <a:buNone/>
-            </a:pPr>
-            <a:r>
-              <a:rPr lang="en-US" sz="1800" b="1" dirty="0">
-                <a:solidFill>
-                  <a:srgbClr val="FFFFFF"/>
-                </a:solidFill>
-                <a:latin typeface="Meiryo" pitchFamily="34" charset="0"/>
-                <a:ea typeface="Meiryo" pitchFamily="34" charset="-122"/>
-                <a:cs typeface="Meiryo" pitchFamily="34" charset="-120"/>
-              </a:rPr>
-              <a:t>2</a:t>
-            </a:r>
-            <a:endParaRPr lang="en-US" sz="1800" dirty="0"/>
-          </a:p>
-        </p:txBody>
-      </p:sp>
-      <p:sp>
-        <p:nvSpPr>
-          <p:cNvPr id="11" name="Text 9"/>
-          <p:cNvSpPr/>
-          <p:nvPr/>
-        </p:nvSpPr>
-        <p:spPr>
-          <a:xfrm>
-            <a:off x="4526280" y="3108960"/>
-            <a:ext cx="3063240" cy="640080"/>
-          </a:xfrm>
-          <a:prstGeom prst="rect">
-            <a:avLst/>
-          </a:prstGeom>
-          <a:noFill/>
-          <a:ln/>
-        </p:spPr>
-        <p:txBody>
-          <a:bodyPr wrap="square" lIns="0" tIns="0" rIns="0" bIns="0" rtlCol="0" anchor="ctr"/>
-          <a:lstStyle/>
-          <a:p>
-            <a:pPr algn="ctr" indent="0" marL="0">
-              <a:buNone/>
-            </a:pPr>
-            <a:r>
-              <a:rPr lang="en-US" sz="1550" b="1" dirty="0">
-                <a:solidFill>
-                  <a:srgbClr val="141A33"/>
-                </a:solidFill>
-                <a:latin typeface="Meiryo" pitchFamily="34" charset="0"/>
-                <a:ea typeface="Meiryo" pitchFamily="34" charset="-122"/>
-                <a:cs typeface="Meiryo" pitchFamily="34" charset="-120"/>
-              </a:rPr>
-              <a:t>AIナビ（業務相談）</a:t>
-            </a:r>
-            <a:endParaRPr lang="en-US" sz="1550" dirty="0"/>
-          </a:p>
-        </p:txBody>
-      </p:sp>
-      <p:sp>
-        <p:nvSpPr>
-          <p:cNvPr id="12" name="Text 10"/>
-          <p:cNvSpPr/>
-          <p:nvPr/>
-        </p:nvSpPr>
-        <p:spPr>
-          <a:xfrm>
-            <a:off x="4617720" y="3794760"/>
-            <a:ext cx="2880360" cy="1005840"/>
-          </a:xfrm>
-          <a:prstGeom prst="rect">
-            <a:avLst/>
-          </a:prstGeom>
-          <a:noFill/>
-          <a:ln/>
-        </p:spPr>
-        <p:txBody>
-          <a:bodyPr wrap="square" lIns="0" tIns="0" rIns="0" bIns="0" rtlCol="0" anchor="t"/>
-          <a:lstStyle/>
           <a:p>
             <a:pPr algn="ctr" indent="0" marL="0">
               <a:lnSpc>
@@ -11728,7 +13286,46 @@
               <a:buNone/>
             </a:pPr>
             <a:r>
-              <a:rPr lang="en-US" sz="1250" dirty="0">
+              <a:rPr lang="en-US" sz="1250" b="1" dirty="0">
+                <a:solidFill>
+                  <a:srgbClr val="4338CA"/>
+                </a:solidFill>
+                <a:latin typeface="Meiryo" pitchFamily="34" charset="0"/>
+                <a:ea typeface="Meiryo" pitchFamily="34" charset="-122"/>
+                <a:cs typeface="Meiryo" pitchFamily="34" charset="-120"/>
+              </a:rPr>
+              <a:t>タスク自動生成</a:t>
+            </a:r>
+            <a:endParaRPr lang="en-US" sz="1250" dirty="0"/>
+          </a:p>
+        </p:txBody>
+      </p:sp>
+      <p:sp>
+        <p:nvSpPr>
+          <p:cNvPr id="16" name="Text 14"/>
+          <p:cNvSpPr/>
+          <p:nvPr/>
+        </p:nvSpPr>
+        <p:spPr>
+          <a:xfrm>
+            <a:off x="8595360" y="4709160"/>
+            <a:ext cx="2651760" cy="320040"/>
+          </a:xfrm>
+          <a:prstGeom prst="rect">
+            <a:avLst/>
+          </a:prstGeom>
+          <a:noFill/>
+          <a:ln/>
+        </p:spPr>
+        <p:txBody>
+          <a:bodyPr wrap="square" lIns="0" tIns="0" rIns="0" bIns="0" rtlCol="0" anchor="ctr"/>
+          <a:lstStyle/>
+          <a:p>
+            <a:pPr algn="ctr" indent="0" marL="0">
+              <a:buNone/>
+            </a:pPr>
+            <a:r>
+              <a:rPr lang="en-US" sz="1050" dirty="0">
                 <a:solidFill>
                   <a:srgbClr val="6B7280"/>
                 </a:solidFill>
@@ -11736,211 +13333,9 @@
                 <a:ea typeface="Meiryo" pitchFamily="34" charset="-122"/>
                 <a:cs typeface="Meiryo" pitchFamily="34" charset="-120"/>
               </a:rPr>
-              <a:t>「この案件どう進める？」をその場で相談できる</a:t>
-            </a:r>
-            <a:endParaRPr lang="en-US" sz="1250" dirty="0"/>
-          </a:p>
-        </p:txBody>
-      </p:sp>
-      <p:sp>
-        <p:nvSpPr>
-          <p:cNvPr id="13" name="Shape 11"/>
-          <p:cNvSpPr/>
-          <p:nvPr/>
-        </p:nvSpPr>
-        <p:spPr>
-          <a:xfrm>
-            <a:off x="8046720" y="1965960"/>
-            <a:ext cx="3429000" cy="3017520"/>
-          </a:xfrm>
-          <a:prstGeom prst="roundRect">
-            <a:avLst>
-              <a:gd name="adj" fmla="val 3030"/>
-            </a:avLst>
-          </a:prstGeom>
-          <a:solidFill>
-            <a:srgbClr val="F7F9FD"/>
-          </a:solidFill>
-          <a:ln w="12700">
-            <a:solidFill>
-              <a:srgbClr val="E4E9F2"/>
-            </a:solidFill>
-            <a:prstDash val="solid"/>
-          </a:ln>
-          <a:effectLst>
-            <a:outerShdw sx="100000" sy="100000" kx="0" ky="0" algn="bl" rotWithShape="0" blurRad="114300" dist="38100" dir="5400000">
-              <a:srgbClr val="8FA0C4">
-                <a:alpha val="30000"/>
-              </a:srgbClr>
-            </a:outerShdw>
-          </a:effectLst>
-        </p:spPr>
-      </p:sp>
-      <p:sp>
-        <p:nvSpPr>
-          <p:cNvPr id="14" name="Text 12"/>
-          <p:cNvSpPr/>
-          <p:nvPr/>
-        </p:nvSpPr>
-        <p:spPr>
-          <a:xfrm>
-            <a:off x="9418320" y="2240280"/>
-            <a:ext cx="685800" cy="685800"/>
-          </a:xfrm>
-          <a:prstGeom prst="ellipse">
-            <a:avLst/>
-          </a:prstGeom>
-          <a:solidFill>
-            <a:srgbClr val="1E2761"/>
-          </a:solidFill>
-          <a:ln/>
-          <a:effectLst>
-            <a:outerShdw sx="100000" sy="100000" kx="0" ky="0" algn="bl" rotWithShape="0" blurRad="88900" dist="25400" dir="5400000">
-              <a:srgbClr val="8FA0C4">
-                <a:alpha val="28000"/>
-              </a:srgbClr>
-            </a:outerShdw>
-          </a:effectLst>
-        </p:spPr>
-        <p:txBody>
-          <a:bodyPr wrap="square" lIns="0" tIns="0" rIns="0" bIns="0" rtlCol="0" anchor="ctr"/>
-          <a:lstStyle/>
-          <a:p>
-            <a:pPr algn="ctr" indent="0" marL="0">
-              <a:buNone/>
-            </a:pPr>
-            <a:r>
-              <a:rPr lang="en-US" sz="1800" b="1" dirty="0">
-                <a:solidFill>
-                  <a:srgbClr val="FFFFFF"/>
-                </a:solidFill>
-                <a:latin typeface="Meiryo" pitchFamily="34" charset="0"/>
-                <a:ea typeface="Meiryo" pitchFamily="34" charset="-122"/>
-                <a:cs typeface="Meiryo" pitchFamily="34" charset="-120"/>
-              </a:rPr>
-              <a:t>3</a:t>
-            </a:r>
-            <a:endParaRPr lang="en-US" sz="1800" dirty="0"/>
-          </a:p>
-        </p:txBody>
-      </p:sp>
-      <p:sp>
-        <p:nvSpPr>
-          <p:cNvPr id="15" name="Text 13"/>
-          <p:cNvSpPr/>
-          <p:nvPr/>
-        </p:nvSpPr>
-        <p:spPr>
-          <a:xfrm>
-            <a:off x="8229600" y="3108960"/>
-            <a:ext cx="3063240" cy="640080"/>
-          </a:xfrm>
-          <a:prstGeom prst="rect">
-            <a:avLst/>
-          </a:prstGeom>
-          <a:noFill/>
-          <a:ln/>
-        </p:spPr>
-        <p:txBody>
-          <a:bodyPr wrap="square" lIns="0" tIns="0" rIns="0" bIns="0" rtlCol="0" anchor="ctr"/>
-          <a:lstStyle/>
-          <a:p>
-            <a:pPr algn="ctr" indent="0" marL="0">
-              <a:buNone/>
-            </a:pPr>
-            <a:r>
-              <a:rPr lang="en-US" sz="1550" b="1" dirty="0">
-                <a:solidFill>
-                  <a:srgbClr val="141A33"/>
-                </a:solidFill>
-                <a:latin typeface="Meiryo" pitchFamily="34" charset="0"/>
-                <a:ea typeface="Meiryo" pitchFamily="34" charset="-122"/>
-                <a:cs typeface="Meiryo" pitchFamily="34" charset="-120"/>
-              </a:rPr>
-              <a:t>現場の要望で改善</a:t>
-            </a:r>
-            <a:endParaRPr lang="en-US" sz="1550" dirty="0"/>
-          </a:p>
-        </p:txBody>
-      </p:sp>
-      <p:sp>
-        <p:nvSpPr>
-          <p:cNvPr id="16" name="Text 14"/>
-          <p:cNvSpPr/>
-          <p:nvPr/>
-        </p:nvSpPr>
-        <p:spPr>
-          <a:xfrm>
-            <a:off x="8321040" y="3794760"/>
-            <a:ext cx="2880360" cy="1005840"/>
-          </a:xfrm>
-          <a:prstGeom prst="rect">
-            <a:avLst/>
-          </a:prstGeom>
-          <a:noFill/>
-          <a:ln/>
-        </p:spPr>
-        <p:txBody>
-          <a:bodyPr wrap="square" lIns="0" tIns="0" rIns="0" bIns="0" rtlCol="0" anchor="t"/>
-          <a:lstStyle/>
-          <a:p>
-            <a:pPr algn="ctr" indent="0" marL="0">
-              <a:lnSpc>
-                <a:spcPct val="115000"/>
-              </a:lnSpc>
-              <a:buNone/>
-            </a:pPr>
-            <a:r>
-              <a:rPr lang="en-US" sz="1250" dirty="0">
-                <a:solidFill>
-                  <a:srgbClr val="6B7280"/>
-                </a:solidFill>
-                <a:latin typeface="Meiryo" pitchFamily="34" charset="0"/>
-                <a:ea typeface="Meiryo" pitchFamily="34" charset="-122"/>
-                <a:cs typeface="Meiryo" pitchFamily="34" charset="-120"/>
-              </a:rPr>
-              <a:t>アンケート・フィードバックを継続反映</a:t>
-            </a:r>
-            <a:endParaRPr lang="en-US" sz="1250" dirty="0"/>
-          </a:p>
-        </p:txBody>
-      </p:sp>
-      <p:sp>
-        <p:nvSpPr>
-          <p:cNvPr id="17" name="Text 15"/>
-          <p:cNvSpPr/>
-          <p:nvPr/>
-        </p:nvSpPr>
-        <p:spPr>
-          <a:xfrm>
-            <a:off x="640080" y="5532120"/>
-            <a:ext cx="10972800" cy="365760"/>
-          </a:xfrm>
-          <a:prstGeom prst="rect">
-            <a:avLst/>
-          </a:prstGeom>
-          <a:noFill/>
-          <a:ln/>
-        </p:spPr>
-        <p:txBody>
-          <a:bodyPr wrap="square" lIns="0" tIns="0" rIns="0" bIns="0" rtlCol="0" anchor="ctr"/>
-          <a:lstStyle/>
-          <a:p>
-            <a:pPr algn="ctr" indent="0" marL="0">
-              <a:buNone/>
-            </a:pPr>
-            <a:r>
-              <a:rPr lang="en-US" sz="1500" b="1" dirty="0">
-                <a:solidFill>
-                  <a:srgbClr val="1E2761"/>
-                </a:solidFill>
-                <a:latin typeface="Meiryo" pitchFamily="34" charset="0"/>
-                <a:ea typeface="Meiryo" pitchFamily="34" charset="-122"/>
-                <a:cs typeface="Meiryo" pitchFamily="34" charset="-120"/>
-              </a:rPr>
-              <a:t>使いながら、どんどん便利にしていきます。</a:t>
-            </a:r>
-            <a:endParaRPr lang="en-US" sz="1500" dirty="0"/>
+              <a:t>後工程へ</a:t>
+            </a:r>
+            <a:endParaRPr lang="en-US" sz="1050" dirty="0"/>
           </a:p>
         </p:txBody>
       </p:sp>
@@ -12031,7 +13426,7 @@
                 <a:ea typeface="Meiryo" pitchFamily="34" charset="-122"/>
                 <a:cs typeface="Meiryo" pitchFamily="34" charset="-120"/>
               </a:rPr>
-              <a:t>SUPPORT</a:t>
+              <a:t>TASK FLOW</a:t>
             </a:r>
             <a:endParaRPr lang="en-US" sz="1200" dirty="0"/>
           </a:p>
@@ -12070,7 +13465,7 @@
                 <a:ea typeface="Meiryo" pitchFamily="34" charset="-122"/>
                 <a:cs typeface="Meiryo" pitchFamily="34" charset="-120"/>
               </a:rPr>
-              <a:t>困ったとき・お願い</a:t>
+              <a:t>タスクの進め方 — 4ステップを回す＋AIが進捗を集計</a:t>
             </a:r>
             <a:endParaRPr lang="en-US" sz="3000" dirty="0"/>
           </a:p>
@@ -12078,22 +13473,244 @@
       </p:sp>
       <p:sp>
         <p:nvSpPr>
-          <p:cNvPr id="5" name="Shape 3"/>
-          <p:cNvSpPr/>
-          <p:nvPr/>
-        </p:nvSpPr>
-        <p:spPr>
-          <a:xfrm>
-            <a:off x="640080" y="1783080"/>
-            <a:ext cx="10881360" cy="1005840"/>
+          <p:cNvPr id="5" name="Text 3"/>
+          <p:cNvSpPr/>
+          <p:nvPr/>
+        </p:nvSpPr>
+        <p:spPr>
+          <a:xfrm>
+            <a:off x="640080" y="1572768"/>
+            <a:ext cx="1920240" cy="548640"/>
           </a:xfrm>
           <a:prstGeom prst="roundRect">
             <a:avLst>
-              <a:gd name="adj" fmla="val 9091"/>
+              <a:gd name="adj" fmla="val 13333"/>
             </a:avLst>
           </a:prstGeom>
           <a:solidFill>
-            <a:srgbClr val="F7F9FD"/>
+            <a:srgbClr val="1E2761"/>
+          </a:solidFill>
+          <a:ln/>
+          <a:effectLst>
+            <a:outerShdw sx="100000" sy="100000" kx="0" ky="0" algn="bl" rotWithShape="0" blurRad="76200" dist="25400" dir="5400000">
+              <a:srgbClr val="8FA0C4">
+                <a:alpha val="28000"/>
+              </a:srgbClr>
+            </a:outerShdw>
+          </a:effectLst>
+        </p:spPr>
+        <p:txBody>
+          <a:bodyPr wrap="square" lIns="0" tIns="0" rIns="0" bIns="0" rtlCol="0" anchor="ctr"/>
+          <a:lstStyle/>
+          <a:p>
+            <a:pPr algn="ctr" indent="0" marL="0">
+              <a:buNone/>
+            </a:pPr>
+            <a:r>
+              <a:rPr lang="en-US" sz="1200" b="1" dirty="0">
+                <a:solidFill>
+                  <a:srgbClr val="FFFFFF"/>
+                </a:solidFill>
+                <a:latin typeface="Meiryo" pitchFamily="34" charset="0"/>
+                <a:ea typeface="Meiryo" pitchFamily="34" charset="-122"/>
+                <a:cs typeface="Meiryo" pitchFamily="34" charset="-120"/>
+              </a:rPr>
+              <a:t>オーダーシート</a:t>
+            </a:r>
+            <a:endParaRPr lang="en-US" sz="1200" dirty="0"/>
+          </a:p>
+        </p:txBody>
+      </p:sp>
+      <p:sp>
+        <p:nvSpPr>
+          <p:cNvPr id="6" name="Text 4"/>
+          <p:cNvSpPr/>
+          <p:nvPr/>
+        </p:nvSpPr>
+        <p:spPr>
+          <a:xfrm>
+            <a:off x="2606040" y="1572768"/>
+            <a:ext cx="1143000" cy="548640"/>
+          </a:xfrm>
+          <a:prstGeom prst="rect">
+            <a:avLst/>
+          </a:prstGeom>
+          <a:noFill/>
+          <a:ln/>
+        </p:spPr>
+        <p:txBody>
+          <a:bodyPr wrap="square" lIns="0" tIns="0" rIns="0" bIns="0" rtlCol="0" anchor="ctr"/>
+          <a:lstStyle/>
+          <a:p>
+            <a:pPr algn="ctr" indent="0" marL="0">
+              <a:buNone/>
+            </a:pPr>
+            <a:r>
+              <a:rPr lang="en-US" sz="1050" b="1" dirty="0">
+                <a:solidFill>
+                  <a:srgbClr val="E0A64B"/>
+                </a:solidFill>
+                <a:latin typeface="Meiryo" pitchFamily="34" charset="0"/>
+                <a:ea typeface="Meiryo" pitchFamily="34" charset="-122"/>
+                <a:cs typeface="Meiryo" pitchFamily="34" charset="-120"/>
+              </a:rPr>
+              <a:t>自動生成 ▶</a:t>
+            </a:r>
+            <a:endParaRPr lang="en-US" sz="1050" dirty="0"/>
+          </a:p>
+        </p:txBody>
+      </p:sp>
+      <p:sp>
+        <p:nvSpPr>
+          <p:cNvPr id="7" name="Text 5"/>
+          <p:cNvSpPr/>
+          <p:nvPr/>
+        </p:nvSpPr>
+        <p:spPr>
+          <a:xfrm>
+            <a:off x="3794760" y="1572768"/>
+            <a:ext cx="2194560" cy="548640"/>
+          </a:xfrm>
+          <a:prstGeom prst="roundRect">
+            <a:avLst>
+              <a:gd name="adj" fmla="val 13333"/>
+            </a:avLst>
+          </a:prstGeom>
+          <a:solidFill>
+            <a:srgbClr val="EEF3FF"/>
+          </a:solidFill>
+          <a:ln w="12700">
+            <a:solidFill>
+              <a:srgbClr val="CADCFC"/>
+            </a:solidFill>
+          </a:ln>
+        </p:spPr>
+        <p:txBody>
+          <a:bodyPr wrap="square" lIns="0" tIns="0" rIns="0" bIns="0" rtlCol="0" anchor="ctr"/>
+          <a:lstStyle/>
+          <a:p>
+            <a:pPr algn="ctr" indent="0" marL="0">
+              <a:buNone/>
+            </a:pPr>
+            <a:r>
+              <a:rPr lang="en-US" sz="1200" b="1" dirty="0">
+                <a:solidFill>
+                  <a:srgbClr val="1E2761"/>
+                </a:solidFill>
+                <a:latin typeface="Meiryo" pitchFamily="34" charset="0"/>
+                <a:ea typeface="Meiryo" pitchFamily="34" charset="-122"/>
+                <a:cs typeface="Meiryo" pitchFamily="34" charset="-120"/>
+              </a:rPr>
+              <a:t>案件タスク一式</a:t>
+            </a:r>
+            <a:endParaRPr lang="en-US" sz="1200" dirty="0"/>
+          </a:p>
+        </p:txBody>
+      </p:sp>
+      <p:sp>
+        <p:nvSpPr>
+          <p:cNvPr id="8" name="Text 6"/>
+          <p:cNvSpPr/>
+          <p:nvPr/>
+        </p:nvSpPr>
+        <p:spPr>
+          <a:xfrm>
+            <a:off x="6035040" y="1572768"/>
+            <a:ext cx="320040" cy="548640"/>
+          </a:xfrm>
+          <a:prstGeom prst="rect">
+            <a:avLst/>
+          </a:prstGeom>
+          <a:noFill/>
+          <a:ln/>
+        </p:spPr>
+        <p:txBody>
+          <a:bodyPr wrap="square" lIns="0" tIns="0" rIns="0" bIns="0" rtlCol="0" anchor="ctr"/>
+          <a:lstStyle/>
+          <a:p>
+            <a:pPr algn="ctr" indent="0" marL="0">
+              <a:buNone/>
+            </a:pPr>
+            <a:r>
+              <a:rPr lang="en-US" sz="1400" b="1" dirty="0">
+                <a:solidFill>
+                  <a:srgbClr val="6B7280"/>
+                </a:solidFill>
+                <a:latin typeface="Meiryo" pitchFamily="34" charset="0"/>
+                <a:ea typeface="Meiryo" pitchFamily="34" charset="-122"/>
+                <a:cs typeface="Meiryo" pitchFamily="34" charset="-120"/>
+              </a:rPr>
+              <a:t>＋</a:t>
+            </a:r>
+            <a:endParaRPr lang="en-US" sz="1400" dirty="0"/>
+          </a:p>
+        </p:txBody>
+      </p:sp>
+      <p:sp>
+        <p:nvSpPr>
+          <p:cNvPr id="9" name="Text 7"/>
+          <p:cNvSpPr/>
+          <p:nvPr/>
+        </p:nvSpPr>
+        <p:spPr>
+          <a:xfrm>
+            <a:off x="6400800" y="1572768"/>
+            <a:ext cx="2468880" cy="548640"/>
+          </a:xfrm>
+          <a:prstGeom prst="roundRect">
+            <a:avLst>
+              <a:gd name="adj" fmla="val 13333"/>
+            </a:avLst>
+          </a:prstGeom>
+          <a:solidFill>
+            <a:srgbClr val="EEF3FF"/>
+          </a:solidFill>
+          <a:ln w="12700">
+            <a:solidFill>
+              <a:srgbClr val="CADCFC"/>
+            </a:solidFill>
+          </a:ln>
+        </p:spPr>
+        <p:txBody>
+          <a:bodyPr wrap="square" lIns="0" tIns="0" rIns="0" bIns="0" rtlCol="0" anchor="ctr"/>
+          <a:lstStyle/>
+          <a:p>
+            <a:pPr algn="ctr" indent="0" marL="0">
+              <a:buNone/>
+            </a:pPr>
+            <a:r>
+              <a:rPr lang="en-US" sz="1200" b="1" dirty="0">
+                <a:solidFill>
+                  <a:srgbClr val="1E2761"/>
+                </a:solidFill>
+                <a:latin typeface="Meiryo" pitchFamily="34" charset="0"/>
+                <a:ea typeface="Meiryo" pitchFamily="34" charset="-122"/>
+                <a:cs typeface="Meiryo" pitchFamily="34" charset="-120"/>
+              </a:rPr>
+              <a:t>実務タブ（作業画面）</a:t>
+            </a:r>
+            <a:endParaRPr lang="en-US" sz="1200" dirty="0"/>
+          </a:p>
+        </p:txBody>
+      </p:sp>
+      <p:sp>
+        <p:nvSpPr>
+          <p:cNvPr id="10" name="Shape 8"/>
+          <p:cNvSpPr/>
+          <p:nvPr/>
+        </p:nvSpPr>
+        <p:spPr>
+          <a:xfrm>
+            <a:off x="691744" y="2423160"/>
+            <a:ext cx="2468880" cy="1783080"/>
+          </a:xfrm>
+          <a:prstGeom prst="roundRect">
+            <a:avLst>
+              <a:gd name="adj" fmla="val 5128"/>
+            </a:avLst>
+          </a:prstGeom>
+          <a:solidFill>
+            <a:srgbClr val="FFFFFF"/>
           </a:solidFill>
           <a:ln w="12700">
             <a:solidFill>
@@ -12112,26 +13729,28 @@
       </p:sp>
       <p:sp>
         <p:nvSpPr>
-          <p:cNvPr id="6" name="Text 4"/>
-          <p:cNvSpPr/>
-          <p:nvPr/>
-        </p:nvSpPr>
-        <p:spPr>
-          <a:xfrm>
-            <a:off x="960120" y="2039112"/>
-            <a:ext cx="502920" cy="502920"/>
-          </a:xfrm>
-          <a:prstGeom prst="ellipse">
-            <a:avLst/>
-          </a:prstGeom>
-          <a:solidFill>
-            <a:srgbClr val="1E2761"/>
+          <p:cNvPr id="11" name="Text 9"/>
+          <p:cNvSpPr/>
+          <p:nvPr/>
+        </p:nvSpPr>
+        <p:spPr>
+          <a:xfrm>
+            <a:off x="1679296" y="2642616"/>
+            <a:ext cx="493776" cy="493776"/>
+          </a:xfrm>
+          <a:prstGeom prst="roundRect">
+            <a:avLst>
+              <a:gd name="adj" fmla="val 16667"/>
+            </a:avLst>
+          </a:prstGeom>
+          <a:solidFill>
+            <a:srgbClr val="2C6E8F"/>
           </a:solidFill>
           <a:ln/>
           <a:effectLst>
             <a:outerShdw sx="100000" sy="100000" kx="0" ky="0" algn="bl" rotWithShape="0" blurRad="88900" dist="25400" dir="5400000">
               <a:srgbClr val="8FA0C4">
-                <a:alpha val="28000"/>
+                <a:alpha val="30000"/>
               </a:srgbClr>
             </a:outerShdw>
           </a:effectLst>
@@ -12144,7 +13763,7 @@
               <a:buNone/>
             </a:pPr>
             <a:r>
-              <a:rPr lang="en-US" sz="1300" b="1" dirty="0">
+              <a:rPr lang="en-US" sz="1200" b="1" dirty="0">
                 <a:solidFill>
                   <a:srgbClr val="FFFFFF"/>
                 </a:solidFill>
@@ -12154,36 +13773,39 @@
               </a:rPr>
               <a:t>1</a:t>
             </a:r>
-            <a:endParaRPr lang="en-US" sz="1300" dirty="0"/>
-          </a:p>
-        </p:txBody>
-      </p:sp>
-      <p:sp>
-        <p:nvSpPr>
-          <p:cNvPr id="7" name="Text 5"/>
-          <p:cNvSpPr/>
-          <p:nvPr/>
-        </p:nvSpPr>
-        <p:spPr>
-          <a:xfrm>
-            <a:off x="1691640" y="1783080"/>
-            <a:ext cx="3566160" cy="1005840"/>
-          </a:xfrm>
-          <a:prstGeom prst="rect">
-            <a:avLst/>
-          </a:prstGeom>
-          <a:noFill/>
-          <a:ln/>
-        </p:spPr>
-        <p:txBody>
-          <a:bodyPr wrap="square" lIns="0" tIns="0" rIns="0" bIns="0" rtlCol="0" anchor="ctr"/>
-          <a:lstStyle/>
-          <a:p>
-            <a:pPr indent="0" marL="0">
-              <a:buNone/>
-            </a:pPr>
-            <a:r>
-              <a:rPr lang="en-US" sz="1550" b="1" dirty="0">
+            <a:endParaRPr lang="en-US" sz="1200" dirty="0"/>
+          </a:p>
+        </p:txBody>
+      </p:sp>
+      <p:sp>
+        <p:nvSpPr>
+          <p:cNvPr id="12" name="Text 10"/>
+          <p:cNvSpPr/>
+          <p:nvPr/>
+        </p:nvSpPr>
+        <p:spPr>
+          <a:xfrm>
+            <a:off x="764896" y="3264408"/>
+            <a:ext cx="2322576" cy="457200"/>
+          </a:xfrm>
+          <a:prstGeom prst="rect">
+            <a:avLst/>
+          </a:prstGeom>
+          <a:noFill/>
+          <a:ln/>
+        </p:spPr>
+        <p:txBody>
+          <a:bodyPr wrap="square" lIns="0" tIns="0" rIns="0" bIns="0" rtlCol="0" anchor="ctr"/>
+          <a:lstStyle/>
+          <a:p>
+            <a:pPr algn="ctr" indent="0" marL="0">
+              <a:lnSpc>
+                <a:spcPct val="105000"/>
+              </a:lnSpc>
+              <a:buNone/>
+            </a:pPr>
+            <a:r>
+              <a:rPr lang="en-US" sz="1250" b="1" dirty="0">
                 <a:solidFill>
                   <a:srgbClr val="141A33"/>
                 </a:solidFill>
@@ -12191,38 +13813,41 @@
                 <a:ea typeface="Meiryo" pitchFamily="34" charset="-122"/>
                 <a:cs typeface="Meiryo" pitchFamily="34" charset="-120"/>
               </a:rPr>
-              <a:t>面談は"その場で"入力</a:t>
-            </a:r>
-            <a:endParaRPr lang="en-US" sz="1550" dirty="0"/>
-          </a:p>
-        </p:txBody>
-      </p:sp>
-      <p:sp>
-        <p:nvSpPr>
-          <p:cNvPr id="8" name="Text 6"/>
-          <p:cNvSpPr/>
-          <p:nvPr/>
-        </p:nvSpPr>
-        <p:spPr>
-          <a:xfrm>
-            <a:off x="5394960" y="1783080"/>
-            <a:ext cx="5852160" cy="1005840"/>
-          </a:xfrm>
-          <a:prstGeom prst="rect">
-            <a:avLst/>
-          </a:prstGeom>
-          <a:noFill/>
-          <a:ln/>
-        </p:spPr>
-        <p:txBody>
-          <a:bodyPr wrap="square" lIns="0" tIns="0" rIns="0" bIns="0" rtlCol="0" anchor="ctr"/>
-          <a:lstStyle/>
-          <a:p>
-            <a:pPr indent="0" marL="0">
-              <a:buNone/>
-            </a:pPr>
-            <a:r>
-              <a:rPr lang="en-US" sz="1350" dirty="0">
+              <a:t>一覧に表示</a:t>
+            </a:r>
+            <a:endParaRPr lang="en-US" sz="1250" dirty="0"/>
+          </a:p>
+        </p:txBody>
+      </p:sp>
+      <p:sp>
+        <p:nvSpPr>
+          <p:cNvPr id="13" name="Text 11"/>
+          <p:cNvSpPr/>
+          <p:nvPr/>
+        </p:nvSpPr>
+        <p:spPr>
+          <a:xfrm>
+            <a:off x="783184" y="3721608"/>
+            <a:ext cx="2286000" cy="777240"/>
+          </a:xfrm>
+          <a:prstGeom prst="rect">
+            <a:avLst/>
+          </a:prstGeom>
+          <a:noFill/>
+          <a:ln/>
+        </p:spPr>
+        <p:txBody>
+          <a:bodyPr wrap="square" lIns="0" tIns="0" rIns="0" bIns="0" rtlCol="0" anchor="t"/>
+          <a:lstStyle/>
+          <a:p>
+            <a:pPr algn="ctr" indent="0" marL="0">
+              <a:lnSpc>
+                <a:spcPct val="108000"/>
+              </a:lnSpc>
+              <a:buNone/>
+            </a:pPr>
+            <a:r>
+              <a:rPr lang="en-US" sz="1050" dirty="0">
                 <a:solidFill>
                   <a:srgbClr val="6B7280"/>
                 </a:solidFill>
@@ -12230,30 +13855,69 @@
                 <a:ea typeface="Meiryo" pitchFamily="34" charset="-122"/>
                 <a:cs typeface="Meiryo" pitchFamily="34" charset="-120"/>
               </a:rPr>
-              <a:t>紙をやめ、面談直後に。後工程が自動で組み上がる</a:t>
-            </a:r>
-            <a:endParaRPr lang="en-US" sz="1350" dirty="0"/>
-          </a:p>
-        </p:txBody>
-      </p:sp>
-      <p:sp>
-        <p:nvSpPr>
-          <p:cNvPr id="9" name="Shape 7"/>
-          <p:cNvSpPr/>
-          <p:nvPr/>
-        </p:nvSpPr>
-        <p:spPr>
-          <a:xfrm>
-            <a:off x="640080" y="2971800"/>
-            <a:ext cx="10881360" cy="1005840"/>
+              <a:t>優先度・着手OK順（急ぎ=黄/超急ぎ=赤）</a:t>
+            </a:r>
+            <a:endParaRPr lang="en-US" sz="1050" dirty="0"/>
+          </a:p>
+        </p:txBody>
+      </p:sp>
+      <p:sp>
+        <p:nvSpPr>
+          <p:cNvPr id="14" name="Text 12"/>
+          <p:cNvSpPr/>
+          <p:nvPr/>
+        </p:nvSpPr>
+        <p:spPr>
+          <a:xfrm>
+            <a:off x="3142336" y="2697480"/>
+            <a:ext cx="347472" cy="457200"/>
+          </a:xfrm>
+          <a:prstGeom prst="rect">
+            <a:avLst/>
+          </a:prstGeom>
+          <a:noFill/>
+          <a:ln/>
+        </p:spPr>
+        <p:txBody>
+          <a:bodyPr wrap="square" lIns="0" tIns="0" rIns="0" bIns="0" rtlCol="0" anchor="ctr"/>
+          <a:lstStyle/>
+          <a:p>
+            <a:pPr algn="ctr" indent="0" marL="0">
+              <a:buNone/>
+            </a:pPr>
+            <a:r>
+              <a:rPr lang="en-US" sz="1500" dirty="0">
+                <a:solidFill>
+                  <a:srgbClr val="B9C4DB"/>
+                </a:solidFill>
+                <a:latin typeface="Meiryo" pitchFamily="34" charset="0"/>
+                <a:ea typeface="Meiryo" pitchFamily="34" charset="-122"/>
+                <a:cs typeface="Meiryo" pitchFamily="34" charset="-120"/>
+              </a:rPr>
+              <a:t>▶</a:t>
+            </a:r>
+            <a:endParaRPr lang="en-US" sz="1500" dirty="0"/>
+          </a:p>
+        </p:txBody>
+      </p:sp>
+      <p:sp>
+        <p:nvSpPr>
+          <p:cNvPr id="15" name="Shape 13"/>
+          <p:cNvSpPr/>
+          <p:nvPr/>
+        </p:nvSpPr>
+        <p:spPr>
+          <a:xfrm>
+            <a:off x="3471520" y="2423160"/>
+            <a:ext cx="2468880" cy="1783080"/>
           </a:xfrm>
           <a:prstGeom prst="roundRect">
             <a:avLst>
-              <a:gd name="adj" fmla="val 9091"/>
+              <a:gd name="adj" fmla="val 5128"/>
             </a:avLst>
           </a:prstGeom>
           <a:solidFill>
-            <a:srgbClr val="F7F9FD"/>
+            <a:srgbClr val="FFFFFF"/>
           </a:solidFill>
           <a:ln w="12700">
             <a:solidFill>
@@ -12272,17 +13936,19 @@
       </p:sp>
       <p:sp>
         <p:nvSpPr>
-          <p:cNvPr id="10" name="Text 8"/>
-          <p:cNvSpPr/>
-          <p:nvPr/>
-        </p:nvSpPr>
-        <p:spPr>
-          <a:xfrm>
-            <a:off x="960120" y="3227832"/>
-            <a:ext cx="502920" cy="502920"/>
-          </a:xfrm>
-          <a:prstGeom prst="ellipse">
-            <a:avLst/>
+          <p:cNvPr id="16" name="Text 14"/>
+          <p:cNvSpPr/>
+          <p:nvPr/>
+        </p:nvSpPr>
+        <p:spPr>
+          <a:xfrm>
+            <a:off x="4459072" y="2642616"/>
+            <a:ext cx="493776" cy="493776"/>
+          </a:xfrm>
+          <a:prstGeom prst="roundRect">
+            <a:avLst>
+              <a:gd name="adj" fmla="val 16667"/>
+            </a:avLst>
           </a:prstGeom>
           <a:solidFill>
             <a:srgbClr val="1E2761"/>
@@ -12291,7 +13957,7 @@
           <a:effectLst>
             <a:outerShdw sx="100000" sy="100000" kx="0" ky="0" algn="bl" rotWithShape="0" blurRad="88900" dist="25400" dir="5400000">
               <a:srgbClr val="8FA0C4">
-                <a:alpha val="28000"/>
+                <a:alpha val="30000"/>
               </a:srgbClr>
             </a:outerShdw>
           </a:effectLst>
@@ -12304,7 +13970,7 @@
               <a:buNone/>
             </a:pPr>
             <a:r>
-              <a:rPr lang="en-US" sz="1300" b="1" dirty="0">
+              <a:rPr lang="en-US" sz="1200" b="1" dirty="0">
                 <a:solidFill>
                   <a:srgbClr val="FFFFFF"/>
                 </a:solidFill>
@@ -12314,36 +13980,39 @@
               </a:rPr>
               <a:t>2</a:t>
             </a:r>
-            <a:endParaRPr lang="en-US" sz="1300" dirty="0"/>
-          </a:p>
-        </p:txBody>
-      </p:sp>
-      <p:sp>
-        <p:nvSpPr>
-          <p:cNvPr id="11" name="Text 9"/>
-          <p:cNvSpPr/>
-          <p:nvPr/>
-        </p:nvSpPr>
-        <p:spPr>
-          <a:xfrm>
-            <a:off x="1691640" y="2971800"/>
-            <a:ext cx="3566160" cy="1005840"/>
-          </a:xfrm>
-          <a:prstGeom prst="rect">
-            <a:avLst/>
-          </a:prstGeom>
-          <a:noFill/>
-          <a:ln/>
-        </p:spPr>
-        <p:txBody>
-          <a:bodyPr wrap="square" lIns="0" tIns="0" rIns="0" bIns="0" rtlCol="0" anchor="ctr"/>
-          <a:lstStyle/>
-          <a:p>
-            <a:pPr indent="0" marL="0">
-              <a:buNone/>
-            </a:pPr>
-            <a:r>
-              <a:rPr lang="en-US" sz="1550" b="1" dirty="0">
+            <a:endParaRPr lang="en-US" sz="1200" dirty="0"/>
+          </a:p>
+        </p:txBody>
+      </p:sp>
+      <p:sp>
+        <p:nvSpPr>
+          <p:cNvPr id="17" name="Text 15"/>
+          <p:cNvSpPr/>
+          <p:nvPr/>
+        </p:nvSpPr>
+        <p:spPr>
+          <a:xfrm>
+            <a:off x="3544672" y="3264408"/>
+            <a:ext cx="2322576" cy="457200"/>
+          </a:xfrm>
+          <a:prstGeom prst="rect">
+            <a:avLst/>
+          </a:prstGeom>
+          <a:noFill/>
+          <a:ln/>
+        </p:spPr>
+        <p:txBody>
+          <a:bodyPr wrap="square" lIns="0" tIns="0" rIns="0" bIns="0" rtlCol="0" anchor="ctr"/>
+          <a:lstStyle/>
+          <a:p>
+            <a:pPr algn="ctr" indent="0" marL="0">
+              <a:lnSpc>
+                <a:spcPct val="105000"/>
+              </a:lnSpc>
+              <a:buNone/>
+            </a:pPr>
+            <a:r>
+              <a:rPr lang="en-US" sz="1250" b="1" dirty="0">
                 <a:solidFill>
                   <a:srgbClr val="141A33"/>
                 </a:solidFill>
@@ -12351,38 +14020,41 @@
                 <a:ea typeface="Meiryo" pitchFamily="34" charset="-122"/>
                 <a:cs typeface="Meiryo" pitchFamily="34" charset="-120"/>
               </a:rPr>
-              <a:t>迷ったら / 要望</a:t>
-            </a:r>
-            <a:endParaRPr lang="en-US" sz="1550" dirty="0"/>
-          </a:p>
-        </p:txBody>
-      </p:sp>
-      <p:sp>
-        <p:nvSpPr>
-          <p:cNvPr id="12" name="Text 10"/>
-          <p:cNvSpPr/>
-          <p:nvPr/>
-        </p:nvSpPr>
-        <p:spPr>
-          <a:xfrm>
-            <a:off x="5394960" y="2971800"/>
-            <a:ext cx="5852160" cy="1005840"/>
-          </a:xfrm>
-          <a:prstGeom prst="rect">
-            <a:avLst/>
-          </a:prstGeom>
-          <a:noFill/>
-          <a:ln/>
-        </p:spPr>
-        <p:txBody>
-          <a:bodyPr wrap="square" lIns="0" tIns="0" rIns="0" bIns="0" rtlCol="0" anchor="ctr"/>
-          <a:lstStyle/>
-          <a:p>
-            <a:pPr indent="0" marL="0">
-              <a:buNone/>
-            </a:pPr>
-            <a:r>
-              <a:rPr lang="en-US" sz="1350" dirty="0">
+              <a:t>作業＋進捗記録</a:t>
+            </a:r>
+            <a:endParaRPr lang="en-US" sz="1250" dirty="0"/>
+          </a:p>
+        </p:txBody>
+      </p:sp>
+      <p:sp>
+        <p:nvSpPr>
+          <p:cNvPr id="18" name="Text 16"/>
+          <p:cNvSpPr/>
+          <p:nvPr/>
+        </p:nvSpPr>
+        <p:spPr>
+          <a:xfrm>
+            <a:off x="3562960" y="3721608"/>
+            <a:ext cx="2286000" cy="777240"/>
+          </a:xfrm>
+          <a:prstGeom prst="rect">
+            <a:avLst/>
+          </a:prstGeom>
+          <a:noFill/>
+          <a:ln/>
+        </p:spPr>
+        <p:txBody>
+          <a:bodyPr wrap="square" lIns="0" tIns="0" rIns="0" bIns="0" rtlCol="0" anchor="t"/>
+          <a:lstStyle/>
+          <a:p>
+            <a:pPr algn="ctr" indent="0" marL="0">
+              <a:lnSpc>
+                <a:spcPct val="108000"/>
+              </a:lnSpc>
+              <a:buNone/>
+            </a:pPr>
+            <a:r>
+              <a:rPr lang="en-US" sz="1050" dirty="0">
                 <a:solidFill>
                   <a:srgbClr val="6B7280"/>
                 </a:solidFill>
@@ -12390,30 +14062,69 @@
                 <a:ea typeface="Meiryo" pitchFamily="34" charset="-122"/>
                 <a:cs typeface="Meiryo" pitchFamily="34" charset="-120"/>
               </a:rPr>
-              <a:t>マニュアル（/manual）＋遠慮なくフィードバック</a:t>
-            </a:r>
-            <a:endParaRPr lang="en-US" sz="1350" dirty="0"/>
-          </a:p>
-        </p:txBody>
-      </p:sp>
-      <p:sp>
-        <p:nvSpPr>
-          <p:cNvPr id="13" name="Shape 11"/>
-          <p:cNvSpPr/>
-          <p:nvPr/>
-        </p:nvSpPr>
-        <p:spPr>
-          <a:xfrm>
-            <a:off x="640080" y="4160520"/>
-            <a:ext cx="10881360" cy="1005840"/>
+              <a:t>実務タブを見ながら記録</a:t>
+            </a:r>
+            <a:endParaRPr lang="en-US" sz="1050" dirty="0"/>
+          </a:p>
+        </p:txBody>
+      </p:sp>
+      <p:sp>
+        <p:nvSpPr>
+          <p:cNvPr id="19" name="Text 17"/>
+          <p:cNvSpPr/>
+          <p:nvPr/>
+        </p:nvSpPr>
+        <p:spPr>
+          <a:xfrm>
+            <a:off x="5922112" y="2697480"/>
+            <a:ext cx="347472" cy="457200"/>
+          </a:xfrm>
+          <a:prstGeom prst="rect">
+            <a:avLst/>
+          </a:prstGeom>
+          <a:noFill/>
+          <a:ln/>
+        </p:spPr>
+        <p:txBody>
+          <a:bodyPr wrap="square" lIns="0" tIns="0" rIns="0" bIns="0" rtlCol="0" anchor="ctr"/>
+          <a:lstStyle/>
+          <a:p>
+            <a:pPr algn="ctr" indent="0" marL="0">
+              <a:buNone/>
+            </a:pPr>
+            <a:r>
+              <a:rPr lang="en-US" sz="1500" dirty="0">
+                <a:solidFill>
+                  <a:srgbClr val="B9C4DB"/>
+                </a:solidFill>
+                <a:latin typeface="Meiryo" pitchFamily="34" charset="0"/>
+                <a:ea typeface="Meiryo" pitchFamily="34" charset="-122"/>
+                <a:cs typeface="Meiryo" pitchFamily="34" charset="-120"/>
+              </a:rPr>
+              <a:t>▶</a:t>
+            </a:r>
+            <a:endParaRPr lang="en-US" sz="1500" dirty="0"/>
+          </a:p>
+        </p:txBody>
+      </p:sp>
+      <p:sp>
+        <p:nvSpPr>
+          <p:cNvPr id="20" name="Shape 18"/>
+          <p:cNvSpPr/>
+          <p:nvPr/>
+        </p:nvSpPr>
+        <p:spPr>
+          <a:xfrm>
+            <a:off x="6251296" y="2423160"/>
+            <a:ext cx="2468880" cy="1783080"/>
           </a:xfrm>
           <a:prstGeom prst="roundRect">
             <a:avLst>
-              <a:gd name="adj" fmla="val 9091"/>
+              <a:gd name="adj" fmla="val 5128"/>
             </a:avLst>
           </a:prstGeom>
           <a:solidFill>
-            <a:srgbClr val="F7F9FD"/>
+            <a:srgbClr val="FFFFFF"/>
           </a:solidFill>
           <a:ln w="12700">
             <a:solidFill>
@@ -12432,26 +14143,28 @@
       </p:sp>
       <p:sp>
         <p:nvSpPr>
-          <p:cNvPr id="14" name="Text 12"/>
-          <p:cNvSpPr/>
-          <p:nvPr/>
-        </p:nvSpPr>
-        <p:spPr>
-          <a:xfrm>
-            <a:off x="960120" y="4416552"/>
-            <a:ext cx="502920" cy="502920"/>
-          </a:xfrm>
-          <a:prstGeom prst="ellipse">
-            <a:avLst/>
-          </a:prstGeom>
-          <a:solidFill>
-            <a:srgbClr val="1E2761"/>
+          <p:cNvPr id="21" name="Text 19"/>
+          <p:cNvSpPr/>
+          <p:nvPr/>
+        </p:nvSpPr>
+        <p:spPr>
+          <a:xfrm>
+            <a:off x="7238848" y="2642616"/>
+            <a:ext cx="493776" cy="493776"/>
+          </a:xfrm>
+          <a:prstGeom prst="roundRect">
+            <a:avLst>
+              <a:gd name="adj" fmla="val 16667"/>
+            </a:avLst>
+          </a:prstGeom>
+          <a:solidFill>
+            <a:srgbClr val="4F46E5"/>
           </a:solidFill>
           <a:ln/>
           <a:effectLst>
             <a:outerShdw sx="100000" sy="100000" kx="0" ky="0" algn="bl" rotWithShape="0" blurRad="88900" dist="25400" dir="5400000">
               <a:srgbClr val="8FA0C4">
-                <a:alpha val="28000"/>
+                <a:alpha val="30000"/>
               </a:srgbClr>
             </a:outerShdw>
           </a:effectLst>
@@ -12464,124 +14177,635 @@
               <a:buNone/>
             </a:pPr>
             <a:r>
+              <a:rPr lang="en-US" sz="1200" b="1" dirty="0">
+                <a:solidFill>
+                  <a:srgbClr val="FFFFFF"/>
+                </a:solidFill>
+                <a:latin typeface="Meiryo" pitchFamily="34" charset="0"/>
+                <a:ea typeface="Meiryo" pitchFamily="34" charset="-122"/>
+                <a:cs typeface="Meiryo" pitchFamily="34" charset="-120"/>
+              </a:rPr>
+              <a:t>3</a:t>
+            </a:r>
+            <a:endParaRPr lang="en-US" sz="1200" dirty="0"/>
+          </a:p>
+        </p:txBody>
+      </p:sp>
+      <p:sp>
+        <p:nvSpPr>
+          <p:cNvPr id="22" name="Text 20"/>
+          <p:cNvSpPr/>
+          <p:nvPr/>
+        </p:nvSpPr>
+        <p:spPr>
+          <a:xfrm>
+            <a:off x="6324448" y="3264408"/>
+            <a:ext cx="2322576" cy="457200"/>
+          </a:xfrm>
+          <a:prstGeom prst="rect">
+            <a:avLst/>
+          </a:prstGeom>
+          <a:noFill/>
+          <a:ln/>
+        </p:spPr>
+        <p:txBody>
+          <a:bodyPr wrap="square" lIns="0" tIns="0" rIns="0" bIns="0" rtlCol="0" anchor="ctr"/>
+          <a:lstStyle/>
+          <a:p>
+            <a:pPr algn="ctr" indent="0" marL="0">
+              <a:lnSpc>
+                <a:spcPct val="105000"/>
+              </a:lnSpc>
+              <a:buNone/>
+            </a:pPr>
+            <a:r>
+              <a:rPr lang="en-US" sz="1250" b="1" dirty="0">
+                <a:solidFill>
+                  <a:srgbClr val="141A33"/>
+                </a:solidFill>
+                <a:latin typeface="Meiryo" pitchFamily="34" charset="0"/>
+                <a:ea typeface="Meiryo" pitchFamily="34" charset="-122"/>
+                <a:cs typeface="Meiryo" pitchFamily="34" charset="-120"/>
+              </a:rPr>
+              <a:t>完了：実施結果＋次を選択</a:t>
+            </a:r>
+            <a:endParaRPr lang="en-US" sz="1250" dirty="0"/>
+          </a:p>
+        </p:txBody>
+      </p:sp>
+      <p:sp>
+        <p:nvSpPr>
+          <p:cNvPr id="23" name="Text 21"/>
+          <p:cNvSpPr/>
+          <p:nvPr/>
+        </p:nvSpPr>
+        <p:spPr>
+          <a:xfrm>
+            <a:off x="6342736" y="3721608"/>
+            <a:ext cx="2286000" cy="777240"/>
+          </a:xfrm>
+          <a:prstGeom prst="rect">
+            <a:avLst/>
+          </a:prstGeom>
+          <a:noFill/>
+          <a:ln/>
+        </p:spPr>
+        <p:txBody>
+          <a:bodyPr wrap="square" lIns="0" tIns="0" rIns="0" bIns="0" rtlCol="0" anchor="t"/>
+          <a:lstStyle/>
+          <a:p>
+            <a:pPr algn="ctr" indent="0" marL="0">
+              <a:lnSpc>
+                <a:spcPct val="108000"/>
+              </a:lnSpc>
+              <a:buNone/>
+            </a:pPr>
+            <a:r>
+              <a:rPr lang="en-US" sz="1050" dirty="0">
+                <a:solidFill>
+                  <a:srgbClr val="6B7280"/>
+                </a:solidFill>
+                <a:latin typeface="Meiryo" pitchFamily="34" charset="0"/>
+                <a:ea typeface="Meiryo" pitchFamily="34" charset="-122"/>
+                <a:cs typeface="Meiryo" pitchFamily="34" charset="-120"/>
+              </a:rPr>
+              <a:t>次に着手OKなタスクを選ぶ</a:t>
+            </a:r>
+            <a:endParaRPr lang="en-US" sz="1050" dirty="0"/>
+          </a:p>
+        </p:txBody>
+      </p:sp>
+      <p:sp>
+        <p:nvSpPr>
+          <p:cNvPr id="24" name="Text 22"/>
+          <p:cNvSpPr/>
+          <p:nvPr/>
+        </p:nvSpPr>
+        <p:spPr>
+          <a:xfrm>
+            <a:off x="8701888" y="2697480"/>
+            <a:ext cx="347472" cy="457200"/>
+          </a:xfrm>
+          <a:prstGeom prst="rect">
+            <a:avLst/>
+          </a:prstGeom>
+          <a:noFill/>
+          <a:ln/>
+        </p:spPr>
+        <p:txBody>
+          <a:bodyPr wrap="square" lIns="0" tIns="0" rIns="0" bIns="0" rtlCol="0" anchor="ctr"/>
+          <a:lstStyle/>
+          <a:p>
+            <a:pPr algn="ctr" indent="0" marL="0">
+              <a:buNone/>
+            </a:pPr>
+            <a:r>
+              <a:rPr lang="en-US" sz="1500" dirty="0">
+                <a:solidFill>
+                  <a:srgbClr val="B9C4DB"/>
+                </a:solidFill>
+                <a:latin typeface="Meiryo" pitchFamily="34" charset="0"/>
+                <a:ea typeface="Meiryo" pitchFamily="34" charset="-122"/>
+                <a:cs typeface="Meiryo" pitchFamily="34" charset="-120"/>
+              </a:rPr>
+              <a:t>▶</a:t>
+            </a:r>
+            <a:endParaRPr lang="en-US" sz="1500" dirty="0"/>
+          </a:p>
+        </p:txBody>
+      </p:sp>
+      <p:sp>
+        <p:nvSpPr>
+          <p:cNvPr id="25" name="Shape 23"/>
+          <p:cNvSpPr/>
+          <p:nvPr/>
+        </p:nvSpPr>
+        <p:spPr>
+          <a:xfrm>
+            <a:off x="9031072" y="2423160"/>
+            <a:ext cx="2468880" cy="1783080"/>
+          </a:xfrm>
+          <a:prstGeom prst="roundRect">
+            <a:avLst>
+              <a:gd name="adj" fmla="val 5128"/>
+            </a:avLst>
+          </a:prstGeom>
+          <a:solidFill>
+            <a:srgbClr val="FFFFFF"/>
+          </a:solidFill>
+          <a:ln w="12700">
+            <a:solidFill>
+              <a:srgbClr val="E4E9F2"/>
+            </a:solidFill>
+            <a:prstDash val="solid"/>
+          </a:ln>
+          <a:effectLst>
+            <a:outerShdw sx="100000" sy="100000" kx="0" ky="0" algn="bl" rotWithShape="0" blurRad="114300" dist="38100" dir="5400000">
+              <a:srgbClr val="8FA0C4">
+                <a:alpha val="30000"/>
+              </a:srgbClr>
+            </a:outerShdw>
+          </a:effectLst>
+        </p:spPr>
+      </p:sp>
+      <p:sp>
+        <p:nvSpPr>
+          <p:cNvPr id="26" name="Text 24"/>
+          <p:cNvSpPr/>
+          <p:nvPr/>
+        </p:nvSpPr>
+        <p:spPr>
+          <a:xfrm>
+            <a:off x="10018624" y="2642616"/>
+            <a:ext cx="493776" cy="493776"/>
+          </a:xfrm>
+          <a:prstGeom prst="roundRect">
+            <a:avLst>
+              <a:gd name="adj" fmla="val 16667"/>
+            </a:avLst>
+          </a:prstGeom>
+          <a:solidFill>
+            <a:srgbClr val="E0A64B"/>
+          </a:solidFill>
+          <a:ln/>
+          <a:effectLst>
+            <a:outerShdw sx="100000" sy="100000" kx="0" ky="0" algn="bl" rotWithShape="0" blurRad="88900" dist="25400" dir="5400000">
+              <a:srgbClr val="8FA0C4">
+                <a:alpha val="30000"/>
+              </a:srgbClr>
+            </a:outerShdw>
+          </a:effectLst>
+        </p:spPr>
+        <p:txBody>
+          <a:bodyPr wrap="square" lIns="0" tIns="0" rIns="0" bIns="0" rtlCol="0" anchor="ctr"/>
+          <a:lstStyle/>
+          <a:p>
+            <a:pPr algn="ctr" indent="0" marL="0">
+              <a:buNone/>
+            </a:pPr>
+            <a:r>
+              <a:rPr lang="en-US" sz="1200" b="1" dirty="0">
+                <a:solidFill>
+                  <a:srgbClr val="FFFFFF"/>
+                </a:solidFill>
+                <a:latin typeface="Meiryo" pitchFamily="34" charset="0"/>
+                <a:ea typeface="Meiryo" pitchFamily="34" charset="-122"/>
+                <a:cs typeface="Meiryo" pitchFamily="34" charset="-120"/>
+              </a:rPr>
+              <a:t>4</a:t>
+            </a:r>
+            <a:endParaRPr lang="en-US" sz="1200" dirty="0"/>
+          </a:p>
+        </p:txBody>
+      </p:sp>
+      <p:sp>
+        <p:nvSpPr>
+          <p:cNvPr id="27" name="Text 25"/>
+          <p:cNvSpPr/>
+          <p:nvPr/>
+        </p:nvSpPr>
+        <p:spPr>
+          <a:xfrm>
+            <a:off x="9104224" y="3264408"/>
+            <a:ext cx="2322576" cy="457200"/>
+          </a:xfrm>
+          <a:prstGeom prst="rect">
+            <a:avLst/>
+          </a:prstGeom>
+          <a:noFill/>
+          <a:ln/>
+        </p:spPr>
+        <p:txBody>
+          <a:bodyPr wrap="square" lIns="0" tIns="0" rIns="0" bIns="0" rtlCol="0" anchor="ctr"/>
+          <a:lstStyle/>
+          <a:p>
+            <a:pPr algn="ctr" indent="0" marL="0">
+              <a:lnSpc>
+                <a:spcPct val="105000"/>
+              </a:lnSpc>
+              <a:buNone/>
+            </a:pPr>
+            <a:r>
+              <a:rPr lang="en-US" sz="1250" b="1" dirty="0">
+                <a:solidFill>
+                  <a:srgbClr val="141A33"/>
+                </a:solidFill>
+                <a:latin typeface="Meiryo" pitchFamily="34" charset="0"/>
+                <a:ea typeface="Meiryo" pitchFamily="34" charset="-122"/>
+                <a:cs typeface="Meiryo" pitchFamily="34" charset="-120"/>
+              </a:rPr>
+              <a:t>次が一覧トップに</a:t>
+            </a:r>
+            <a:endParaRPr lang="en-US" sz="1250" dirty="0"/>
+          </a:p>
+        </p:txBody>
+      </p:sp>
+      <p:sp>
+        <p:nvSpPr>
+          <p:cNvPr id="28" name="Text 26"/>
+          <p:cNvSpPr/>
+          <p:nvPr/>
+        </p:nvSpPr>
+        <p:spPr>
+          <a:xfrm>
+            <a:off x="9122512" y="3721608"/>
+            <a:ext cx="2286000" cy="777240"/>
+          </a:xfrm>
+          <a:prstGeom prst="rect">
+            <a:avLst/>
+          </a:prstGeom>
+          <a:noFill/>
+          <a:ln/>
+        </p:spPr>
+        <p:txBody>
+          <a:bodyPr wrap="square" lIns="0" tIns="0" rIns="0" bIns="0" rtlCol="0" anchor="t"/>
+          <a:lstStyle/>
+          <a:p>
+            <a:pPr algn="ctr" indent="0" marL="0">
+              <a:lnSpc>
+                <a:spcPct val="108000"/>
+              </a:lnSpc>
+              <a:buNone/>
+            </a:pPr>
+            <a:r>
+              <a:rPr lang="en-US" sz="1050" dirty="0">
+                <a:solidFill>
+                  <a:srgbClr val="6B7280"/>
+                </a:solidFill>
+                <a:latin typeface="Meiryo" pitchFamily="34" charset="0"/>
+                <a:ea typeface="Meiryo" pitchFamily="34" charset="-122"/>
+                <a:cs typeface="Meiryo" pitchFamily="34" charset="-120"/>
+              </a:rPr>
+              <a:t>着手OKで再表示</a:t>
+            </a:r>
+            <a:endParaRPr lang="en-US" sz="1050" dirty="0"/>
+          </a:p>
+        </p:txBody>
+      </p:sp>
+      <p:sp>
+        <p:nvSpPr>
+          <p:cNvPr id="29" name="Text 27"/>
+          <p:cNvSpPr/>
+          <p:nvPr/>
+        </p:nvSpPr>
+        <p:spPr>
+          <a:xfrm>
+            <a:off x="640080" y="4407408"/>
+            <a:ext cx="11155680" cy="320040"/>
+          </a:xfrm>
+          <a:prstGeom prst="rect">
+            <a:avLst/>
+          </a:prstGeom>
+          <a:noFill/>
+          <a:ln/>
+        </p:spPr>
+        <p:txBody>
+          <a:bodyPr wrap="square" lIns="0" tIns="0" rIns="0" bIns="0" rtlCol="0" anchor="ctr"/>
+          <a:lstStyle/>
+          <a:p>
+            <a:pPr algn="ctr" indent="0" marL="0">
+              <a:buNone/>
+            </a:pPr>
+            <a:r>
+              <a:rPr lang="en-US" sz="1150" b="1" dirty="0">
+                <a:solidFill>
+                  <a:srgbClr val="2E8B6F"/>
+                </a:solidFill>
+                <a:latin typeface="Meiryo" pitchFamily="34" charset="0"/>
+                <a:ea typeface="Meiryo" pitchFamily="34" charset="-122"/>
+                <a:cs typeface="Meiryo" pitchFamily="34" charset="-120"/>
+              </a:rPr>
+              <a:t>↻ 1〜4を繰り返して案件が前へ進む　／　迷ったら 管理担当に相談（報連相・ヘルプ）</a:t>
+            </a:r>
+            <a:endParaRPr lang="en-US" sz="1150" dirty="0"/>
+          </a:p>
+        </p:txBody>
+      </p:sp>
+      <p:sp>
+        <p:nvSpPr>
+          <p:cNvPr id="30" name="Shape 28"/>
+          <p:cNvSpPr/>
+          <p:nvPr/>
+        </p:nvSpPr>
+        <p:spPr>
+          <a:xfrm>
+            <a:off x="640080" y="4846320"/>
+            <a:ext cx="10881360" cy="1280160"/>
+          </a:xfrm>
+          <a:prstGeom prst="roundRect">
+            <a:avLst>
+              <a:gd name="adj" fmla="val 7143"/>
+            </a:avLst>
+          </a:prstGeom>
+          <a:solidFill>
+            <a:srgbClr val="EEF2FF"/>
+          </a:solidFill>
+          <a:ln w="12700">
+            <a:solidFill>
+              <a:srgbClr val="CADCFC"/>
+            </a:solidFill>
+            <a:prstDash val="solid"/>
+          </a:ln>
+          <a:effectLst>
+            <a:outerShdw sx="100000" sy="100000" kx="0" ky="0" algn="bl" rotWithShape="0" blurRad="114300" dist="38100" dir="5400000">
+              <a:srgbClr val="8FA0C4">
+                <a:alpha val="30000"/>
+              </a:srgbClr>
+            </a:outerShdw>
+          </a:effectLst>
+        </p:spPr>
+      </p:sp>
+      <p:sp>
+        <p:nvSpPr>
+          <p:cNvPr id="31" name="Text 29"/>
+          <p:cNvSpPr/>
+          <p:nvPr/>
+        </p:nvSpPr>
+        <p:spPr>
+          <a:xfrm>
+            <a:off x="960120" y="4846320"/>
+            <a:ext cx="1920240" cy="1280160"/>
+          </a:xfrm>
+          <a:prstGeom prst="rect">
+            <a:avLst/>
+          </a:prstGeom>
+          <a:noFill/>
+          <a:ln/>
+        </p:spPr>
+        <p:txBody>
+          <a:bodyPr wrap="square" lIns="0" tIns="0" rIns="0" bIns="0" rtlCol="0" anchor="ctr"/>
+          <a:lstStyle/>
+          <a:p>
+            <a:pPr indent="0" marL="0">
+              <a:buNone/>
+            </a:pPr>
+            <a:r>
               <a:rPr lang="en-US" sz="1300" b="1" dirty="0">
                 <a:solidFill>
+                  <a:srgbClr val="1E2761"/>
+                </a:solidFill>
+                <a:latin typeface="Meiryo" pitchFamily="34" charset="0"/>
+                <a:ea typeface="Meiryo" pitchFamily="34" charset="-122"/>
+                <a:cs typeface="Meiryo" pitchFamily="34" charset="-120"/>
+              </a:rPr>
+              <a:t>案件進捗管理</a:t>
+            </a:r>
+            <a:endParaRPr lang="en-US" sz="1300" dirty="0"/>
+          </a:p>
+        </p:txBody>
+      </p:sp>
+      <p:sp>
+        <p:nvSpPr>
+          <p:cNvPr id="32" name="Text 30"/>
+          <p:cNvSpPr/>
+          <p:nvPr/>
+        </p:nvSpPr>
+        <p:spPr>
+          <a:xfrm>
+            <a:off x="2926080" y="5102352"/>
+            <a:ext cx="2743200" cy="749808"/>
+          </a:xfrm>
+          <a:prstGeom prst="roundRect">
+            <a:avLst>
+              <a:gd name="adj" fmla="val 8537"/>
+            </a:avLst>
+          </a:prstGeom>
+          <a:solidFill>
+            <a:srgbClr val="FFFFFF"/>
+          </a:solidFill>
+          <a:ln w="12700">
+            <a:solidFill>
+              <a:srgbClr val="E4E9F2"/>
+            </a:solidFill>
+          </a:ln>
+        </p:spPr>
+        <p:txBody>
+          <a:bodyPr wrap="square" lIns="0" tIns="0" rIns="0" bIns="0" rtlCol="0" anchor="ctr"/>
+          <a:lstStyle/>
+          <a:p>
+            <a:pPr algn="ctr" indent="0" marL="0">
+              <a:buNone/>
+            </a:pPr>
+            <a:r>
+              <a:rPr lang="en-US" sz="1150" b="1" dirty="0">
+                <a:solidFill>
+                  <a:srgbClr val="141A33"/>
+                </a:solidFill>
+                <a:latin typeface="Meiryo" pitchFamily="34" charset="0"/>
+                <a:ea typeface="Meiryo" pitchFamily="34" charset="-122"/>
+                <a:cs typeface="Meiryo" pitchFamily="34" charset="-120"/>
+              </a:rPr>
+              <a:t>各タスクの実施結果が蓄積</a:t>
+            </a:r>
+            <a:endParaRPr lang="en-US" sz="1150" dirty="0"/>
+          </a:p>
+        </p:txBody>
+      </p:sp>
+      <p:sp>
+        <p:nvSpPr>
+          <p:cNvPr id="33" name="Text 31"/>
+          <p:cNvSpPr/>
+          <p:nvPr/>
+        </p:nvSpPr>
+        <p:spPr>
+          <a:xfrm>
+            <a:off x="5715000" y="5102352"/>
+            <a:ext cx="457200" cy="749808"/>
+          </a:xfrm>
+          <a:prstGeom prst="rect">
+            <a:avLst/>
+          </a:prstGeom>
+          <a:noFill/>
+          <a:ln/>
+        </p:spPr>
+        <p:txBody>
+          <a:bodyPr wrap="square" lIns="0" tIns="0" rIns="0" bIns="0" rtlCol="0" anchor="ctr"/>
+          <a:lstStyle/>
+          <a:p>
+            <a:pPr algn="ctr" indent="0" marL="0">
+              <a:buNone/>
+            </a:pPr>
+            <a:r>
+              <a:rPr lang="en-US" sz="1600" dirty="0">
+                <a:solidFill>
+                  <a:srgbClr val="B9C4DB"/>
+                </a:solidFill>
+                <a:latin typeface="Meiryo" pitchFamily="34" charset="0"/>
+                <a:ea typeface="Meiryo" pitchFamily="34" charset="-122"/>
+                <a:cs typeface="Meiryo" pitchFamily="34" charset="-120"/>
+              </a:rPr>
+              <a:t>▶</a:t>
+            </a:r>
+            <a:endParaRPr lang="en-US" sz="1600" dirty="0"/>
+          </a:p>
+        </p:txBody>
+      </p:sp>
+      <p:sp>
+        <p:nvSpPr>
+          <p:cNvPr id="34" name="Text 32"/>
+          <p:cNvSpPr/>
+          <p:nvPr/>
+        </p:nvSpPr>
+        <p:spPr>
+          <a:xfrm>
+            <a:off x="6217920" y="5102352"/>
+            <a:ext cx="1828800" cy="749808"/>
+          </a:xfrm>
+          <a:prstGeom prst="roundRect">
+            <a:avLst>
+              <a:gd name="adj" fmla="val 8537"/>
+            </a:avLst>
+          </a:prstGeom>
+          <a:solidFill>
+            <a:srgbClr val="4F46E5"/>
+          </a:solidFill>
+          <a:ln/>
+          <a:effectLst>
+            <a:outerShdw sx="100000" sy="100000" kx="0" ky="0" algn="bl" rotWithShape="0" blurRad="76200" dist="25400" dir="5400000">
+              <a:srgbClr val="8FA0C4">
+                <a:alpha val="30000"/>
+              </a:srgbClr>
+            </a:outerShdw>
+          </a:effectLst>
+        </p:spPr>
+        <p:txBody>
+          <a:bodyPr wrap="square" lIns="0" tIns="0" rIns="0" bIns="0" rtlCol="0" anchor="ctr"/>
+          <a:lstStyle/>
+          <a:p>
+            <a:pPr algn="ctr" indent="0" marL="0">
+              <a:buNone/>
+            </a:pPr>
+            <a:r>
+              <a:rPr lang="en-US" sz="1250" b="1" dirty="0">
+                <a:solidFill>
                   <a:srgbClr val="FFFFFF"/>
                 </a:solidFill>
                 <a:latin typeface="Meiryo" pitchFamily="34" charset="0"/>
                 <a:ea typeface="Meiryo" pitchFamily="34" charset="-122"/>
                 <a:cs typeface="Meiryo" pitchFamily="34" charset="-120"/>
               </a:rPr>
-              <a:t>3</a:t>
-            </a:r>
-            <a:endParaRPr lang="en-US" sz="1300" dirty="0"/>
-          </a:p>
-        </p:txBody>
-      </p:sp>
-      <p:sp>
-        <p:nvSpPr>
-          <p:cNvPr id="15" name="Text 13"/>
-          <p:cNvSpPr/>
-          <p:nvPr/>
-        </p:nvSpPr>
-        <p:spPr>
-          <a:xfrm>
-            <a:off x="1691640" y="4160520"/>
-            <a:ext cx="3566160" cy="1005840"/>
-          </a:xfrm>
-          <a:prstGeom prst="rect">
-            <a:avLst/>
-          </a:prstGeom>
-          <a:noFill/>
-          <a:ln/>
-        </p:spPr>
-        <p:txBody>
-          <a:bodyPr wrap="square" lIns="0" tIns="0" rIns="0" bIns="0" rtlCol="0" anchor="ctr"/>
-          <a:lstStyle/>
-          <a:p>
-            <a:pPr indent="0" marL="0">
-              <a:buNone/>
-            </a:pPr>
-            <a:r>
-              <a:rPr lang="en-US" sz="1550" b="1" dirty="0">
-                <a:solidFill>
-                  <a:srgbClr val="141A33"/>
-                </a:solidFill>
-                <a:latin typeface="Meiryo" pitchFamily="34" charset="0"/>
-                <a:ea typeface="Meiryo" pitchFamily="34" charset="-122"/>
-                <a:cs typeface="Meiryo" pitchFamily="34" charset="-120"/>
-              </a:rPr>
-              <a:t>まず慣れる</a:t>
-            </a:r>
-            <a:endParaRPr lang="en-US" sz="1550" dirty="0"/>
-          </a:p>
-        </p:txBody>
-      </p:sp>
-      <p:sp>
-        <p:nvSpPr>
-          <p:cNvPr id="16" name="Text 14"/>
-          <p:cNvSpPr/>
-          <p:nvPr/>
-        </p:nvSpPr>
-        <p:spPr>
-          <a:xfrm>
-            <a:off x="5394960" y="4160520"/>
-            <a:ext cx="5852160" cy="1005840"/>
-          </a:xfrm>
-          <a:prstGeom prst="rect">
-            <a:avLst/>
-          </a:prstGeom>
-          <a:noFill/>
-          <a:ln/>
-        </p:spPr>
-        <p:txBody>
-          <a:bodyPr wrap="square" lIns="0" tIns="0" rIns="0" bIns="0" rtlCol="0" anchor="ctr"/>
-          <a:lstStyle/>
-          <a:p>
-            <a:pPr indent="0" marL="0">
-              <a:buNone/>
-            </a:pPr>
-            <a:r>
-              <a:rPr lang="en-US" sz="1350" dirty="0">
-                <a:solidFill>
-                  <a:srgbClr val="6B7280"/>
-                </a:solidFill>
-                <a:latin typeface="Meiryo" pitchFamily="34" charset="0"/>
-                <a:ea typeface="Meiryo" pitchFamily="34" charset="-122"/>
-                <a:cs typeface="Meiryo" pitchFamily="34" charset="-120"/>
-              </a:rPr>
-              <a:t>各チーム1〜2件から。抱え込まず報連相で共有</a:t>
-            </a:r>
-            <a:endParaRPr lang="en-US" sz="1350" dirty="0"/>
-          </a:p>
-        </p:txBody>
-      </p:sp>
-      <p:sp>
-        <p:nvSpPr>
-          <p:cNvPr id="17" name="Text 15"/>
-          <p:cNvSpPr/>
-          <p:nvPr/>
-        </p:nvSpPr>
-        <p:spPr>
-          <a:xfrm>
-            <a:off x="640080" y="5806440"/>
-            <a:ext cx="10972800" cy="365760"/>
-          </a:xfrm>
-          <a:prstGeom prst="rect">
-            <a:avLst/>
-          </a:prstGeom>
-          <a:noFill/>
-          <a:ln/>
-        </p:spPr>
-        <p:txBody>
-          <a:bodyPr wrap="square" lIns="0" tIns="0" rIns="0" bIns="0" rtlCol="0" anchor="ctr"/>
-          <a:lstStyle/>
-          <a:p>
-            <a:pPr indent="0" marL="0">
-              <a:buNone/>
-            </a:pPr>
-            <a:r>
-              <a:rPr lang="en-US" sz="1400" b="1" dirty="0">
+              <a:t>AIが集計</a:t>
+            </a:r>
+            <a:endParaRPr lang="en-US" sz="1250" dirty="0"/>
+          </a:p>
+        </p:txBody>
+      </p:sp>
+      <p:sp>
+        <p:nvSpPr>
+          <p:cNvPr id="35" name="Text 33"/>
+          <p:cNvSpPr/>
+          <p:nvPr/>
+        </p:nvSpPr>
+        <p:spPr>
+          <a:xfrm>
+            <a:off x="8092440" y="5102352"/>
+            <a:ext cx="457200" cy="749808"/>
+          </a:xfrm>
+          <a:prstGeom prst="rect">
+            <a:avLst/>
+          </a:prstGeom>
+          <a:noFill/>
+          <a:ln/>
+        </p:spPr>
+        <p:txBody>
+          <a:bodyPr wrap="square" lIns="0" tIns="0" rIns="0" bIns="0" rtlCol="0" anchor="ctr"/>
+          <a:lstStyle/>
+          <a:p>
+            <a:pPr algn="ctr" indent="0" marL="0">
+              <a:buNone/>
+            </a:pPr>
+            <a:r>
+              <a:rPr lang="en-US" sz="1600" dirty="0">
+                <a:solidFill>
+                  <a:srgbClr val="B9C4DB"/>
+                </a:solidFill>
+                <a:latin typeface="Meiryo" pitchFamily="34" charset="0"/>
+                <a:ea typeface="Meiryo" pitchFamily="34" charset="-122"/>
+                <a:cs typeface="Meiryo" pitchFamily="34" charset="-120"/>
+              </a:rPr>
+              <a:t>▶</a:t>
+            </a:r>
+            <a:endParaRPr lang="en-US" sz="1600" dirty="0"/>
+          </a:p>
+        </p:txBody>
+      </p:sp>
+      <p:sp>
+        <p:nvSpPr>
+          <p:cNvPr id="36" name="Text 34"/>
+          <p:cNvSpPr/>
+          <p:nvPr/>
+        </p:nvSpPr>
+        <p:spPr>
+          <a:xfrm>
+            <a:off x="8595360" y="5102352"/>
+            <a:ext cx="2834640" cy="749808"/>
+          </a:xfrm>
+          <a:prstGeom prst="roundRect">
+            <a:avLst>
+              <a:gd name="adj" fmla="val 8537"/>
+            </a:avLst>
+          </a:prstGeom>
+          <a:solidFill>
+            <a:srgbClr val="FFFFFF"/>
+          </a:solidFill>
+          <a:ln w="15875">
+            <a:solidFill>
+              <a:srgbClr val="CADCFC"/>
+            </a:solidFill>
+          </a:ln>
+        </p:spPr>
+        <p:txBody>
+          <a:bodyPr wrap="square" lIns="0" tIns="0" rIns="0" bIns="0" rtlCol="0" anchor="ctr"/>
+          <a:lstStyle/>
+          <a:p>
+            <a:pPr algn="ctr" indent="0" marL="0">
+              <a:lnSpc>
+                <a:spcPct val="105000"/>
+              </a:lnSpc>
+              <a:buNone/>
+            </a:pPr>
+            <a:r>
+              <a:rPr lang="en-US" sz="1100" b="1" dirty="0">
                 <a:solidFill>
                   <a:srgbClr val="1E2761"/>
                 </a:solidFill>
@@ -12589,9 +14813,29 @@
                 <a:ea typeface="Meiryo" pitchFamily="34" charset="-122"/>
                 <a:cs typeface="Meiryo" pitchFamily="34" charset="-120"/>
               </a:rPr>
-              <a:t>「完璧じゃなくていい、一緒に育てる」— それが今日一番のお願いです。</a:t>
-            </a:r>
-            <a:endParaRPr lang="en-US" sz="1400" dirty="0"/>
+              <a:t>案件進捗サマリー</a:t>
+            </a:r>
+            <a:endParaRPr lang="en-US" sz="1100" dirty="0"/>
+          </a:p>
+          <a:p>
+            <a:pPr algn="ctr" indent="0" marL="0">
+              <a:lnSpc>
+                <a:spcPct val="105000"/>
+              </a:lnSpc>
+              <a:buNone/>
+            </a:pPr>
+            <a:r>
+              <a:rPr lang="en-US" sz="1100" b="1" dirty="0">
+                <a:solidFill>
+                  <a:srgbClr val="1E2761"/>
+                </a:solidFill>
+                <a:latin typeface="Meiryo" pitchFamily="34" charset="0"/>
+                <a:ea typeface="Meiryo" pitchFamily="34" charset="-122"/>
+                <a:cs typeface="Meiryo" pitchFamily="34" charset="-120"/>
+              </a:rPr>
+              <a:t>（今どこまで進んだか一目）</a:t>
+            </a:r>
+            <a:endParaRPr lang="en-US" sz="1100" dirty="0"/>
           </a:p>
         </p:txBody>
       </p:sp>
@@ -12606,6 +14850,2526 @@
 <file path=ppt/slides/slide22.xml><?xml version="1.0" encoding="utf-8"?>
 <p:sld xmlns:a="http://schemas.openxmlformats.org/drawingml/2006/main" xmlns:r="http://schemas.openxmlformats.org/officeDocument/2006/relationships" xmlns:p="http://schemas.openxmlformats.org/presentationml/2006/main">
   <p:cSld name="Slide 22">
+    <p:bg>
+      <p:bgPr>
+        <a:solidFill>
+          <a:srgbClr val="11173A"/>
+        </a:solidFill>
+      </p:bgPr>
+    </p:bg>
+    <p:spTree>
+      <p:nvGrpSpPr>
+        <p:cNvPr id="1" name=""/>
+        <p:cNvGrpSpPr/>
+        <p:nvPr/>
+      </p:nvGrpSpPr>
+      <p:grpSpPr>
+        <a:xfrm>
+          <a:off x="0" y="0"/>
+          <a:ext cx="0" cy="0"/>
+          <a:chOff x="0" y="0"/>
+          <a:chExt cx="0" cy="0"/>
+        </a:xfrm>
+      </p:grpSpPr>
+      <p:sp>
+        <p:nvSpPr>
+          <p:cNvPr id="2" name="Shape 0"/>
+          <p:cNvSpPr/>
+          <p:nvPr/>
+        </p:nvSpPr>
+        <p:spPr>
+          <a:xfrm>
+            <a:off x="8961120" y="3291840"/>
+            <a:ext cx="5029200" cy="5029200"/>
+          </a:xfrm>
+          <a:prstGeom prst="ellipse">
+            <a:avLst/>
+          </a:prstGeom>
+          <a:solidFill>
+            <a:srgbClr val="1E2761"/>
+          </a:solidFill>
+          <a:ln/>
+        </p:spPr>
+      </p:sp>
+      <p:sp>
+        <p:nvSpPr>
+          <p:cNvPr id="3" name="Text 1"/>
+          <p:cNvSpPr/>
+          <p:nvPr/>
+        </p:nvSpPr>
+        <p:spPr>
+          <a:xfrm>
+            <a:off x="640080" y="1371600"/>
+            <a:ext cx="7315200" cy="365760"/>
+          </a:xfrm>
+          <a:prstGeom prst="rect">
+            <a:avLst/>
+          </a:prstGeom>
+          <a:noFill/>
+          <a:ln/>
+        </p:spPr>
+        <p:txBody>
+          <a:bodyPr wrap="square" lIns="0" tIns="0" rIns="0" bIns="0" rtlCol="0" anchor="ctr"/>
+          <a:lstStyle/>
+          <a:p>
+            <a:pPr indent="0" marL="0">
+              <a:buNone/>
+            </a:pPr>
+            <a:r>
+              <a:rPr lang="en-US" sz="1400" b="1" spc="200" kern="0" dirty="0">
+                <a:solidFill>
+                  <a:srgbClr val="E1A33A"/>
+                </a:solidFill>
+                <a:latin typeface="Meiryo" pitchFamily="34" charset="0"/>
+                <a:ea typeface="Meiryo" pitchFamily="34" charset="-122"/>
+                <a:cs typeface="Meiryo" pitchFamily="34" charset="-120"/>
+              </a:rPr>
+              <a:t>LIVE DEMO</a:t>
+            </a:r>
+            <a:endParaRPr lang="en-US" sz="1400" dirty="0"/>
+          </a:p>
+        </p:txBody>
+      </p:sp>
+      <p:sp>
+        <p:nvSpPr>
+          <p:cNvPr id="4" name="Text 2"/>
+          <p:cNvSpPr/>
+          <p:nvPr/>
+        </p:nvSpPr>
+        <p:spPr>
+          <a:xfrm>
+            <a:off x="640080" y="1737360"/>
+            <a:ext cx="10058400" cy="914400"/>
+          </a:xfrm>
+          <a:prstGeom prst="rect">
+            <a:avLst/>
+          </a:prstGeom>
+          <a:noFill/>
+          <a:ln/>
+        </p:spPr>
+        <p:txBody>
+          <a:bodyPr wrap="square" lIns="0" tIns="0" rIns="0" bIns="0" rtlCol="0" anchor="ctr"/>
+          <a:lstStyle/>
+          <a:p>
+            <a:pPr indent="0" marL="0">
+              <a:buNone/>
+            </a:pPr>
+            <a:r>
+              <a:rPr lang="en-US" sz="3200" b="1" dirty="0">
+                <a:solidFill>
+                  <a:srgbClr val="FFFFFF"/>
+                </a:solidFill>
+                <a:latin typeface="Meiryo" pitchFamily="34" charset="0"/>
+                <a:ea typeface="Meiryo" pitchFamily="34" charset="-122"/>
+                <a:cs typeface="Meiryo" pitchFamily="34" charset="-120"/>
+              </a:rPr>
+              <a:t>1件を、面談から納品まで通します</a:t>
+            </a:r>
+            <a:endParaRPr lang="en-US" sz="3200" dirty="0"/>
+          </a:p>
+        </p:txBody>
+      </p:sp>
+      <p:sp>
+        <p:nvSpPr>
+          <p:cNvPr id="5" name="Text 3"/>
+          <p:cNvSpPr/>
+          <p:nvPr/>
+        </p:nvSpPr>
+        <p:spPr>
+          <a:xfrm>
+            <a:off x="640080" y="2743200"/>
+            <a:ext cx="10058400" cy="457200"/>
+          </a:xfrm>
+          <a:prstGeom prst="rect">
+            <a:avLst/>
+          </a:prstGeom>
+          <a:noFill/>
+          <a:ln/>
+        </p:spPr>
+        <p:txBody>
+          <a:bodyPr wrap="square" lIns="0" tIns="0" rIns="0" bIns="0" rtlCol="0" anchor="ctr"/>
+          <a:lstStyle/>
+          <a:p>
+            <a:pPr indent="0" marL="0">
+              <a:buNone/>
+            </a:pPr>
+            <a:r>
+              <a:rPr lang="en-US" sz="1500" dirty="0">
+                <a:solidFill>
+                  <a:srgbClr val="CADCFC"/>
+                </a:solidFill>
+                <a:latin typeface="Meiryo" pitchFamily="34" charset="0"/>
+                <a:ea typeface="Meiryo" pitchFamily="34" charset="-122"/>
+                <a:cs typeface="Meiryo" pitchFamily="34" charset="-120"/>
+              </a:rPr>
+              <a:t>サンプル：田中家 相続手続き（横浜市の不動産・みずほ銀行）</a:t>
+            </a:r>
+            <a:endParaRPr lang="en-US" sz="1500" dirty="0"/>
+          </a:p>
+        </p:txBody>
+      </p:sp>
+      <p:sp>
+        <p:nvSpPr>
+          <p:cNvPr id="6" name="Text 4"/>
+          <p:cNvSpPr/>
+          <p:nvPr/>
+        </p:nvSpPr>
+        <p:spPr>
+          <a:xfrm>
+            <a:off x="640080" y="3657600"/>
+            <a:ext cx="3383280" cy="640080"/>
+          </a:xfrm>
+          <a:prstGeom prst="rect">
+            <a:avLst/>
+          </a:prstGeom>
+          <a:noFill/>
+          <a:ln/>
+        </p:spPr>
+        <p:txBody>
+          <a:bodyPr wrap="square" lIns="0" tIns="0" rIns="0" bIns="0" rtlCol="0" anchor="ctr"/>
+          <a:lstStyle/>
+          <a:p>
+            <a:pPr marL="342900" indent="-342900">
+              <a:buSzPct val="100000"/>
+              <a:buChar char="•"/>
+            </a:pPr>
+            <a:r>
+              <a:rPr lang="en-US" sz="1350" dirty="0">
+                <a:solidFill>
+                  <a:srgbClr val="FFFFFF"/>
+                </a:solidFill>
+                <a:latin typeface="Meiryo" pitchFamily="34" charset="0"/>
+                <a:ea typeface="Meiryo" pitchFamily="34" charset="-122"/>
+                <a:cs typeface="Meiryo" pitchFamily="34" charset="-120"/>
+              </a:rPr>
+              <a:t>面談登録 → オーダーシート</a:t>
+            </a:r>
+            <a:endParaRPr lang="en-US" sz="1350" dirty="0"/>
+          </a:p>
+        </p:txBody>
+      </p:sp>
+      <p:sp>
+        <p:nvSpPr>
+          <p:cNvPr id="7" name="Text 5"/>
+          <p:cNvSpPr/>
+          <p:nvPr/>
+        </p:nvSpPr>
+        <p:spPr>
+          <a:xfrm>
+            <a:off x="4206240" y="3657600"/>
+            <a:ext cx="3383280" cy="640080"/>
+          </a:xfrm>
+          <a:prstGeom prst="rect">
+            <a:avLst/>
+          </a:prstGeom>
+          <a:noFill/>
+          <a:ln/>
+        </p:spPr>
+        <p:txBody>
+          <a:bodyPr wrap="square" lIns="0" tIns="0" rIns="0" bIns="0" rtlCol="0" anchor="ctr"/>
+          <a:lstStyle/>
+          <a:p>
+            <a:pPr marL="342900" indent="-342900">
+              <a:buSzPct val="100000"/>
+              <a:buChar char="•"/>
+            </a:pPr>
+            <a:r>
+              <a:rPr lang="en-US" sz="1350" dirty="0">
+                <a:solidFill>
+                  <a:srgbClr val="FFFFFF"/>
+                </a:solidFill>
+                <a:latin typeface="Meiryo" pitchFamily="34" charset="0"/>
+                <a:ea typeface="Meiryo" pitchFamily="34" charset="-122"/>
+                <a:cs typeface="Meiryo" pitchFamily="34" charset="-120"/>
+              </a:rPr>
+              <a:t>タスク自動生成／受信簿</a:t>
+            </a:r>
+            <a:endParaRPr lang="en-US" sz="1350" dirty="0"/>
+          </a:p>
+        </p:txBody>
+      </p:sp>
+      <p:sp>
+        <p:nvSpPr>
+          <p:cNvPr id="8" name="Text 6"/>
+          <p:cNvSpPr/>
+          <p:nvPr/>
+        </p:nvSpPr>
+        <p:spPr>
+          <a:xfrm>
+            <a:off x="7772400" y="3657600"/>
+            <a:ext cx="3383280" cy="640080"/>
+          </a:xfrm>
+          <a:prstGeom prst="rect">
+            <a:avLst/>
+          </a:prstGeom>
+          <a:noFill/>
+          <a:ln/>
+        </p:spPr>
+        <p:txBody>
+          <a:bodyPr wrap="square" lIns="0" tIns="0" rIns="0" bIns="0" rtlCol="0" anchor="ctr"/>
+          <a:lstStyle/>
+          <a:p>
+            <a:pPr marL="342900" indent="-342900">
+              <a:buSzPct val="100000"/>
+              <a:buChar char="•"/>
+            </a:pPr>
+            <a:r>
+              <a:rPr lang="en-US" sz="1350" dirty="0">
+                <a:solidFill>
+                  <a:srgbClr val="FFFFFF"/>
+                </a:solidFill>
+                <a:latin typeface="Meiryo" pitchFamily="34" charset="0"/>
+                <a:ea typeface="Meiryo" pitchFamily="34" charset="-122"/>
+                <a:cs typeface="Meiryo" pitchFamily="34" charset="-120"/>
+              </a:rPr>
+              <a:t>受注 → 割り振り → 着手準備</a:t>
+            </a:r>
+            <a:endParaRPr lang="en-US" sz="1350" dirty="0"/>
+          </a:p>
+        </p:txBody>
+      </p:sp>
+      <p:sp>
+        <p:nvSpPr>
+          <p:cNvPr id="9" name="Text 7"/>
+          <p:cNvSpPr/>
+          <p:nvPr/>
+        </p:nvSpPr>
+        <p:spPr>
+          <a:xfrm>
+            <a:off x="640080" y="4526280"/>
+            <a:ext cx="3383280" cy="640080"/>
+          </a:xfrm>
+          <a:prstGeom prst="rect">
+            <a:avLst/>
+          </a:prstGeom>
+          <a:noFill/>
+          <a:ln/>
+        </p:spPr>
+        <p:txBody>
+          <a:bodyPr wrap="square" lIns="0" tIns="0" rIns="0" bIns="0" rtlCol="0" anchor="ctr"/>
+          <a:lstStyle/>
+          <a:p>
+            <a:pPr marL="342900" indent="-342900">
+              <a:buSzPct val="100000"/>
+              <a:buChar char="•"/>
+            </a:pPr>
+            <a:r>
+              <a:rPr lang="en-US" sz="1350" dirty="0">
+                <a:solidFill>
+                  <a:srgbClr val="FFFFFF"/>
+                </a:solidFill>
+                <a:latin typeface="Meiryo" pitchFamily="34" charset="0"/>
+                <a:ea typeface="Meiryo" pitchFamily="34" charset="-122"/>
+                <a:cs typeface="Meiryo" pitchFamily="34" charset="-120"/>
+              </a:rPr>
+              <a:t>ファイル化 → 作業進行中</a:t>
+            </a:r>
+            <a:endParaRPr lang="en-US" sz="1350" dirty="0"/>
+          </a:p>
+        </p:txBody>
+      </p:sp>
+      <p:sp>
+        <p:nvSpPr>
+          <p:cNvPr id="10" name="Text 8"/>
+          <p:cNvSpPr/>
+          <p:nvPr/>
+        </p:nvSpPr>
+        <p:spPr>
+          <a:xfrm>
+            <a:off x="4206240" y="4526280"/>
+            <a:ext cx="3383280" cy="640080"/>
+          </a:xfrm>
+          <a:prstGeom prst="rect">
+            <a:avLst/>
+          </a:prstGeom>
+          <a:noFill/>
+          <a:ln/>
+        </p:spPr>
+        <p:txBody>
+          <a:bodyPr wrap="square" lIns="0" tIns="0" rIns="0" bIns="0" rtlCol="0" anchor="ctr"/>
+          <a:lstStyle/>
+          <a:p>
+            <a:pPr marL="342900" indent="-342900">
+              <a:buSzPct val="100000"/>
+              <a:buChar char="•"/>
+            </a:pPr>
+            <a:r>
+              <a:rPr lang="en-US" sz="1350" dirty="0">
+                <a:solidFill>
+                  <a:srgbClr val="FFFFFF"/>
+                </a:solidFill>
+                <a:latin typeface="Meiryo" pitchFamily="34" charset="0"/>
+                <a:ea typeface="Meiryo" pitchFamily="34" charset="-122"/>
+                <a:cs typeface="Meiryo" pitchFamily="34" charset="-120"/>
+              </a:rPr>
+              <a:t>業務完了 → 納品</a:t>
+            </a:r>
+            <a:endParaRPr lang="en-US" sz="1350" dirty="0"/>
+          </a:p>
+        </p:txBody>
+      </p:sp>
+    </p:spTree>
+  </p:cSld>
+  <p:clrMapOvr>
+    <a:masterClrMapping/>
+  </p:clrMapOvr>
+</p:sld>
+</file>
+
+<file path=ppt/slides/slide23.xml><?xml version="1.0" encoding="utf-8"?>
+<p:sld xmlns:a="http://schemas.openxmlformats.org/drawingml/2006/main" xmlns:r="http://schemas.openxmlformats.org/officeDocument/2006/relationships" xmlns:p="http://schemas.openxmlformats.org/presentationml/2006/main">
+  <p:cSld name="Slide 23">
+    <p:bg>
+      <p:bgPr>
+        <a:solidFill>
+          <a:srgbClr val="FFFFFF"/>
+        </a:solidFill>
+      </p:bgPr>
+    </p:bg>
+    <p:spTree>
+      <p:nvGrpSpPr>
+        <p:cNvPr id="1" name=""/>
+        <p:cNvGrpSpPr/>
+        <p:nvPr/>
+      </p:nvGrpSpPr>
+      <p:grpSpPr>
+        <a:xfrm>
+          <a:off x="0" y="0"/>
+          <a:ext cx="0" cy="0"/>
+          <a:chOff x="0" y="0"/>
+          <a:chExt cx="0" cy="0"/>
+        </a:xfrm>
+      </p:grpSpPr>
+      <p:sp>
+        <p:nvSpPr>
+          <p:cNvPr id="2" name="Shape 0"/>
+          <p:cNvSpPr/>
+          <p:nvPr/>
+        </p:nvSpPr>
+        <p:spPr>
+          <a:xfrm>
+            <a:off x="640080" y="502920"/>
+            <a:ext cx="201168" cy="201168"/>
+          </a:xfrm>
+          <a:prstGeom prst="roundRect">
+            <a:avLst>
+              <a:gd name="adj" fmla="val 22727"/>
+            </a:avLst>
+          </a:prstGeom>
+          <a:solidFill>
+            <a:srgbClr val="E0A64B"/>
+          </a:solidFill>
+          <a:ln/>
+        </p:spPr>
+      </p:sp>
+      <p:sp>
+        <p:nvSpPr>
+          <p:cNvPr id="3" name="Text 1"/>
+          <p:cNvSpPr/>
+          <p:nvPr/>
+        </p:nvSpPr>
+        <p:spPr>
+          <a:xfrm>
+            <a:off x="978408" y="411480"/>
+            <a:ext cx="10058400" cy="329184"/>
+          </a:xfrm>
+          <a:prstGeom prst="rect">
+            <a:avLst/>
+          </a:prstGeom>
+          <a:noFill/>
+          <a:ln/>
+        </p:spPr>
+        <p:txBody>
+          <a:bodyPr wrap="square" lIns="0" tIns="0" rIns="0" bIns="0" rtlCol="0" anchor="ctr"/>
+          <a:lstStyle/>
+          <a:p>
+            <a:pPr indent="0" marL="0">
+              <a:buNone/>
+            </a:pPr>
+            <a:r>
+              <a:rPr lang="en-US" sz="1200" b="1" spc="250" kern="0" dirty="0">
+                <a:solidFill>
+                  <a:srgbClr val="4F46E5"/>
+                </a:solidFill>
+                <a:latin typeface="Meiryo" pitchFamily="34" charset="0"/>
+                <a:ea typeface="Meiryo" pitchFamily="34" charset="-122"/>
+                <a:cs typeface="Meiryo" pitchFamily="34" charset="-120"/>
+              </a:rPr>
+              <a:t>MIGRATION</a:t>
+            </a:r>
+            <a:endParaRPr lang="en-US" sz="1200" dirty="0"/>
+          </a:p>
+        </p:txBody>
+      </p:sp>
+      <p:sp>
+        <p:nvSpPr>
+          <p:cNvPr id="4" name="Text 2"/>
+          <p:cNvSpPr/>
+          <p:nvPr/>
+        </p:nvSpPr>
+        <p:spPr>
+          <a:xfrm>
+            <a:off x="640080" y="795528"/>
+            <a:ext cx="11247120" cy="713232"/>
+          </a:xfrm>
+          <a:prstGeom prst="rect">
+            <a:avLst/>
+          </a:prstGeom>
+          <a:noFill/>
+          <a:ln/>
+        </p:spPr>
+        <p:txBody>
+          <a:bodyPr wrap="square" lIns="0" tIns="0" rIns="0" bIns="0" rtlCol="0" anchor="ctr"/>
+          <a:lstStyle/>
+          <a:p>
+            <a:pPr indent="0" marL="0">
+              <a:buNone/>
+            </a:pPr>
+            <a:r>
+              <a:rPr lang="en-US" sz="3000" b="1" dirty="0">
+                <a:solidFill>
+                  <a:srgbClr val="141A33"/>
+                </a:solidFill>
+                <a:latin typeface="Meiryo" pitchFamily="34" charset="0"/>
+                <a:ea typeface="Meiryo" pitchFamily="34" charset="-122"/>
+                <a:cs typeface="Meiryo" pitchFamily="34" charset="-120"/>
+              </a:rPr>
+              <a:t>移行方針：まず少数から、一緒に育てる</a:t>
+            </a:r>
+            <a:endParaRPr lang="en-US" sz="3000" dirty="0"/>
+          </a:p>
+        </p:txBody>
+      </p:sp>
+      <p:sp>
+        <p:nvSpPr>
+          <p:cNvPr id="5" name="Shape 3"/>
+          <p:cNvSpPr/>
+          <p:nvPr/>
+        </p:nvSpPr>
+        <p:spPr>
+          <a:xfrm>
+            <a:off x="640080" y="1783080"/>
+            <a:ext cx="3429000" cy="3566160"/>
+          </a:xfrm>
+          <a:prstGeom prst="roundRect">
+            <a:avLst>
+              <a:gd name="adj" fmla="val 2667"/>
+            </a:avLst>
+          </a:prstGeom>
+          <a:solidFill>
+            <a:srgbClr val="F7F9FD"/>
+          </a:solidFill>
+          <a:ln w="12700">
+            <a:solidFill>
+              <a:srgbClr val="E4E9F2"/>
+            </a:solidFill>
+            <a:prstDash val="solid"/>
+          </a:ln>
+          <a:effectLst>
+            <a:outerShdw sx="100000" sy="100000" kx="0" ky="0" algn="bl" rotWithShape="0" blurRad="114300" dist="38100" dir="5400000">
+              <a:srgbClr val="8FA0C4">
+                <a:alpha val="30000"/>
+              </a:srgbClr>
+            </a:outerShdw>
+          </a:effectLst>
+        </p:spPr>
+      </p:sp>
+      <p:sp>
+        <p:nvSpPr>
+          <p:cNvPr id="6" name="Text 4"/>
+          <p:cNvSpPr/>
+          <p:nvPr/>
+        </p:nvSpPr>
+        <p:spPr>
+          <a:xfrm>
+            <a:off x="914400" y="2011680"/>
+            <a:ext cx="2011680" cy="502920"/>
+          </a:xfrm>
+          <a:prstGeom prst="roundRect">
+            <a:avLst>
+              <a:gd name="adj" fmla="val 90909"/>
+            </a:avLst>
+          </a:prstGeom>
+          <a:solidFill>
+            <a:srgbClr val="1E2761"/>
+          </a:solidFill>
+          <a:ln/>
+        </p:spPr>
+        <p:txBody>
+          <a:bodyPr wrap="square" lIns="0" tIns="0" rIns="0" bIns="0" rtlCol="0" anchor="ctr"/>
+          <a:lstStyle/>
+          <a:p>
+            <a:pPr algn="ctr" indent="0" marL="0">
+              <a:buNone/>
+            </a:pPr>
+            <a:r>
+              <a:rPr lang="en-US" sz="1300" b="1" dirty="0">
+                <a:solidFill>
+                  <a:srgbClr val="FFFFFF"/>
+                </a:solidFill>
+                <a:latin typeface="Meiryo" pitchFamily="34" charset="0"/>
+                <a:ea typeface="Meiryo" pitchFamily="34" charset="-122"/>
+                <a:cs typeface="Meiryo" pitchFamily="34" charset="-120"/>
+              </a:rPr>
+              <a:t>STEP 1</a:t>
+            </a:r>
+            <a:endParaRPr lang="en-US" sz="1300" dirty="0"/>
+          </a:p>
+        </p:txBody>
+      </p:sp>
+      <p:sp>
+        <p:nvSpPr>
+          <p:cNvPr id="7" name="Text 5"/>
+          <p:cNvSpPr/>
+          <p:nvPr/>
+        </p:nvSpPr>
+        <p:spPr>
+          <a:xfrm>
+            <a:off x="914400" y="2697480"/>
+            <a:ext cx="2880360" cy="365760"/>
+          </a:xfrm>
+          <a:prstGeom prst="rect">
+            <a:avLst/>
+          </a:prstGeom>
+          <a:noFill/>
+          <a:ln/>
+        </p:spPr>
+        <p:txBody>
+          <a:bodyPr wrap="square" lIns="0" tIns="0" rIns="0" bIns="0" rtlCol="0" anchor="ctr"/>
+          <a:lstStyle/>
+          <a:p>
+            <a:pPr indent="0" marL="0">
+              <a:buNone/>
+            </a:pPr>
+            <a:r>
+              <a:rPr lang="en-US" sz="1300" b="1" dirty="0">
+                <a:solidFill>
+                  <a:srgbClr val="6B7280"/>
+                </a:solidFill>
+                <a:latin typeface="Meiryo" pitchFamily="34" charset="0"/>
+                <a:ea typeface="Meiryo" pitchFamily="34" charset="-122"/>
+                <a:cs typeface="Meiryo" pitchFamily="34" charset="-120"/>
+              </a:rPr>
+              <a:t>〜1ヶ月</a:t>
+            </a:r>
+            <a:endParaRPr lang="en-US" sz="1300" dirty="0"/>
+          </a:p>
+        </p:txBody>
+      </p:sp>
+      <p:sp>
+        <p:nvSpPr>
+          <p:cNvPr id="8" name="Text 6"/>
+          <p:cNvSpPr/>
+          <p:nvPr/>
+        </p:nvSpPr>
+        <p:spPr>
+          <a:xfrm>
+            <a:off x="914400" y="3108960"/>
+            <a:ext cx="2880360" cy="640080"/>
+          </a:xfrm>
+          <a:prstGeom prst="rect">
+            <a:avLst/>
+          </a:prstGeom>
+          <a:noFill/>
+          <a:ln/>
+        </p:spPr>
+        <p:txBody>
+          <a:bodyPr wrap="square" lIns="0" tIns="0" rIns="0" bIns="0" rtlCol="0" anchor="t"/>
+          <a:lstStyle/>
+          <a:p>
+            <a:pPr indent="0" marL="0">
+              <a:buNone/>
+            </a:pPr>
+            <a:r>
+              <a:rPr lang="en-US" sz="1600" b="1" dirty="0">
+                <a:solidFill>
+                  <a:srgbClr val="141A33"/>
+                </a:solidFill>
+                <a:latin typeface="Meiryo" pitchFamily="34" charset="0"/>
+                <a:ea typeface="Meiryo" pitchFamily="34" charset="-122"/>
+                <a:cs typeface="Meiryo" pitchFamily="34" charset="-120"/>
+              </a:rPr>
+              <a:t>各チーム 1〜2件だけ</a:t>
+            </a:r>
+            <a:endParaRPr lang="en-US" sz="1600" dirty="0"/>
+          </a:p>
+        </p:txBody>
+      </p:sp>
+      <p:sp>
+        <p:nvSpPr>
+          <p:cNvPr id="9" name="Text 7"/>
+          <p:cNvSpPr/>
+          <p:nvPr/>
+        </p:nvSpPr>
+        <p:spPr>
+          <a:xfrm>
+            <a:off x="914400" y="3886200"/>
+            <a:ext cx="2880360" cy="1280160"/>
+          </a:xfrm>
+          <a:prstGeom prst="rect">
+            <a:avLst/>
+          </a:prstGeom>
+          <a:noFill/>
+          <a:ln/>
+        </p:spPr>
+        <p:txBody>
+          <a:bodyPr wrap="square" lIns="0" tIns="0" rIns="0" bIns="0" rtlCol="0" anchor="t"/>
+          <a:lstStyle/>
+          <a:p>
+            <a:pPr indent="0" marL="0">
+              <a:lnSpc>
+                <a:spcPct val="115000"/>
+              </a:lnSpc>
+              <a:buNone/>
+            </a:pPr>
+            <a:r>
+              <a:rPr lang="en-US" sz="1250" dirty="0">
+                <a:solidFill>
+                  <a:srgbClr val="6B7280"/>
+                </a:solidFill>
+                <a:latin typeface="Meiryo" pitchFamily="34" charset="0"/>
+                <a:ea typeface="Meiryo" pitchFamily="34" charset="-122"/>
+                <a:cs typeface="Meiryo" pitchFamily="34" charset="-120"/>
+              </a:rPr>
+              <a:t>新規案件のうち"事故が少なそうなもの"で慣れる</a:t>
+            </a:r>
+            <a:endParaRPr lang="en-US" sz="1250" dirty="0"/>
+          </a:p>
+        </p:txBody>
+      </p:sp>
+      <p:sp>
+        <p:nvSpPr>
+          <p:cNvPr id="10" name="Text 8"/>
+          <p:cNvSpPr/>
+          <p:nvPr/>
+        </p:nvSpPr>
+        <p:spPr>
+          <a:xfrm>
+            <a:off x="4069080" y="3291840"/>
+            <a:ext cx="274320" cy="457200"/>
+          </a:xfrm>
+          <a:prstGeom prst="rect">
+            <a:avLst/>
+          </a:prstGeom>
+          <a:noFill/>
+          <a:ln/>
+        </p:spPr>
+        <p:txBody>
+          <a:bodyPr wrap="square" lIns="0" tIns="0" rIns="0" bIns="0" rtlCol="0" anchor="ctr"/>
+          <a:lstStyle/>
+          <a:p>
+            <a:pPr algn="ctr" indent="0" marL="0">
+              <a:buNone/>
+            </a:pPr>
+            <a:r>
+              <a:rPr lang="en-US" sz="1600" dirty="0">
+                <a:solidFill>
+                  <a:srgbClr val="CADCFC"/>
+                </a:solidFill>
+                <a:latin typeface="Meiryo" pitchFamily="34" charset="0"/>
+                <a:ea typeface="Meiryo" pitchFamily="34" charset="-122"/>
+                <a:cs typeface="Meiryo" pitchFamily="34" charset="-120"/>
+              </a:rPr>
+              <a:t>▶</a:t>
+            </a:r>
+            <a:endParaRPr lang="en-US" sz="1600" dirty="0"/>
+          </a:p>
+        </p:txBody>
+      </p:sp>
+      <p:sp>
+        <p:nvSpPr>
+          <p:cNvPr id="11" name="Shape 9"/>
+          <p:cNvSpPr/>
+          <p:nvPr/>
+        </p:nvSpPr>
+        <p:spPr>
+          <a:xfrm>
+            <a:off x="4343400" y="1783080"/>
+            <a:ext cx="3429000" cy="3566160"/>
+          </a:xfrm>
+          <a:prstGeom prst="roundRect">
+            <a:avLst>
+              <a:gd name="adj" fmla="val 2667"/>
+            </a:avLst>
+          </a:prstGeom>
+          <a:solidFill>
+            <a:srgbClr val="F7F9FD"/>
+          </a:solidFill>
+          <a:ln w="12700">
+            <a:solidFill>
+              <a:srgbClr val="E4E9F2"/>
+            </a:solidFill>
+            <a:prstDash val="solid"/>
+          </a:ln>
+          <a:effectLst>
+            <a:outerShdw sx="100000" sy="100000" kx="0" ky="0" algn="bl" rotWithShape="0" blurRad="114300" dist="38100" dir="5400000">
+              <a:srgbClr val="8FA0C4">
+                <a:alpha val="30000"/>
+              </a:srgbClr>
+            </a:outerShdw>
+          </a:effectLst>
+        </p:spPr>
+      </p:sp>
+      <p:sp>
+        <p:nvSpPr>
+          <p:cNvPr id="12" name="Text 10"/>
+          <p:cNvSpPr/>
+          <p:nvPr/>
+        </p:nvSpPr>
+        <p:spPr>
+          <a:xfrm>
+            <a:off x="4617720" y="2011680"/>
+            <a:ext cx="2011680" cy="502920"/>
+          </a:xfrm>
+          <a:prstGeom prst="roundRect">
+            <a:avLst>
+              <a:gd name="adj" fmla="val 90909"/>
+            </a:avLst>
+          </a:prstGeom>
+          <a:solidFill>
+            <a:srgbClr val="E1A33A"/>
+          </a:solidFill>
+          <a:ln/>
+        </p:spPr>
+        <p:txBody>
+          <a:bodyPr wrap="square" lIns="0" tIns="0" rIns="0" bIns="0" rtlCol="0" anchor="ctr"/>
+          <a:lstStyle/>
+          <a:p>
+            <a:pPr algn="ctr" indent="0" marL="0">
+              <a:buNone/>
+            </a:pPr>
+            <a:r>
+              <a:rPr lang="en-US" sz="1300" b="1" dirty="0">
+                <a:solidFill>
+                  <a:srgbClr val="FFFFFF"/>
+                </a:solidFill>
+                <a:latin typeface="Meiryo" pitchFamily="34" charset="0"/>
+                <a:ea typeface="Meiryo" pitchFamily="34" charset="-122"/>
+                <a:cs typeface="Meiryo" pitchFamily="34" charset="-120"/>
+              </a:rPr>
+              <a:t>アンケート</a:t>
+            </a:r>
+            <a:endParaRPr lang="en-US" sz="1300" dirty="0"/>
+          </a:p>
+        </p:txBody>
+      </p:sp>
+      <p:sp>
+        <p:nvSpPr>
+          <p:cNvPr id="13" name="Text 11"/>
+          <p:cNvSpPr/>
+          <p:nvPr/>
+        </p:nvSpPr>
+        <p:spPr>
+          <a:xfrm>
+            <a:off x="4617720" y="2697480"/>
+            <a:ext cx="2880360" cy="365760"/>
+          </a:xfrm>
+          <a:prstGeom prst="rect">
+            <a:avLst/>
+          </a:prstGeom>
+          <a:noFill/>
+          <a:ln/>
+        </p:spPr>
+        <p:txBody>
+          <a:bodyPr wrap="square" lIns="0" tIns="0" rIns="0" bIns="0" rtlCol="0" anchor="ctr"/>
+          <a:lstStyle/>
+          <a:p>
+            <a:pPr indent="0" marL="0">
+              <a:buNone/>
+            </a:pPr>
+            <a:r>
+              <a:rPr lang="en-US" sz="1300" b="1" dirty="0">
+                <a:solidFill>
+                  <a:srgbClr val="6B7280"/>
+                </a:solidFill>
+                <a:latin typeface="Meiryo" pitchFamily="34" charset="0"/>
+                <a:ea typeface="Meiryo" pitchFamily="34" charset="-122"/>
+                <a:cs typeface="Meiryo" pitchFamily="34" charset="-120"/>
+              </a:rPr>
+              <a:t>1ヶ月後</a:t>
+            </a:r>
+            <a:endParaRPr lang="en-US" sz="1300" dirty="0"/>
+          </a:p>
+        </p:txBody>
+      </p:sp>
+      <p:sp>
+        <p:nvSpPr>
+          <p:cNvPr id="14" name="Text 12"/>
+          <p:cNvSpPr/>
+          <p:nvPr/>
+        </p:nvSpPr>
+        <p:spPr>
+          <a:xfrm>
+            <a:off x="4617720" y="3108960"/>
+            <a:ext cx="2880360" cy="640080"/>
+          </a:xfrm>
+          <a:prstGeom prst="rect">
+            <a:avLst/>
+          </a:prstGeom>
+          <a:noFill/>
+          <a:ln/>
+        </p:spPr>
+        <p:txBody>
+          <a:bodyPr wrap="square" lIns="0" tIns="0" rIns="0" bIns="0" rtlCol="0" anchor="t"/>
+          <a:lstStyle/>
+          <a:p>
+            <a:pPr indent="0" marL="0">
+              <a:buNone/>
+            </a:pPr>
+            <a:r>
+              <a:rPr lang="en-US" sz="1600" b="1" dirty="0">
+                <a:solidFill>
+                  <a:srgbClr val="141A33"/>
+                </a:solidFill>
+                <a:latin typeface="Meiryo" pitchFamily="34" charset="0"/>
+                <a:ea typeface="Meiryo" pitchFamily="34" charset="-122"/>
+                <a:cs typeface="Meiryo" pitchFamily="34" charset="-120"/>
+              </a:rPr>
+              <a:t>要望を集めて改善</a:t>
+            </a:r>
+            <a:endParaRPr lang="en-US" sz="1600" dirty="0"/>
+          </a:p>
+        </p:txBody>
+      </p:sp>
+      <p:sp>
+        <p:nvSpPr>
+          <p:cNvPr id="15" name="Text 13"/>
+          <p:cNvSpPr/>
+          <p:nvPr/>
+        </p:nvSpPr>
+        <p:spPr>
+          <a:xfrm>
+            <a:off x="4617720" y="3886200"/>
+            <a:ext cx="2880360" cy="1280160"/>
+          </a:xfrm>
+          <a:prstGeom prst="rect">
+            <a:avLst/>
+          </a:prstGeom>
+          <a:noFill/>
+          <a:ln/>
+        </p:spPr>
+        <p:txBody>
+          <a:bodyPr wrap="square" lIns="0" tIns="0" rIns="0" bIns="0" rtlCol="0" anchor="t"/>
+          <a:lstStyle/>
+          <a:p>
+            <a:pPr indent="0" marL="0">
+              <a:lnSpc>
+                <a:spcPct val="115000"/>
+              </a:lnSpc>
+              <a:buNone/>
+            </a:pPr>
+            <a:r>
+              <a:rPr lang="en-US" sz="1250" dirty="0">
+                <a:solidFill>
+                  <a:srgbClr val="6B7280"/>
+                </a:solidFill>
+                <a:latin typeface="Meiryo" pitchFamily="34" charset="0"/>
+                <a:ea typeface="Meiryo" pitchFamily="34" charset="-122"/>
+                <a:cs typeface="Meiryo" pitchFamily="34" charset="-120"/>
+              </a:rPr>
+              <a:t>現場の声を元にアップデート</a:t>
+            </a:r>
+            <a:endParaRPr lang="en-US" sz="1250" dirty="0"/>
+          </a:p>
+        </p:txBody>
+      </p:sp>
+      <p:sp>
+        <p:nvSpPr>
+          <p:cNvPr id="16" name="Text 14"/>
+          <p:cNvSpPr/>
+          <p:nvPr/>
+        </p:nvSpPr>
+        <p:spPr>
+          <a:xfrm>
+            <a:off x="7772400" y="3291840"/>
+            <a:ext cx="274320" cy="457200"/>
+          </a:xfrm>
+          <a:prstGeom prst="rect">
+            <a:avLst/>
+          </a:prstGeom>
+          <a:noFill/>
+          <a:ln/>
+        </p:spPr>
+        <p:txBody>
+          <a:bodyPr wrap="square" lIns="0" tIns="0" rIns="0" bIns="0" rtlCol="0" anchor="ctr"/>
+          <a:lstStyle/>
+          <a:p>
+            <a:pPr algn="ctr" indent="0" marL="0">
+              <a:buNone/>
+            </a:pPr>
+            <a:r>
+              <a:rPr lang="en-US" sz="1600" dirty="0">
+                <a:solidFill>
+                  <a:srgbClr val="CADCFC"/>
+                </a:solidFill>
+                <a:latin typeface="Meiryo" pitchFamily="34" charset="0"/>
+                <a:ea typeface="Meiryo" pitchFamily="34" charset="-122"/>
+                <a:cs typeface="Meiryo" pitchFamily="34" charset="-120"/>
+              </a:rPr>
+              <a:t>▶</a:t>
+            </a:r>
+            <a:endParaRPr lang="en-US" sz="1600" dirty="0"/>
+          </a:p>
+        </p:txBody>
+      </p:sp>
+      <p:sp>
+        <p:nvSpPr>
+          <p:cNvPr id="17" name="Shape 15"/>
+          <p:cNvSpPr/>
+          <p:nvPr/>
+        </p:nvSpPr>
+        <p:spPr>
+          <a:xfrm>
+            <a:off x="8046720" y="1783080"/>
+            <a:ext cx="3429000" cy="3566160"/>
+          </a:xfrm>
+          <a:prstGeom prst="roundRect">
+            <a:avLst>
+              <a:gd name="adj" fmla="val 2667"/>
+            </a:avLst>
+          </a:prstGeom>
+          <a:solidFill>
+            <a:srgbClr val="F7F9FD"/>
+          </a:solidFill>
+          <a:ln w="12700">
+            <a:solidFill>
+              <a:srgbClr val="E4E9F2"/>
+            </a:solidFill>
+            <a:prstDash val="solid"/>
+          </a:ln>
+          <a:effectLst>
+            <a:outerShdw sx="100000" sy="100000" kx="0" ky="0" algn="bl" rotWithShape="0" blurRad="114300" dist="38100" dir="5400000">
+              <a:srgbClr val="8FA0C4">
+                <a:alpha val="30000"/>
+              </a:srgbClr>
+            </a:outerShdw>
+          </a:effectLst>
+        </p:spPr>
+      </p:sp>
+      <p:sp>
+        <p:nvSpPr>
+          <p:cNvPr id="18" name="Text 16"/>
+          <p:cNvSpPr/>
+          <p:nvPr/>
+        </p:nvSpPr>
+        <p:spPr>
+          <a:xfrm>
+            <a:off x="8321040" y="2011680"/>
+            <a:ext cx="2011680" cy="502920"/>
+          </a:xfrm>
+          <a:prstGeom prst="roundRect">
+            <a:avLst>
+              <a:gd name="adj" fmla="val 90909"/>
+            </a:avLst>
+          </a:prstGeom>
+          <a:solidFill>
+            <a:srgbClr val="2E8B6F"/>
+          </a:solidFill>
+          <a:ln/>
+        </p:spPr>
+        <p:txBody>
+          <a:bodyPr wrap="square" lIns="0" tIns="0" rIns="0" bIns="0" rtlCol="0" anchor="ctr"/>
+          <a:lstStyle/>
+          <a:p>
+            <a:pPr algn="ctr" indent="0" marL="0">
+              <a:buNone/>
+            </a:pPr>
+            <a:r>
+              <a:rPr lang="en-US" sz="1300" b="1" dirty="0">
+                <a:solidFill>
+                  <a:srgbClr val="FFFFFF"/>
+                </a:solidFill>
+                <a:latin typeface="Meiryo" pitchFamily="34" charset="0"/>
+                <a:ea typeface="Meiryo" pitchFamily="34" charset="-122"/>
+                <a:cs typeface="Meiryo" pitchFamily="34" charset="-120"/>
+              </a:rPr>
+              <a:t>STEP 2</a:t>
+            </a:r>
+            <a:endParaRPr lang="en-US" sz="1300" dirty="0"/>
+          </a:p>
+        </p:txBody>
+      </p:sp>
+      <p:sp>
+        <p:nvSpPr>
+          <p:cNvPr id="19" name="Text 17"/>
+          <p:cNvSpPr/>
+          <p:nvPr/>
+        </p:nvSpPr>
+        <p:spPr>
+          <a:xfrm>
+            <a:off x="8321040" y="2697480"/>
+            <a:ext cx="2880360" cy="365760"/>
+          </a:xfrm>
+          <a:prstGeom prst="rect">
+            <a:avLst/>
+          </a:prstGeom>
+          <a:noFill/>
+          <a:ln/>
+        </p:spPr>
+        <p:txBody>
+          <a:bodyPr wrap="square" lIns="0" tIns="0" rIns="0" bIns="0" rtlCol="0" anchor="ctr"/>
+          <a:lstStyle/>
+          <a:p>
+            <a:pPr indent="0" marL="0">
+              <a:buNone/>
+            </a:pPr>
+            <a:r>
+              <a:rPr lang="en-US" sz="1300" b="1" dirty="0">
+                <a:solidFill>
+                  <a:srgbClr val="6B7280"/>
+                </a:solidFill>
+                <a:latin typeface="Meiryo" pitchFamily="34" charset="0"/>
+                <a:ea typeface="Meiryo" pitchFamily="34" charset="-122"/>
+                <a:cs typeface="Meiryo" pitchFamily="34" charset="-120"/>
+              </a:rPr>
+              <a:t>〜3ヶ月</a:t>
+            </a:r>
+            <a:endParaRPr lang="en-US" sz="1300" dirty="0"/>
+          </a:p>
+        </p:txBody>
+      </p:sp>
+      <p:sp>
+        <p:nvSpPr>
+          <p:cNvPr id="20" name="Text 18"/>
+          <p:cNvSpPr/>
+          <p:nvPr/>
+        </p:nvSpPr>
+        <p:spPr>
+          <a:xfrm>
+            <a:off x="8321040" y="3108960"/>
+            <a:ext cx="2880360" cy="640080"/>
+          </a:xfrm>
+          <a:prstGeom prst="rect">
+            <a:avLst/>
+          </a:prstGeom>
+          <a:noFill/>
+          <a:ln/>
+        </p:spPr>
+        <p:txBody>
+          <a:bodyPr wrap="square" lIns="0" tIns="0" rIns="0" bIns="0" rtlCol="0" anchor="t"/>
+          <a:lstStyle/>
+          <a:p>
+            <a:pPr indent="0" marL="0">
+              <a:buNone/>
+            </a:pPr>
+            <a:r>
+              <a:rPr lang="en-US" sz="1600" b="1" dirty="0">
+                <a:solidFill>
+                  <a:srgbClr val="141A33"/>
+                </a:solidFill>
+                <a:latin typeface="Meiryo" pitchFamily="34" charset="0"/>
+                <a:ea typeface="Meiryo" pitchFamily="34" charset="-122"/>
+                <a:cs typeface="Meiryo" pitchFamily="34" charset="-120"/>
+              </a:rPr>
+              <a:t>件数を増やしながら</a:t>
+            </a:r>
+            <a:endParaRPr lang="en-US" sz="1600" dirty="0"/>
+          </a:p>
+        </p:txBody>
+      </p:sp>
+      <p:sp>
+        <p:nvSpPr>
+          <p:cNvPr id="21" name="Text 19"/>
+          <p:cNvSpPr/>
+          <p:nvPr/>
+        </p:nvSpPr>
+        <p:spPr>
+          <a:xfrm>
+            <a:off x="8321040" y="3886200"/>
+            <a:ext cx="2880360" cy="1280160"/>
+          </a:xfrm>
+          <a:prstGeom prst="rect">
+            <a:avLst/>
+          </a:prstGeom>
+          <a:noFill/>
+          <a:ln/>
+        </p:spPr>
+        <p:txBody>
+          <a:bodyPr wrap="square" lIns="0" tIns="0" rIns="0" bIns="0" rtlCol="0" anchor="t"/>
+          <a:lstStyle/>
+          <a:p>
+            <a:pPr indent="0" marL="0">
+              <a:lnSpc>
+                <a:spcPct val="115000"/>
+              </a:lnSpc>
+              <a:buNone/>
+            </a:pPr>
+            <a:r>
+              <a:rPr lang="en-US" sz="1250" dirty="0">
+                <a:solidFill>
+                  <a:srgbClr val="6B7280"/>
+                </a:solidFill>
+                <a:latin typeface="Meiryo" pitchFamily="34" charset="0"/>
+                <a:ea typeface="Meiryo" pitchFamily="34" charset="-122"/>
+                <a:cs typeface="Meiryo" pitchFamily="34" charset="-120"/>
+              </a:rPr>
+              <a:t>アップデートを回し続ける</a:t>
+            </a:r>
+            <a:endParaRPr lang="en-US" sz="1250" dirty="0"/>
+          </a:p>
+        </p:txBody>
+      </p:sp>
+      <p:sp>
+        <p:nvSpPr>
+          <p:cNvPr id="22" name="Text 20"/>
+          <p:cNvSpPr/>
+          <p:nvPr/>
+        </p:nvSpPr>
+        <p:spPr>
+          <a:xfrm>
+            <a:off x="640080" y="5897880"/>
+            <a:ext cx="10972800" cy="365760"/>
+          </a:xfrm>
+          <a:prstGeom prst="rect">
+            <a:avLst/>
+          </a:prstGeom>
+          <a:noFill/>
+          <a:ln/>
+        </p:spPr>
+        <p:txBody>
+          <a:bodyPr wrap="square" lIns="0" tIns="0" rIns="0" bIns="0" rtlCol="0" anchor="ctr"/>
+          <a:lstStyle/>
+          <a:p>
+            <a:pPr indent="0" marL="0">
+              <a:buNone/>
+            </a:pPr>
+            <a:r>
+              <a:rPr lang="en-US" sz="1400" b="1" dirty="0">
+                <a:solidFill>
+                  <a:srgbClr val="1E2761"/>
+                </a:solidFill>
+                <a:latin typeface="Meiryo" pitchFamily="34" charset="0"/>
+                <a:ea typeface="Meiryo" pitchFamily="34" charset="-122"/>
+                <a:cs typeface="Meiryo" pitchFamily="34" charset="-120"/>
+              </a:rPr>
+              <a:t>完璧じゃなくていい。まず少数で慣れて、すぐ直す。それを繰り返します。</a:t>
+            </a:r>
+            <a:endParaRPr lang="en-US" sz="1400" dirty="0"/>
+          </a:p>
+        </p:txBody>
+      </p:sp>
+    </p:spTree>
+  </p:cSld>
+  <p:clrMapOvr>
+    <a:masterClrMapping/>
+  </p:clrMapOvr>
+</p:sld>
+</file>
+
+<file path=ppt/slides/slide24.xml><?xml version="1.0" encoding="utf-8"?>
+<p:sld xmlns:a="http://schemas.openxmlformats.org/drawingml/2006/main" xmlns:r="http://schemas.openxmlformats.org/officeDocument/2006/relationships" xmlns:p="http://schemas.openxmlformats.org/presentationml/2006/main">
+  <p:cSld name="Slide 24">
+    <p:bg>
+      <p:bgPr>
+        <a:solidFill>
+          <a:srgbClr val="FFFFFF"/>
+        </a:solidFill>
+      </p:bgPr>
+    </p:bg>
+    <p:spTree>
+      <p:nvGrpSpPr>
+        <p:cNvPr id="1" name=""/>
+        <p:cNvGrpSpPr/>
+        <p:nvPr/>
+      </p:nvGrpSpPr>
+      <p:grpSpPr>
+        <a:xfrm>
+          <a:off x="0" y="0"/>
+          <a:ext cx="0" cy="0"/>
+          <a:chOff x="0" y="0"/>
+          <a:chExt cx="0" cy="0"/>
+        </a:xfrm>
+      </p:grpSpPr>
+      <p:sp>
+        <p:nvSpPr>
+          <p:cNvPr id="2" name="Shape 0"/>
+          <p:cNvSpPr/>
+          <p:nvPr/>
+        </p:nvSpPr>
+        <p:spPr>
+          <a:xfrm>
+            <a:off x="640080" y="502920"/>
+            <a:ext cx="201168" cy="201168"/>
+          </a:xfrm>
+          <a:prstGeom prst="roundRect">
+            <a:avLst>
+              <a:gd name="adj" fmla="val 22727"/>
+            </a:avLst>
+          </a:prstGeom>
+          <a:solidFill>
+            <a:srgbClr val="E0A64B"/>
+          </a:solidFill>
+          <a:ln/>
+        </p:spPr>
+      </p:sp>
+      <p:sp>
+        <p:nvSpPr>
+          <p:cNvPr id="3" name="Text 1"/>
+          <p:cNvSpPr/>
+          <p:nvPr/>
+        </p:nvSpPr>
+        <p:spPr>
+          <a:xfrm>
+            <a:off x="978408" y="411480"/>
+            <a:ext cx="10058400" cy="329184"/>
+          </a:xfrm>
+          <a:prstGeom prst="rect">
+            <a:avLst/>
+          </a:prstGeom>
+          <a:noFill/>
+          <a:ln/>
+        </p:spPr>
+        <p:txBody>
+          <a:bodyPr wrap="square" lIns="0" tIns="0" rIns="0" bIns="0" rtlCol="0" anchor="ctr"/>
+          <a:lstStyle/>
+          <a:p>
+            <a:pPr indent="0" marL="0">
+              <a:buNone/>
+            </a:pPr>
+            <a:r>
+              <a:rPr lang="en-US" sz="1200" b="1" spc="250" kern="0" dirty="0">
+                <a:solidFill>
+                  <a:srgbClr val="4F46E5"/>
+                </a:solidFill>
+                <a:latin typeface="Meiryo" pitchFamily="34" charset="0"/>
+                <a:ea typeface="Meiryo" pitchFamily="34" charset="-122"/>
+                <a:cs typeface="Meiryo" pitchFamily="34" charset="-120"/>
+              </a:rPr>
+              <a:t>ROADMAP</a:t>
+            </a:r>
+            <a:endParaRPr lang="en-US" sz="1200" dirty="0"/>
+          </a:p>
+        </p:txBody>
+      </p:sp>
+      <p:sp>
+        <p:nvSpPr>
+          <p:cNvPr id="4" name="Text 2"/>
+          <p:cNvSpPr/>
+          <p:nvPr/>
+        </p:nvSpPr>
+        <p:spPr>
+          <a:xfrm>
+            <a:off x="640080" y="795528"/>
+            <a:ext cx="11247120" cy="713232"/>
+          </a:xfrm>
+          <a:prstGeom prst="rect">
+            <a:avLst/>
+          </a:prstGeom>
+          <a:noFill/>
+          <a:ln/>
+        </p:spPr>
+        <p:txBody>
+          <a:bodyPr wrap="square" lIns="0" tIns="0" rIns="0" bIns="0" rtlCol="0" anchor="ctr"/>
+          <a:lstStyle/>
+          <a:p>
+            <a:pPr indent="0" marL="0">
+              <a:buNone/>
+            </a:pPr>
+            <a:r>
+              <a:rPr lang="en-US" sz="3000" b="1" dirty="0">
+                <a:solidFill>
+                  <a:srgbClr val="141A33"/>
+                </a:solidFill>
+                <a:latin typeface="Meiryo" pitchFamily="34" charset="0"/>
+                <a:ea typeface="Meiryo" pitchFamily="34" charset="-122"/>
+                <a:cs typeface="Meiryo" pitchFamily="34" charset="-120"/>
+              </a:rPr>
+              <a:t>今後のアップデート予定</a:t>
+            </a:r>
+            <a:endParaRPr lang="en-US" sz="3000" dirty="0"/>
+          </a:p>
+        </p:txBody>
+      </p:sp>
+      <p:sp>
+        <p:nvSpPr>
+          <p:cNvPr id="5" name="Shape 3"/>
+          <p:cNvSpPr/>
+          <p:nvPr/>
+        </p:nvSpPr>
+        <p:spPr>
+          <a:xfrm>
+            <a:off x="640080" y="1965960"/>
+            <a:ext cx="3429000" cy="3017520"/>
+          </a:xfrm>
+          <a:prstGeom prst="roundRect">
+            <a:avLst>
+              <a:gd name="adj" fmla="val 3030"/>
+            </a:avLst>
+          </a:prstGeom>
+          <a:solidFill>
+            <a:srgbClr val="F7F9FD"/>
+          </a:solidFill>
+          <a:ln w="12700">
+            <a:solidFill>
+              <a:srgbClr val="E4E9F2"/>
+            </a:solidFill>
+            <a:prstDash val="solid"/>
+          </a:ln>
+          <a:effectLst>
+            <a:outerShdw sx="100000" sy="100000" kx="0" ky="0" algn="bl" rotWithShape="0" blurRad="114300" dist="38100" dir="5400000">
+              <a:srgbClr val="8FA0C4">
+                <a:alpha val="30000"/>
+              </a:srgbClr>
+            </a:outerShdw>
+          </a:effectLst>
+        </p:spPr>
+      </p:sp>
+      <p:sp>
+        <p:nvSpPr>
+          <p:cNvPr id="6" name="Text 4"/>
+          <p:cNvSpPr/>
+          <p:nvPr/>
+        </p:nvSpPr>
+        <p:spPr>
+          <a:xfrm>
+            <a:off x="2011680" y="2240280"/>
+            <a:ext cx="685800" cy="685800"/>
+          </a:xfrm>
+          <a:prstGeom prst="ellipse">
+            <a:avLst/>
+          </a:prstGeom>
+          <a:solidFill>
+            <a:srgbClr val="1E2761"/>
+          </a:solidFill>
+          <a:ln/>
+          <a:effectLst>
+            <a:outerShdw sx="100000" sy="100000" kx="0" ky="0" algn="bl" rotWithShape="0" blurRad="88900" dist="25400" dir="5400000">
+              <a:srgbClr val="8FA0C4">
+                <a:alpha val="28000"/>
+              </a:srgbClr>
+            </a:outerShdw>
+          </a:effectLst>
+        </p:spPr>
+        <p:txBody>
+          <a:bodyPr wrap="square" lIns="0" tIns="0" rIns="0" bIns="0" rtlCol="0" anchor="ctr"/>
+          <a:lstStyle/>
+          <a:p>
+            <a:pPr algn="ctr" indent="0" marL="0">
+              <a:buNone/>
+            </a:pPr>
+            <a:r>
+              <a:rPr lang="en-US" sz="1800" b="1" dirty="0">
+                <a:solidFill>
+                  <a:srgbClr val="FFFFFF"/>
+                </a:solidFill>
+                <a:latin typeface="Meiryo" pitchFamily="34" charset="0"/>
+                <a:ea typeface="Meiryo" pitchFamily="34" charset="-122"/>
+                <a:cs typeface="Meiryo" pitchFamily="34" charset="-120"/>
+              </a:rPr>
+              <a:t>1</a:t>
+            </a:r>
+            <a:endParaRPr lang="en-US" sz="1800" dirty="0"/>
+          </a:p>
+        </p:txBody>
+      </p:sp>
+      <p:sp>
+        <p:nvSpPr>
+          <p:cNvPr id="7" name="Text 5"/>
+          <p:cNvSpPr/>
+          <p:nvPr/>
+        </p:nvSpPr>
+        <p:spPr>
+          <a:xfrm>
+            <a:off x="822960" y="3108960"/>
+            <a:ext cx="3063240" cy="640080"/>
+          </a:xfrm>
+          <a:prstGeom prst="rect">
+            <a:avLst/>
+          </a:prstGeom>
+          <a:noFill/>
+          <a:ln/>
+        </p:spPr>
+        <p:txBody>
+          <a:bodyPr wrap="square" lIns="0" tIns="0" rIns="0" bIns="0" rtlCol="0" anchor="ctr"/>
+          <a:lstStyle/>
+          <a:p>
+            <a:pPr algn="ctr" indent="0" marL="0">
+              <a:buNone/>
+            </a:pPr>
+            <a:r>
+              <a:rPr lang="en-US" sz="1550" b="1" dirty="0">
+                <a:solidFill>
+                  <a:srgbClr val="141A33"/>
+                </a:solidFill>
+                <a:latin typeface="Meiryo" pitchFamily="34" charset="0"/>
+                <a:ea typeface="Meiryo" pitchFamily="34" charset="-122"/>
+                <a:cs typeface="Meiryo" pitchFamily="34" charset="-120"/>
+              </a:rPr>
+              <a:t>AI書類作成の拡大</a:t>
+            </a:r>
+            <a:endParaRPr lang="en-US" sz="1550" dirty="0"/>
+          </a:p>
+        </p:txBody>
+      </p:sp>
+      <p:sp>
+        <p:nvSpPr>
+          <p:cNvPr id="8" name="Text 6"/>
+          <p:cNvSpPr/>
+          <p:nvPr/>
+        </p:nvSpPr>
+        <p:spPr>
+          <a:xfrm>
+            <a:off x="914400" y="3794760"/>
+            <a:ext cx="2880360" cy="1005840"/>
+          </a:xfrm>
+          <a:prstGeom prst="rect">
+            <a:avLst/>
+          </a:prstGeom>
+          <a:noFill/>
+          <a:ln/>
+        </p:spPr>
+        <p:txBody>
+          <a:bodyPr wrap="square" lIns="0" tIns="0" rIns="0" bIns="0" rtlCol="0" anchor="t"/>
+          <a:lstStyle/>
+          <a:p>
+            <a:pPr algn="ctr" indent="0" marL="0">
+              <a:lnSpc>
+                <a:spcPct val="115000"/>
+              </a:lnSpc>
+              <a:buNone/>
+            </a:pPr>
+            <a:r>
+              <a:rPr lang="en-US" sz="1250" dirty="0">
+                <a:solidFill>
+                  <a:srgbClr val="6B7280"/>
+                </a:solidFill>
+                <a:latin typeface="Meiryo" pitchFamily="34" charset="0"/>
+                <a:ea typeface="Meiryo" pitchFamily="34" charset="-122"/>
+                <a:cs typeface="Meiryo" pitchFamily="34" charset="-120"/>
+              </a:rPr>
+              <a:t>対応する書類を増やし、作成の手間をさらに削減</a:t>
+            </a:r>
+            <a:endParaRPr lang="en-US" sz="1250" dirty="0"/>
+          </a:p>
+        </p:txBody>
+      </p:sp>
+      <p:sp>
+        <p:nvSpPr>
+          <p:cNvPr id="9" name="Shape 7"/>
+          <p:cNvSpPr/>
+          <p:nvPr/>
+        </p:nvSpPr>
+        <p:spPr>
+          <a:xfrm>
+            <a:off x="4343400" y="1965960"/>
+            <a:ext cx="3429000" cy="3017520"/>
+          </a:xfrm>
+          <a:prstGeom prst="roundRect">
+            <a:avLst>
+              <a:gd name="adj" fmla="val 3030"/>
+            </a:avLst>
+          </a:prstGeom>
+          <a:solidFill>
+            <a:srgbClr val="F7F9FD"/>
+          </a:solidFill>
+          <a:ln w="12700">
+            <a:solidFill>
+              <a:srgbClr val="E4E9F2"/>
+            </a:solidFill>
+            <a:prstDash val="solid"/>
+          </a:ln>
+          <a:effectLst>
+            <a:outerShdw sx="100000" sy="100000" kx="0" ky="0" algn="bl" rotWithShape="0" blurRad="114300" dist="38100" dir="5400000">
+              <a:srgbClr val="8FA0C4">
+                <a:alpha val="30000"/>
+              </a:srgbClr>
+            </a:outerShdw>
+          </a:effectLst>
+        </p:spPr>
+      </p:sp>
+      <p:sp>
+        <p:nvSpPr>
+          <p:cNvPr id="10" name="Text 8"/>
+          <p:cNvSpPr/>
+          <p:nvPr/>
+        </p:nvSpPr>
+        <p:spPr>
+          <a:xfrm>
+            <a:off x="5715000" y="2240280"/>
+            <a:ext cx="685800" cy="685800"/>
+          </a:xfrm>
+          <a:prstGeom prst="ellipse">
+            <a:avLst/>
+          </a:prstGeom>
+          <a:solidFill>
+            <a:srgbClr val="1E2761"/>
+          </a:solidFill>
+          <a:ln/>
+          <a:effectLst>
+            <a:outerShdw sx="100000" sy="100000" kx="0" ky="0" algn="bl" rotWithShape="0" blurRad="88900" dist="25400" dir="5400000">
+              <a:srgbClr val="8FA0C4">
+                <a:alpha val="28000"/>
+              </a:srgbClr>
+            </a:outerShdw>
+          </a:effectLst>
+        </p:spPr>
+        <p:txBody>
+          <a:bodyPr wrap="square" lIns="0" tIns="0" rIns="0" bIns="0" rtlCol="0" anchor="ctr"/>
+          <a:lstStyle/>
+          <a:p>
+            <a:pPr algn="ctr" indent="0" marL="0">
+              <a:buNone/>
+            </a:pPr>
+            <a:r>
+              <a:rPr lang="en-US" sz="1800" b="1" dirty="0">
+                <a:solidFill>
+                  <a:srgbClr val="FFFFFF"/>
+                </a:solidFill>
+                <a:latin typeface="Meiryo" pitchFamily="34" charset="0"/>
+                <a:ea typeface="Meiryo" pitchFamily="34" charset="-122"/>
+                <a:cs typeface="Meiryo" pitchFamily="34" charset="-120"/>
+              </a:rPr>
+              <a:t>2</a:t>
+            </a:r>
+            <a:endParaRPr lang="en-US" sz="1800" dirty="0"/>
+          </a:p>
+        </p:txBody>
+      </p:sp>
+      <p:sp>
+        <p:nvSpPr>
+          <p:cNvPr id="11" name="Text 9"/>
+          <p:cNvSpPr/>
+          <p:nvPr/>
+        </p:nvSpPr>
+        <p:spPr>
+          <a:xfrm>
+            <a:off x="4526280" y="3108960"/>
+            <a:ext cx="3063240" cy="640080"/>
+          </a:xfrm>
+          <a:prstGeom prst="rect">
+            <a:avLst/>
+          </a:prstGeom>
+          <a:noFill/>
+          <a:ln/>
+        </p:spPr>
+        <p:txBody>
+          <a:bodyPr wrap="square" lIns="0" tIns="0" rIns="0" bIns="0" rtlCol="0" anchor="ctr"/>
+          <a:lstStyle/>
+          <a:p>
+            <a:pPr algn="ctr" indent="0" marL="0">
+              <a:buNone/>
+            </a:pPr>
+            <a:r>
+              <a:rPr lang="en-US" sz="1550" b="1" dirty="0">
+                <a:solidFill>
+                  <a:srgbClr val="141A33"/>
+                </a:solidFill>
+                <a:latin typeface="Meiryo" pitchFamily="34" charset="0"/>
+                <a:ea typeface="Meiryo" pitchFamily="34" charset="-122"/>
+                <a:cs typeface="Meiryo" pitchFamily="34" charset="-120"/>
+              </a:rPr>
+              <a:t>AIナビ（業務相談）</a:t>
+            </a:r>
+            <a:endParaRPr lang="en-US" sz="1550" dirty="0"/>
+          </a:p>
+        </p:txBody>
+      </p:sp>
+      <p:sp>
+        <p:nvSpPr>
+          <p:cNvPr id="12" name="Text 10"/>
+          <p:cNvSpPr/>
+          <p:nvPr/>
+        </p:nvSpPr>
+        <p:spPr>
+          <a:xfrm>
+            <a:off x="4617720" y="3794760"/>
+            <a:ext cx="2880360" cy="1005840"/>
+          </a:xfrm>
+          <a:prstGeom prst="rect">
+            <a:avLst/>
+          </a:prstGeom>
+          <a:noFill/>
+          <a:ln/>
+        </p:spPr>
+        <p:txBody>
+          <a:bodyPr wrap="square" lIns="0" tIns="0" rIns="0" bIns="0" rtlCol="0" anchor="t"/>
+          <a:lstStyle/>
+          <a:p>
+            <a:pPr algn="ctr" indent="0" marL="0">
+              <a:lnSpc>
+                <a:spcPct val="115000"/>
+              </a:lnSpc>
+              <a:buNone/>
+            </a:pPr>
+            <a:r>
+              <a:rPr lang="en-US" sz="1250" dirty="0">
+                <a:solidFill>
+                  <a:srgbClr val="6B7280"/>
+                </a:solidFill>
+                <a:latin typeface="Meiryo" pitchFamily="34" charset="0"/>
+                <a:ea typeface="Meiryo" pitchFamily="34" charset="-122"/>
+                <a:cs typeface="Meiryo" pitchFamily="34" charset="-120"/>
+              </a:rPr>
+              <a:t>「この案件どう進める？」をその場で相談できる</a:t>
+            </a:r>
+            <a:endParaRPr lang="en-US" sz="1250" dirty="0"/>
+          </a:p>
+        </p:txBody>
+      </p:sp>
+      <p:sp>
+        <p:nvSpPr>
+          <p:cNvPr id="13" name="Shape 11"/>
+          <p:cNvSpPr/>
+          <p:nvPr/>
+        </p:nvSpPr>
+        <p:spPr>
+          <a:xfrm>
+            <a:off x="8046720" y="1965960"/>
+            <a:ext cx="3429000" cy="3017520"/>
+          </a:xfrm>
+          <a:prstGeom prst="roundRect">
+            <a:avLst>
+              <a:gd name="adj" fmla="val 3030"/>
+            </a:avLst>
+          </a:prstGeom>
+          <a:solidFill>
+            <a:srgbClr val="F7F9FD"/>
+          </a:solidFill>
+          <a:ln w="12700">
+            <a:solidFill>
+              <a:srgbClr val="E4E9F2"/>
+            </a:solidFill>
+            <a:prstDash val="solid"/>
+          </a:ln>
+          <a:effectLst>
+            <a:outerShdw sx="100000" sy="100000" kx="0" ky="0" algn="bl" rotWithShape="0" blurRad="114300" dist="38100" dir="5400000">
+              <a:srgbClr val="8FA0C4">
+                <a:alpha val="30000"/>
+              </a:srgbClr>
+            </a:outerShdw>
+          </a:effectLst>
+        </p:spPr>
+      </p:sp>
+      <p:sp>
+        <p:nvSpPr>
+          <p:cNvPr id="14" name="Text 12"/>
+          <p:cNvSpPr/>
+          <p:nvPr/>
+        </p:nvSpPr>
+        <p:spPr>
+          <a:xfrm>
+            <a:off x="9418320" y="2240280"/>
+            <a:ext cx="685800" cy="685800"/>
+          </a:xfrm>
+          <a:prstGeom prst="ellipse">
+            <a:avLst/>
+          </a:prstGeom>
+          <a:solidFill>
+            <a:srgbClr val="1E2761"/>
+          </a:solidFill>
+          <a:ln/>
+          <a:effectLst>
+            <a:outerShdw sx="100000" sy="100000" kx="0" ky="0" algn="bl" rotWithShape="0" blurRad="88900" dist="25400" dir="5400000">
+              <a:srgbClr val="8FA0C4">
+                <a:alpha val="28000"/>
+              </a:srgbClr>
+            </a:outerShdw>
+          </a:effectLst>
+        </p:spPr>
+        <p:txBody>
+          <a:bodyPr wrap="square" lIns="0" tIns="0" rIns="0" bIns="0" rtlCol="0" anchor="ctr"/>
+          <a:lstStyle/>
+          <a:p>
+            <a:pPr algn="ctr" indent="0" marL="0">
+              <a:buNone/>
+            </a:pPr>
+            <a:r>
+              <a:rPr lang="en-US" sz="1800" b="1" dirty="0">
+                <a:solidFill>
+                  <a:srgbClr val="FFFFFF"/>
+                </a:solidFill>
+                <a:latin typeface="Meiryo" pitchFamily="34" charset="0"/>
+                <a:ea typeface="Meiryo" pitchFamily="34" charset="-122"/>
+                <a:cs typeface="Meiryo" pitchFamily="34" charset="-120"/>
+              </a:rPr>
+              <a:t>3</a:t>
+            </a:r>
+            <a:endParaRPr lang="en-US" sz="1800" dirty="0"/>
+          </a:p>
+        </p:txBody>
+      </p:sp>
+      <p:sp>
+        <p:nvSpPr>
+          <p:cNvPr id="15" name="Text 13"/>
+          <p:cNvSpPr/>
+          <p:nvPr/>
+        </p:nvSpPr>
+        <p:spPr>
+          <a:xfrm>
+            <a:off x="8229600" y="3108960"/>
+            <a:ext cx="3063240" cy="640080"/>
+          </a:xfrm>
+          <a:prstGeom prst="rect">
+            <a:avLst/>
+          </a:prstGeom>
+          <a:noFill/>
+          <a:ln/>
+        </p:spPr>
+        <p:txBody>
+          <a:bodyPr wrap="square" lIns="0" tIns="0" rIns="0" bIns="0" rtlCol="0" anchor="ctr"/>
+          <a:lstStyle/>
+          <a:p>
+            <a:pPr algn="ctr" indent="0" marL="0">
+              <a:buNone/>
+            </a:pPr>
+            <a:r>
+              <a:rPr lang="en-US" sz="1550" b="1" dirty="0">
+                <a:solidFill>
+                  <a:srgbClr val="141A33"/>
+                </a:solidFill>
+                <a:latin typeface="Meiryo" pitchFamily="34" charset="0"/>
+                <a:ea typeface="Meiryo" pitchFamily="34" charset="-122"/>
+                <a:cs typeface="Meiryo" pitchFamily="34" charset="-120"/>
+              </a:rPr>
+              <a:t>現場の要望で改善</a:t>
+            </a:r>
+            <a:endParaRPr lang="en-US" sz="1550" dirty="0"/>
+          </a:p>
+        </p:txBody>
+      </p:sp>
+      <p:sp>
+        <p:nvSpPr>
+          <p:cNvPr id="16" name="Text 14"/>
+          <p:cNvSpPr/>
+          <p:nvPr/>
+        </p:nvSpPr>
+        <p:spPr>
+          <a:xfrm>
+            <a:off x="8321040" y="3794760"/>
+            <a:ext cx="2880360" cy="1005840"/>
+          </a:xfrm>
+          <a:prstGeom prst="rect">
+            <a:avLst/>
+          </a:prstGeom>
+          <a:noFill/>
+          <a:ln/>
+        </p:spPr>
+        <p:txBody>
+          <a:bodyPr wrap="square" lIns="0" tIns="0" rIns="0" bIns="0" rtlCol="0" anchor="t"/>
+          <a:lstStyle/>
+          <a:p>
+            <a:pPr algn="ctr" indent="0" marL="0">
+              <a:lnSpc>
+                <a:spcPct val="115000"/>
+              </a:lnSpc>
+              <a:buNone/>
+            </a:pPr>
+            <a:r>
+              <a:rPr lang="en-US" sz="1250" dirty="0">
+                <a:solidFill>
+                  <a:srgbClr val="6B7280"/>
+                </a:solidFill>
+                <a:latin typeface="Meiryo" pitchFamily="34" charset="0"/>
+                <a:ea typeface="Meiryo" pitchFamily="34" charset="-122"/>
+                <a:cs typeface="Meiryo" pitchFamily="34" charset="-120"/>
+              </a:rPr>
+              <a:t>アンケート・フィードバックを継続反映</a:t>
+            </a:r>
+            <a:endParaRPr lang="en-US" sz="1250" dirty="0"/>
+          </a:p>
+        </p:txBody>
+      </p:sp>
+      <p:sp>
+        <p:nvSpPr>
+          <p:cNvPr id="17" name="Text 15"/>
+          <p:cNvSpPr/>
+          <p:nvPr/>
+        </p:nvSpPr>
+        <p:spPr>
+          <a:xfrm>
+            <a:off x="640080" y="5532120"/>
+            <a:ext cx="10972800" cy="365760"/>
+          </a:xfrm>
+          <a:prstGeom prst="rect">
+            <a:avLst/>
+          </a:prstGeom>
+          <a:noFill/>
+          <a:ln/>
+        </p:spPr>
+        <p:txBody>
+          <a:bodyPr wrap="square" lIns="0" tIns="0" rIns="0" bIns="0" rtlCol="0" anchor="ctr"/>
+          <a:lstStyle/>
+          <a:p>
+            <a:pPr algn="ctr" indent="0" marL="0">
+              <a:buNone/>
+            </a:pPr>
+            <a:r>
+              <a:rPr lang="en-US" sz="1500" b="1" dirty="0">
+                <a:solidFill>
+                  <a:srgbClr val="1E2761"/>
+                </a:solidFill>
+                <a:latin typeface="Meiryo" pitchFamily="34" charset="0"/>
+                <a:ea typeface="Meiryo" pitchFamily="34" charset="-122"/>
+                <a:cs typeface="Meiryo" pitchFamily="34" charset="-120"/>
+              </a:rPr>
+              <a:t>使いながら、どんどん便利にしていきます。</a:t>
+            </a:r>
+            <a:endParaRPr lang="en-US" sz="1500" dirty="0"/>
+          </a:p>
+        </p:txBody>
+      </p:sp>
+    </p:spTree>
+  </p:cSld>
+  <p:clrMapOvr>
+    <a:masterClrMapping/>
+  </p:clrMapOvr>
+</p:sld>
+</file>
+
+<file path=ppt/slides/slide25.xml><?xml version="1.0" encoding="utf-8"?>
+<p:sld xmlns:a="http://schemas.openxmlformats.org/drawingml/2006/main" xmlns:r="http://schemas.openxmlformats.org/officeDocument/2006/relationships" xmlns:p="http://schemas.openxmlformats.org/presentationml/2006/main">
+  <p:cSld name="Slide 25">
+    <p:bg>
+      <p:bgPr>
+        <a:solidFill>
+          <a:srgbClr val="FFFFFF"/>
+        </a:solidFill>
+      </p:bgPr>
+    </p:bg>
+    <p:spTree>
+      <p:nvGrpSpPr>
+        <p:cNvPr id="1" name=""/>
+        <p:cNvGrpSpPr/>
+        <p:nvPr/>
+      </p:nvGrpSpPr>
+      <p:grpSpPr>
+        <a:xfrm>
+          <a:off x="0" y="0"/>
+          <a:ext cx="0" cy="0"/>
+          <a:chOff x="0" y="0"/>
+          <a:chExt cx="0" cy="0"/>
+        </a:xfrm>
+      </p:grpSpPr>
+      <p:sp>
+        <p:nvSpPr>
+          <p:cNvPr id="2" name="Shape 0"/>
+          <p:cNvSpPr/>
+          <p:nvPr/>
+        </p:nvSpPr>
+        <p:spPr>
+          <a:xfrm>
+            <a:off x="640080" y="502920"/>
+            <a:ext cx="201168" cy="201168"/>
+          </a:xfrm>
+          <a:prstGeom prst="roundRect">
+            <a:avLst>
+              <a:gd name="adj" fmla="val 22727"/>
+            </a:avLst>
+          </a:prstGeom>
+          <a:solidFill>
+            <a:srgbClr val="E0A64B"/>
+          </a:solidFill>
+          <a:ln/>
+        </p:spPr>
+      </p:sp>
+      <p:sp>
+        <p:nvSpPr>
+          <p:cNvPr id="3" name="Text 1"/>
+          <p:cNvSpPr/>
+          <p:nvPr/>
+        </p:nvSpPr>
+        <p:spPr>
+          <a:xfrm>
+            <a:off x="978408" y="411480"/>
+            <a:ext cx="10058400" cy="329184"/>
+          </a:xfrm>
+          <a:prstGeom prst="rect">
+            <a:avLst/>
+          </a:prstGeom>
+          <a:noFill/>
+          <a:ln/>
+        </p:spPr>
+        <p:txBody>
+          <a:bodyPr wrap="square" lIns="0" tIns="0" rIns="0" bIns="0" rtlCol="0" anchor="ctr"/>
+          <a:lstStyle/>
+          <a:p>
+            <a:pPr indent="0" marL="0">
+              <a:buNone/>
+            </a:pPr>
+            <a:r>
+              <a:rPr lang="en-US" sz="1200" b="1" spc="250" kern="0" dirty="0">
+                <a:solidFill>
+                  <a:srgbClr val="4F46E5"/>
+                </a:solidFill>
+                <a:latin typeface="Meiryo" pitchFamily="34" charset="0"/>
+                <a:ea typeface="Meiryo" pitchFamily="34" charset="-122"/>
+                <a:cs typeface="Meiryo" pitchFamily="34" charset="-120"/>
+              </a:rPr>
+              <a:t>SUPPORT</a:t>
+            </a:r>
+            <a:endParaRPr lang="en-US" sz="1200" dirty="0"/>
+          </a:p>
+        </p:txBody>
+      </p:sp>
+      <p:sp>
+        <p:nvSpPr>
+          <p:cNvPr id="4" name="Text 2"/>
+          <p:cNvSpPr/>
+          <p:nvPr/>
+        </p:nvSpPr>
+        <p:spPr>
+          <a:xfrm>
+            <a:off x="640080" y="795528"/>
+            <a:ext cx="11247120" cy="713232"/>
+          </a:xfrm>
+          <a:prstGeom prst="rect">
+            <a:avLst/>
+          </a:prstGeom>
+          <a:noFill/>
+          <a:ln/>
+        </p:spPr>
+        <p:txBody>
+          <a:bodyPr wrap="square" lIns="0" tIns="0" rIns="0" bIns="0" rtlCol="0" anchor="ctr"/>
+          <a:lstStyle/>
+          <a:p>
+            <a:pPr indent="0" marL="0">
+              <a:buNone/>
+            </a:pPr>
+            <a:r>
+              <a:rPr lang="en-US" sz="3000" b="1" dirty="0">
+                <a:solidFill>
+                  <a:srgbClr val="141A33"/>
+                </a:solidFill>
+                <a:latin typeface="Meiryo" pitchFamily="34" charset="0"/>
+                <a:ea typeface="Meiryo" pitchFamily="34" charset="-122"/>
+                <a:cs typeface="Meiryo" pitchFamily="34" charset="-120"/>
+              </a:rPr>
+              <a:t>困ったとき・お願い</a:t>
+            </a:r>
+            <a:endParaRPr lang="en-US" sz="3000" dirty="0"/>
+          </a:p>
+        </p:txBody>
+      </p:sp>
+      <p:sp>
+        <p:nvSpPr>
+          <p:cNvPr id="5" name="Shape 3"/>
+          <p:cNvSpPr/>
+          <p:nvPr/>
+        </p:nvSpPr>
+        <p:spPr>
+          <a:xfrm>
+            <a:off x="640080" y="1783080"/>
+            <a:ext cx="10881360" cy="1005840"/>
+          </a:xfrm>
+          <a:prstGeom prst="roundRect">
+            <a:avLst>
+              <a:gd name="adj" fmla="val 9091"/>
+            </a:avLst>
+          </a:prstGeom>
+          <a:solidFill>
+            <a:srgbClr val="F7F9FD"/>
+          </a:solidFill>
+          <a:ln w="12700">
+            <a:solidFill>
+              <a:srgbClr val="E4E9F2"/>
+            </a:solidFill>
+            <a:prstDash val="solid"/>
+          </a:ln>
+          <a:effectLst>
+            <a:outerShdw sx="100000" sy="100000" kx="0" ky="0" algn="bl" rotWithShape="0" blurRad="114300" dist="38100" dir="5400000">
+              <a:srgbClr val="8FA0C4">
+                <a:alpha val="30000"/>
+              </a:srgbClr>
+            </a:outerShdw>
+          </a:effectLst>
+        </p:spPr>
+      </p:sp>
+      <p:sp>
+        <p:nvSpPr>
+          <p:cNvPr id="6" name="Text 4"/>
+          <p:cNvSpPr/>
+          <p:nvPr/>
+        </p:nvSpPr>
+        <p:spPr>
+          <a:xfrm>
+            <a:off x="960120" y="2039112"/>
+            <a:ext cx="502920" cy="502920"/>
+          </a:xfrm>
+          <a:prstGeom prst="ellipse">
+            <a:avLst/>
+          </a:prstGeom>
+          <a:solidFill>
+            <a:srgbClr val="1E2761"/>
+          </a:solidFill>
+          <a:ln/>
+          <a:effectLst>
+            <a:outerShdw sx="100000" sy="100000" kx="0" ky="0" algn="bl" rotWithShape="0" blurRad="88900" dist="25400" dir="5400000">
+              <a:srgbClr val="8FA0C4">
+                <a:alpha val="28000"/>
+              </a:srgbClr>
+            </a:outerShdw>
+          </a:effectLst>
+        </p:spPr>
+        <p:txBody>
+          <a:bodyPr wrap="square" lIns="0" tIns="0" rIns="0" bIns="0" rtlCol="0" anchor="ctr"/>
+          <a:lstStyle/>
+          <a:p>
+            <a:pPr algn="ctr" indent="0" marL="0">
+              <a:buNone/>
+            </a:pPr>
+            <a:r>
+              <a:rPr lang="en-US" sz="1300" b="1" dirty="0">
+                <a:solidFill>
+                  <a:srgbClr val="FFFFFF"/>
+                </a:solidFill>
+                <a:latin typeface="Meiryo" pitchFamily="34" charset="0"/>
+                <a:ea typeface="Meiryo" pitchFamily="34" charset="-122"/>
+                <a:cs typeface="Meiryo" pitchFamily="34" charset="-120"/>
+              </a:rPr>
+              <a:t>1</a:t>
+            </a:r>
+            <a:endParaRPr lang="en-US" sz="1300" dirty="0"/>
+          </a:p>
+        </p:txBody>
+      </p:sp>
+      <p:sp>
+        <p:nvSpPr>
+          <p:cNvPr id="7" name="Text 5"/>
+          <p:cNvSpPr/>
+          <p:nvPr/>
+        </p:nvSpPr>
+        <p:spPr>
+          <a:xfrm>
+            <a:off x="1691640" y="1783080"/>
+            <a:ext cx="3566160" cy="1005840"/>
+          </a:xfrm>
+          <a:prstGeom prst="rect">
+            <a:avLst/>
+          </a:prstGeom>
+          <a:noFill/>
+          <a:ln/>
+        </p:spPr>
+        <p:txBody>
+          <a:bodyPr wrap="square" lIns="0" tIns="0" rIns="0" bIns="0" rtlCol="0" anchor="ctr"/>
+          <a:lstStyle/>
+          <a:p>
+            <a:pPr indent="0" marL="0">
+              <a:buNone/>
+            </a:pPr>
+            <a:r>
+              <a:rPr lang="en-US" sz="1550" b="1" dirty="0">
+                <a:solidFill>
+                  <a:srgbClr val="141A33"/>
+                </a:solidFill>
+                <a:latin typeface="Meiryo" pitchFamily="34" charset="0"/>
+                <a:ea typeface="Meiryo" pitchFamily="34" charset="-122"/>
+                <a:cs typeface="Meiryo" pitchFamily="34" charset="-120"/>
+              </a:rPr>
+              <a:t>面談は"その場で"入力</a:t>
+            </a:r>
+            <a:endParaRPr lang="en-US" sz="1550" dirty="0"/>
+          </a:p>
+        </p:txBody>
+      </p:sp>
+      <p:sp>
+        <p:nvSpPr>
+          <p:cNvPr id="8" name="Text 6"/>
+          <p:cNvSpPr/>
+          <p:nvPr/>
+        </p:nvSpPr>
+        <p:spPr>
+          <a:xfrm>
+            <a:off x="5394960" y="1783080"/>
+            <a:ext cx="5852160" cy="1005840"/>
+          </a:xfrm>
+          <a:prstGeom prst="rect">
+            <a:avLst/>
+          </a:prstGeom>
+          <a:noFill/>
+          <a:ln/>
+        </p:spPr>
+        <p:txBody>
+          <a:bodyPr wrap="square" lIns="0" tIns="0" rIns="0" bIns="0" rtlCol="0" anchor="ctr"/>
+          <a:lstStyle/>
+          <a:p>
+            <a:pPr indent="0" marL="0">
+              <a:buNone/>
+            </a:pPr>
+            <a:r>
+              <a:rPr lang="en-US" sz="1350" dirty="0">
+                <a:solidFill>
+                  <a:srgbClr val="6B7280"/>
+                </a:solidFill>
+                <a:latin typeface="Meiryo" pitchFamily="34" charset="0"/>
+                <a:ea typeface="Meiryo" pitchFamily="34" charset="-122"/>
+                <a:cs typeface="Meiryo" pitchFamily="34" charset="-120"/>
+              </a:rPr>
+              <a:t>紙をやめ、面談直後に。後工程が自動で組み上がる</a:t>
+            </a:r>
+            <a:endParaRPr lang="en-US" sz="1350" dirty="0"/>
+          </a:p>
+        </p:txBody>
+      </p:sp>
+      <p:sp>
+        <p:nvSpPr>
+          <p:cNvPr id="9" name="Shape 7"/>
+          <p:cNvSpPr/>
+          <p:nvPr/>
+        </p:nvSpPr>
+        <p:spPr>
+          <a:xfrm>
+            <a:off x="640080" y="2971800"/>
+            <a:ext cx="10881360" cy="1005840"/>
+          </a:xfrm>
+          <a:prstGeom prst="roundRect">
+            <a:avLst>
+              <a:gd name="adj" fmla="val 9091"/>
+            </a:avLst>
+          </a:prstGeom>
+          <a:solidFill>
+            <a:srgbClr val="F7F9FD"/>
+          </a:solidFill>
+          <a:ln w="12700">
+            <a:solidFill>
+              <a:srgbClr val="E4E9F2"/>
+            </a:solidFill>
+            <a:prstDash val="solid"/>
+          </a:ln>
+          <a:effectLst>
+            <a:outerShdw sx="100000" sy="100000" kx="0" ky="0" algn="bl" rotWithShape="0" blurRad="114300" dist="38100" dir="5400000">
+              <a:srgbClr val="8FA0C4">
+                <a:alpha val="30000"/>
+              </a:srgbClr>
+            </a:outerShdw>
+          </a:effectLst>
+        </p:spPr>
+      </p:sp>
+      <p:sp>
+        <p:nvSpPr>
+          <p:cNvPr id="10" name="Text 8"/>
+          <p:cNvSpPr/>
+          <p:nvPr/>
+        </p:nvSpPr>
+        <p:spPr>
+          <a:xfrm>
+            <a:off x="960120" y="3227832"/>
+            <a:ext cx="502920" cy="502920"/>
+          </a:xfrm>
+          <a:prstGeom prst="ellipse">
+            <a:avLst/>
+          </a:prstGeom>
+          <a:solidFill>
+            <a:srgbClr val="1E2761"/>
+          </a:solidFill>
+          <a:ln/>
+          <a:effectLst>
+            <a:outerShdw sx="100000" sy="100000" kx="0" ky="0" algn="bl" rotWithShape="0" blurRad="88900" dist="25400" dir="5400000">
+              <a:srgbClr val="8FA0C4">
+                <a:alpha val="28000"/>
+              </a:srgbClr>
+            </a:outerShdw>
+          </a:effectLst>
+        </p:spPr>
+        <p:txBody>
+          <a:bodyPr wrap="square" lIns="0" tIns="0" rIns="0" bIns="0" rtlCol="0" anchor="ctr"/>
+          <a:lstStyle/>
+          <a:p>
+            <a:pPr algn="ctr" indent="0" marL="0">
+              <a:buNone/>
+            </a:pPr>
+            <a:r>
+              <a:rPr lang="en-US" sz="1300" b="1" dirty="0">
+                <a:solidFill>
+                  <a:srgbClr val="FFFFFF"/>
+                </a:solidFill>
+                <a:latin typeface="Meiryo" pitchFamily="34" charset="0"/>
+                <a:ea typeface="Meiryo" pitchFamily="34" charset="-122"/>
+                <a:cs typeface="Meiryo" pitchFamily="34" charset="-120"/>
+              </a:rPr>
+              <a:t>2</a:t>
+            </a:r>
+            <a:endParaRPr lang="en-US" sz="1300" dirty="0"/>
+          </a:p>
+        </p:txBody>
+      </p:sp>
+      <p:sp>
+        <p:nvSpPr>
+          <p:cNvPr id="11" name="Text 9"/>
+          <p:cNvSpPr/>
+          <p:nvPr/>
+        </p:nvSpPr>
+        <p:spPr>
+          <a:xfrm>
+            <a:off x="1691640" y="2971800"/>
+            <a:ext cx="3566160" cy="1005840"/>
+          </a:xfrm>
+          <a:prstGeom prst="rect">
+            <a:avLst/>
+          </a:prstGeom>
+          <a:noFill/>
+          <a:ln/>
+        </p:spPr>
+        <p:txBody>
+          <a:bodyPr wrap="square" lIns="0" tIns="0" rIns="0" bIns="0" rtlCol="0" anchor="ctr"/>
+          <a:lstStyle/>
+          <a:p>
+            <a:pPr indent="0" marL="0">
+              <a:buNone/>
+            </a:pPr>
+            <a:r>
+              <a:rPr lang="en-US" sz="1550" b="1" dirty="0">
+                <a:solidFill>
+                  <a:srgbClr val="141A33"/>
+                </a:solidFill>
+                <a:latin typeface="Meiryo" pitchFamily="34" charset="0"/>
+                <a:ea typeface="Meiryo" pitchFamily="34" charset="-122"/>
+                <a:cs typeface="Meiryo" pitchFamily="34" charset="-120"/>
+              </a:rPr>
+              <a:t>迷ったら / 要望</a:t>
+            </a:r>
+            <a:endParaRPr lang="en-US" sz="1550" dirty="0"/>
+          </a:p>
+        </p:txBody>
+      </p:sp>
+      <p:sp>
+        <p:nvSpPr>
+          <p:cNvPr id="12" name="Text 10"/>
+          <p:cNvSpPr/>
+          <p:nvPr/>
+        </p:nvSpPr>
+        <p:spPr>
+          <a:xfrm>
+            <a:off x="5394960" y="2971800"/>
+            <a:ext cx="5852160" cy="1005840"/>
+          </a:xfrm>
+          <a:prstGeom prst="rect">
+            <a:avLst/>
+          </a:prstGeom>
+          <a:noFill/>
+          <a:ln/>
+        </p:spPr>
+        <p:txBody>
+          <a:bodyPr wrap="square" lIns="0" tIns="0" rIns="0" bIns="0" rtlCol="0" anchor="ctr"/>
+          <a:lstStyle/>
+          <a:p>
+            <a:pPr indent="0" marL="0">
+              <a:buNone/>
+            </a:pPr>
+            <a:r>
+              <a:rPr lang="en-US" sz="1350" dirty="0">
+                <a:solidFill>
+                  <a:srgbClr val="6B7280"/>
+                </a:solidFill>
+                <a:latin typeface="Meiryo" pitchFamily="34" charset="0"/>
+                <a:ea typeface="Meiryo" pitchFamily="34" charset="-122"/>
+                <a:cs typeface="Meiryo" pitchFamily="34" charset="-120"/>
+              </a:rPr>
+              <a:t>マニュアル（/manual）＋遠慮なくフィードバック</a:t>
+            </a:r>
+            <a:endParaRPr lang="en-US" sz="1350" dirty="0"/>
+          </a:p>
+        </p:txBody>
+      </p:sp>
+      <p:sp>
+        <p:nvSpPr>
+          <p:cNvPr id="13" name="Shape 11"/>
+          <p:cNvSpPr/>
+          <p:nvPr/>
+        </p:nvSpPr>
+        <p:spPr>
+          <a:xfrm>
+            <a:off x="640080" y="4160520"/>
+            <a:ext cx="10881360" cy="1005840"/>
+          </a:xfrm>
+          <a:prstGeom prst="roundRect">
+            <a:avLst>
+              <a:gd name="adj" fmla="val 9091"/>
+            </a:avLst>
+          </a:prstGeom>
+          <a:solidFill>
+            <a:srgbClr val="F7F9FD"/>
+          </a:solidFill>
+          <a:ln w="12700">
+            <a:solidFill>
+              <a:srgbClr val="E4E9F2"/>
+            </a:solidFill>
+            <a:prstDash val="solid"/>
+          </a:ln>
+          <a:effectLst>
+            <a:outerShdw sx="100000" sy="100000" kx="0" ky="0" algn="bl" rotWithShape="0" blurRad="114300" dist="38100" dir="5400000">
+              <a:srgbClr val="8FA0C4">
+                <a:alpha val="30000"/>
+              </a:srgbClr>
+            </a:outerShdw>
+          </a:effectLst>
+        </p:spPr>
+      </p:sp>
+      <p:sp>
+        <p:nvSpPr>
+          <p:cNvPr id="14" name="Text 12"/>
+          <p:cNvSpPr/>
+          <p:nvPr/>
+        </p:nvSpPr>
+        <p:spPr>
+          <a:xfrm>
+            <a:off x="960120" y="4416552"/>
+            <a:ext cx="502920" cy="502920"/>
+          </a:xfrm>
+          <a:prstGeom prst="ellipse">
+            <a:avLst/>
+          </a:prstGeom>
+          <a:solidFill>
+            <a:srgbClr val="1E2761"/>
+          </a:solidFill>
+          <a:ln/>
+          <a:effectLst>
+            <a:outerShdw sx="100000" sy="100000" kx="0" ky="0" algn="bl" rotWithShape="0" blurRad="88900" dist="25400" dir="5400000">
+              <a:srgbClr val="8FA0C4">
+                <a:alpha val="28000"/>
+              </a:srgbClr>
+            </a:outerShdw>
+          </a:effectLst>
+        </p:spPr>
+        <p:txBody>
+          <a:bodyPr wrap="square" lIns="0" tIns="0" rIns="0" bIns="0" rtlCol="0" anchor="ctr"/>
+          <a:lstStyle/>
+          <a:p>
+            <a:pPr algn="ctr" indent="0" marL="0">
+              <a:buNone/>
+            </a:pPr>
+            <a:r>
+              <a:rPr lang="en-US" sz="1300" b="1" dirty="0">
+                <a:solidFill>
+                  <a:srgbClr val="FFFFFF"/>
+                </a:solidFill>
+                <a:latin typeface="Meiryo" pitchFamily="34" charset="0"/>
+                <a:ea typeface="Meiryo" pitchFamily="34" charset="-122"/>
+                <a:cs typeface="Meiryo" pitchFamily="34" charset="-120"/>
+              </a:rPr>
+              <a:t>3</a:t>
+            </a:r>
+            <a:endParaRPr lang="en-US" sz="1300" dirty="0"/>
+          </a:p>
+        </p:txBody>
+      </p:sp>
+      <p:sp>
+        <p:nvSpPr>
+          <p:cNvPr id="15" name="Text 13"/>
+          <p:cNvSpPr/>
+          <p:nvPr/>
+        </p:nvSpPr>
+        <p:spPr>
+          <a:xfrm>
+            <a:off x="1691640" y="4160520"/>
+            <a:ext cx="3566160" cy="1005840"/>
+          </a:xfrm>
+          <a:prstGeom prst="rect">
+            <a:avLst/>
+          </a:prstGeom>
+          <a:noFill/>
+          <a:ln/>
+        </p:spPr>
+        <p:txBody>
+          <a:bodyPr wrap="square" lIns="0" tIns="0" rIns="0" bIns="0" rtlCol="0" anchor="ctr"/>
+          <a:lstStyle/>
+          <a:p>
+            <a:pPr indent="0" marL="0">
+              <a:buNone/>
+            </a:pPr>
+            <a:r>
+              <a:rPr lang="en-US" sz="1550" b="1" dirty="0">
+                <a:solidFill>
+                  <a:srgbClr val="141A33"/>
+                </a:solidFill>
+                <a:latin typeface="Meiryo" pitchFamily="34" charset="0"/>
+                <a:ea typeface="Meiryo" pitchFamily="34" charset="-122"/>
+                <a:cs typeface="Meiryo" pitchFamily="34" charset="-120"/>
+              </a:rPr>
+              <a:t>まず慣れる</a:t>
+            </a:r>
+            <a:endParaRPr lang="en-US" sz="1550" dirty="0"/>
+          </a:p>
+        </p:txBody>
+      </p:sp>
+      <p:sp>
+        <p:nvSpPr>
+          <p:cNvPr id="16" name="Text 14"/>
+          <p:cNvSpPr/>
+          <p:nvPr/>
+        </p:nvSpPr>
+        <p:spPr>
+          <a:xfrm>
+            <a:off x="5394960" y="4160520"/>
+            <a:ext cx="5852160" cy="1005840"/>
+          </a:xfrm>
+          <a:prstGeom prst="rect">
+            <a:avLst/>
+          </a:prstGeom>
+          <a:noFill/>
+          <a:ln/>
+        </p:spPr>
+        <p:txBody>
+          <a:bodyPr wrap="square" lIns="0" tIns="0" rIns="0" bIns="0" rtlCol="0" anchor="ctr"/>
+          <a:lstStyle/>
+          <a:p>
+            <a:pPr indent="0" marL="0">
+              <a:buNone/>
+            </a:pPr>
+            <a:r>
+              <a:rPr lang="en-US" sz="1350" dirty="0">
+                <a:solidFill>
+                  <a:srgbClr val="6B7280"/>
+                </a:solidFill>
+                <a:latin typeface="Meiryo" pitchFamily="34" charset="0"/>
+                <a:ea typeface="Meiryo" pitchFamily="34" charset="-122"/>
+                <a:cs typeface="Meiryo" pitchFamily="34" charset="-120"/>
+              </a:rPr>
+              <a:t>各チーム1〜2件から。抱え込まず報連相で共有</a:t>
+            </a:r>
+            <a:endParaRPr lang="en-US" sz="1350" dirty="0"/>
+          </a:p>
+        </p:txBody>
+      </p:sp>
+      <p:sp>
+        <p:nvSpPr>
+          <p:cNvPr id="17" name="Text 15"/>
+          <p:cNvSpPr/>
+          <p:nvPr/>
+        </p:nvSpPr>
+        <p:spPr>
+          <a:xfrm>
+            <a:off x="640080" y="5806440"/>
+            <a:ext cx="10972800" cy="365760"/>
+          </a:xfrm>
+          <a:prstGeom prst="rect">
+            <a:avLst/>
+          </a:prstGeom>
+          <a:noFill/>
+          <a:ln/>
+        </p:spPr>
+        <p:txBody>
+          <a:bodyPr wrap="square" lIns="0" tIns="0" rIns="0" bIns="0" rtlCol="0" anchor="ctr"/>
+          <a:lstStyle/>
+          <a:p>
+            <a:pPr indent="0" marL="0">
+              <a:buNone/>
+            </a:pPr>
+            <a:r>
+              <a:rPr lang="en-US" sz="1400" b="1" dirty="0">
+                <a:solidFill>
+                  <a:srgbClr val="1E2761"/>
+                </a:solidFill>
+                <a:latin typeface="Meiryo" pitchFamily="34" charset="0"/>
+                <a:ea typeface="Meiryo" pitchFamily="34" charset="-122"/>
+                <a:cs typeface="Meiryo" pitchFamily="34" charset="-120"/>
+              </a:rPr>
+              <a:t>「完璧じゃなくていい、一緒に育てる」— それが今日一番のお願いです。</a:t>
+            </a:r>
+            <a:endParaRPr lang="en-US" sz="1400" dirty="0"/>
+          </a:p>
+        </p:txBody>
+      </p:sp>
+    </p:spTree>
+  </p:cSld>
+  <p:clrMapOvr>
+    <a:masterClrMapping/>
+  </p:clrMapOvr>
+</p:sld>
+</file>
+
+<file path=ppt/slides/slide26.xml><?xml version="1.0" encoding="utf-8"?>
+<p:sld xmlns:a="http://schemas.openxmlformats.org/drawingml/2006/main" xmlns:r="http://schemas.openxmlformats.org/officeDocument/2006/relationships" xmlns:p="http://schemas.openxmlformats.org/presentationml/2006/main">
+  <p:cSld name="Slide 26">
     <p:bg>
       <p:bgPr>
         <a:solidFill>
